--- a/docs/presentation/sample-CS310-meeting-brief.pptx
+++ b/docs/presentation/sample-CS310-meeting-brief.pptx
@@ -17,9 +17,14 @@
     <p:sldId id="265" r:id="rId11"/>
     <p:sldId id="266" r:id="rId12"/>
     <p:sldId id="267" r:id="rId13"/>
+    <p:sldId id="268" r:id="rId14"/>
+    <p:sldId id="269" r:id="rId15"/>
+    <p:sldId id="270" r:id="rId16"/>
+    <p:sldId id="271" r:id="rId17"/>
+    <p:sldId id="272" r:id="rId18"/>
   </p:sldIdLst>
   <p:notesMasterIdLst>
-    <p:notesMasterId r:id="rId14"/>
+    <p:notesMasterId r:id="rId19"/>
   </p:notesMasterIdLst>
   <p:sldSz cx="9144000" cy="5143500"/>
   <p:notesSz cx="5143500" cy="9144000"/>
@@ -116,6 +121,247 @@
     </a:lvl9pPr>
   </p:defaultTextStyle>
 </p:presentation>
+</file>
+
+<file path=ppt/charts/chart1.xml><?xml version="1.0" encoding="utf-8"?>
+<c:chartSpace xmlns:c="http://schemas.openxmlformats.org/drawingml/2006/chart" xmlns:a="http://schemas.openxmlformats.org/drawingml/2006/main" xmlns:r="http://schemas.openxmlformats.org/officeDocument/2006/relationships">
+  <c:date1904 val="0"/>
+  <c:roundedCorners val="1"/>
+  <c:chart>
+    <c:autoTitleDeleted val="1"/>
+    <c:plotArea>
+      <c:layout/>
+      <c:barChart>
+        <c:barDir val="bar"/>
+        <c:grouping val="clustered"/>
+        <c:varyColors val="0"/>
+        <c:ser>
+          <c:idx val="0"/>
+          <c:order val="0"/>
+          <c:tx>
+            <c:strRef>
+              <c:f>Sheet1!$B$1</c:f>
+              <c:strCache>
+                <c:ptCount val="1"/>
+                <c:pt idx="0">
+                  <c:v>Postings</c:v>
+                </c:pt>
+              </c:strCache>
+            </c:strRef>
+          </c:tx>
+          <c:spPr>
+            <a:solidFill>
+              <a:srgbClr val="1C7C54"/>
+            </a:solidFill>
+            <a:effectLst/>
+          </c:spPr>
+          <c:invertIfNegative val="0"/>
+          <c:dLbls>
+            <c:numFmt formatCode="0" sourceLinked="0"/>
+            <c:txPr>
+              <a:bodyPr/>
+              <a:lstStyle/>
+              <a:p>
+                <a:pPr>
+                  <a:defRPr b="0" i="0" strike="noStrike" sz="1100" u="none">
+                    <a:solidFill>
+                      <a:srgbClr val="0F2A20"/>
+                    </a:solidFill>
+                    <a:latin typeface="Calibri"/>
+                  </a:defRPr>
+                </a:pPr>
+              </a:p>
+            </c:txPr>
+            <c:showLegendKey val="0"/>
+            <c:showVal val="1"/>
+            <c:showCatName val="0"/>
+            <c:showSerName val="0"/>
+            <c:showPercent val="0"/>
+            <c:showBubbleSize val="0"/>
+            <c:showLeaderLines val="0"/>
+          </c:dLbls>
+          <c:cat>
+            <c:multiLvlStrRef>
+              <c:f>Sheet1!$A$2:$A$6</c:f>
+              <c:multiLvlStrCache>
+                <c:ptCount val="5"/>
+                <c:lvl>
+                  <c:pt idx="0">
+                    <c:v>stakeholders</c:v>
+                  </c:pt>
+                  <c:pt idx="1">
+                    <c:v>dashboards</c:v>
+                  </c:pt>
+                  <c:pt idx="2">
+                    <c:v>SQL</c:v>
+                  </c:pt>
+                  <c:pt idx="3">
+                    <c:v>statistics</c:v>
+                  </c:pt>
+                  <c:pt idx="4">
+                    <c:v>Python</c:v>
+                  </c:pt>
+                </c:lvl>
+              </c:multiLvlStrCache>
+            </c:multiLvlStrRef>
+          </c:cat>
+          <c:val>
+            <c:numRef>
+              <c:f>Sheet1!$B$2:$B$6</c:f>
+              <c:numCache>
+                <c:formatCode>General</c:formatCode>
+                <c:ptCount val="5"/>
+                <c:pt idx="0">
+                  <c:v>6</c:v>
+                </c:pt>
+                <c:pt idx="1">
+                  <c:v>5</c:v>
+                </c:pt>
+                <c:pt idx="2">
+                  <c:v>4</c:v>
+                </c:pt>
+                <c:pt idx="3">
+                  <c:v>4</c:v>
+                </c:pt>
+                <c:pt idx="4">
+                  <c:v>3</c:v>
+                </c:pt>
+              </c:numCache>
+            </c:numRef>
+          </c:val>
+        </c:ser>
+        <c:dLbls>
+          <c:numFmt formatCode="0" sourceLinked="0"/>
+          <c:txPr>
+            <a:bodyPr/>
+            <a:lstStyle/>
+            <a:p>
+              <a:pPr>
+                <a:defRPr b="0" i="0" strike="noStrike" sz="1100" u="none">
+                  <a:solidFill>
+                    <a:srgbClr val="0F2A20"/>
+                  </a:solidFill>
+                  <a:latin typeface="Calibri"/>
+                </a:defRPr>
+              </a:pPr>
+            </a:p>
+          </c:txPr>
+          <c:showLegendKey val="0"/>
+          <c:showVal val="1"/>
+          <c:showCatName val="0"/>
+          <c:showSerName val="0"/>
+          <c:showPercent val="0"/>
+          <c:showBubbleSize val="0"/>
+          <c:showLeaderLines val="0"/>
+        </c:dLbls>
+        <c:gapWidth val="60"/>
+        <c:overlap val="0"/>
+        <c:axId val="2094734554"/>
+        <c:axId val="2094734552"/>
+        <c:axId val="2094734556"/>
+      </c:barChart>
+      <c:catAx>
+        <c:axId val="2094734554"/>
+        <c:scaling>
+          <c:orientation val="maxMin"/>
+        </c:scaling>
+        <c:delete val="0"/>
+        <c:axPos val="l"/>
+        <c:numFmt formatCode="General" sourceLinked="1"/>
+        <c:majorTickMark val="out"/>
+        <c:minorTickMark val="none"/>
+        <c:tickLblPos val="nextTo"/>
+        <c:spPr>
+          <a:ln w="12700" cap="flat">
+            <a:noFill/>
+            <a:prstDash val="solid"/>
+            <a:round/>
+          </a:ln>
+        </c:spPr>
+        <c:txPr>
+          <a:bodyPr/>
+          <a:lstStyle/>
+          <a:p>
+            <a:pPr>
+              <a:defRPr sz="1200" b="0" i="0" u="none" strike="noStrike">
+                <a:solidFill>
+                  <a:srgbClr val="0F2A20"/>
+                </a:solidFill>
+                <a:latin typeface="Calibri"/>
+              </a:defRPr>
+            </a:pPr>
+            <a:endParaRPr lang="en-US"/>
+          </a:p>
+        </c:txPr>
+        <c:crossAx val="2094734552"/>
+        <c:crosses val="autoZero"/>
+        <c:auto val="1"/>
+        <c:lblAlgn val="ctr"/>
+        <c:noMultiLvlLbl val="1"/>
+      </c:catAx>
+      <c:valAx>
+        <c:axId val="2094734552"/>
+        <c:scaling>
+          <c:orientation val="minMax"/>
+          <c:max val="9"/>
+          <c:min val="0"/>
+        </c:scaling>
+        <c:delete val="1"/>
+        <c:axPos val="b"/>
+        <c:numFmt formatCode="General" sourceLinked="0"/>
+        <c:majorTickMark val="out"/>
+        <c:minorTickMark val="none"/>
+        <c:tickLblPos val="low"/>
+        <c:spPr>
+          <a:ln w="12700" cap="flat">
+            <a:solidFill>
+              <a:srgbClr val="888888"/>
+            </a:solidFill>
+            <a:prstDash val="solid"/>
+            <a:round/>
+          </a:ln>
+        </c:spPr>
+        <c:txPr>
+          <a:bodyPr/>
+          <a:lstStyle/>
+          <a:p>
+            <a:pPr>
+              <a:defRPr sz="1200" b="0" i="0" u="none" strike="noStrike">
+                <a:solidFill>
+                  <a:srgbClr val="000000"/>
+                </a:solidFill>
+                <a:latin typeface="Arial"/>
+              </a:defRPr>
+            </a:pPr>
+            <a:endParaRPr lang="en-US"/>
+          </a:p>
+        </c:txPr>
+        <c:crossAx val="2094734554"/>
+        <c:crosses val="autoZero"/>
+        <c:crossBetween val="between"/>
+      </c:valAx>
+      <c:spPr>
+        <a:noFill/>
+        <a:ln>
+          <a:noFill/>
+        </a:ln>
+        <a:effectLst/>
+      </c:spPr>
+    </c:plotArea>
+    <c:plotVisOnly val="1"/>
+    <c:dispBlanksAs val="span"/>
+  </c:chart>
+  <c:spPr>
+    <a:noFill/>
+    <a:ln>
+      <a:noFill/>
+    </a:ln>
+    <a:effectLst/>
+  </c:spPr>
+  <c:externalData r:id="rId1">
+    <c:autoUpdate val="0"/>
+  </c:externalData>
+</c:chartSpace>
 </file>
 
 <file path=ppt/notesMasters/notesMaster1.xml><?xml version="1.0" encoding="utf-8"?>
@@ -819,6 +1065,446 @@
 </p:notes>
 </file>
 
+<file path=ppt/notesSlides/notesSlide13.xml><?xml version="1.0" encoding="utf-8"?>
+<p:notes xmlns:a="http://schemas.openxmlformats.org/drawingml/2006/main" xmlns:r="http://schemas.openxmlformats.org/officeDocument/2006/relationships" xmlns:p="http://schemas.openxmlformats.org/presentationml/2006/main">
+  <p:cSld>
+    <p:spTree>
+      <p:nvGrpSpPr>
+        <p:cNvPr id="1" name=""/>
+        <p:cNvGrpSpPr/>
+        <p:nvPr/>
+      </p:nvGrpSpPr>
+      <p:grpSpPr>
+        <a:xfrm>
+          <a:off x="0" y="0"/>
+          <a:ext cx="0" cy="0"/>
+          <a:chOff x="0" y="0"/>
+          <a:chExt cx="0" cy="0"/>
+        </a:xfrm>
+      </p:grpSpPr>
+      <p:sp>
+        <p:nvSpPr>
+          <p:cNvPr id="2" name="Slide Image Placeholder 1"/>
+          <p:cNvSpPr>
+            <a:spLocks noGrp="1" noRot="1" noChangeAspect="1"/>
+          </p:cNvSpPr>
+          <p:nvPr>
+            <p:ph type="sldImg"/>
+          </p:nvPr>
+        </p:nvSpPr>
+        <p:spPr/>
+      </p:sp>
+      <p:sp>
+        <p:nvSpPr>
+          <p:cNvPr id="3" name="Notes Placeholder 2"/>
+          <p:cNvSpPr>
+            <a:spLocks noGrp="1"/>
+          </p:cNvSpPr>
+          <p:nvPr>
+            <p:ph type="body" idx="1"/>
+          </p:nvPr>
+        </p:nvSpPr>
+        <p:spPr/>
+        <p:txBody>
+          <a:bodyPr/>
+          <a:lstStyle/>
+          <a:p>
+            <a:r>
+              <a:rPr lang="en-US" dirty="0"/>
+              <a:t>Every quotation above exists verbatim in the retained posting text.</a:t>
+            </a:r>
+            <a:endParaRPr lang="en-US" dirty="0"/>
+          </a:p>
+        </p:txBody>
+      </p:sp>
+      <p:sp>
+        <p:nvSpPr>
+          <p:cNvPr id="4" name="Slide Number Placeholder 3"/>
+          <p:cNvSpPr>
+            <a:spLocks noGrp="1"/>
+          </p:cNvSpPr>
+          <p:nvPr>
+            <p:ph type="sldNum" sz="quarter" idx="10"/>
+          </p:nvPr>
+        </p:nvSpPr>
+        <p:spPr/>
+        <p:txBody>
+          <a:bodyPr/>
+          <a:lstStyle/>
+          <a:p>
+            <a:fld id="{F7021451-1387-4CA6-816F-3879F97B5CBC}" type="slidenum">
+              <a:rPr lang="en-US"/>
+              <a:t>13</a:t>
+            </a:fld>
+            <a:endParaRPr lang="en-US"/>
+          </a:p>
+        </p:txBody>
+      </p:sp>
+    </p:spTree>
+    <p:extLst>
+      <p:ext uri="{BB962C8B-B14F-4D97-AF65-F5344CB8AC3E}">
+        <p14:creationId xmlns:p14="http://schemas.microsoft.com/office/powerpoint/2010/main" val="1024086991"/>
+      </p:ext>
+    </p:extLst>
+  </p:cSld>
+  <p:clrMapOvr>
+    <a:masterClrMapping/>
+  </p:clrMapOvr>
+</p:notes>
+</file>
+
+<file path=ppt/notesSlides/notesSlide14.xml><?xml version="1.0" encoding="utf-8"?>
+<p:notes xmlns:a="http://schemas.openxmlformats.org/drawingml/2006/main" xmlns:r="http://schemas.openxmlformats.org/officeDocument/2006/relationships" xmlns:p="http://schemas.openxmlformats.org/presentationml/2006/main">
+  <p:cSld>
+    <p:spTree>
+      <p:nvGrpSpPr>
+        <p:cNvPr id="1" name=""/>
+        <p:cNvGrpSpPr/>
+        <p:nvPr/>
+      </p:nvGrpSpPr>
+      <p:grpSpPr>
+        <a:xfrm>
+          <a:off x="0" y="0"/>
+          <a:ext cx="0" cy="0"/>
+          <a:chOff x="0" y="0"/>
+          <a:chExt cx="0" cy="0"/>
+        </a:xfrm>
+      </p:grpSpPr>
+      <p:sp>
+        <p:nvSpPr>
+          <p:cNvPr id="2" name="Slide Image Placeholder 1"/>
+          <p:cNvSpPr>
+            <a:spLocks noGrp="1" noRot="1" noChangeAspect="1"/>
+          </p:cNvSpPr>
+          <p:nvPr>
+            <p:ph type="sldImg"/>
+          </p:nvPr>
+        </p:nvSpPr>
+        <p:spPr/>
+      </p:sp>
+      <p:sp>
+        <p:nvSpPr>
+          <p:cNvPr id="3" name="Notes Placeholder 2"/>
+          <p:cNvSpPr>
+            <a:spLocks noGrp="1"/>
+          </p:cNvSpPr>
+          <p:nvPr>
+            <p:ph type="body" idx="1"/>
+          </p:nvPr>
+        </p:nvSpPr>
+        <p:spPr/>
+        <p:txBody>
+          <a:bodyPr/>
+          <a:lstStyle/>
+          <a:p>
+            <a:r>
+              <a:rPr lang="en-US" dirty="0"/>
+              <a:t>Every quotation above exists verbatim in the retained posting text.</a:t>
+            </a:r>
+            <a:endParaRPr lang="en-US" dirty="0"/>
+          </a:p>
+        </p:txBody>
+      </p:sp>
+      <p:sp>
+        <p:nvSpPr>
+          <p:cNvPr id="4" name="Slide Number Placeholder 3"/>
+          <p:cNvSpPr>
+            <a:spLocks noGrp="1"/>
+          </p:cNvSpPr>
+          <p:nvPr>
+            <p:ph type="sldNum" sz="quarter" idx="10"/>
+          </p:nvPr>
+        </p:nvSpPr>
+        <p:spPr/>
+        <p:txBody>
+          <a:bodyPr/>
+          <a:lstStyle/>
+          <a:p>
+            <a:fld id="{F7021451-1387-4CA6-816F-3879F97B5CBC}" type="slidenum">
+              <a:rPr lang="en-US"/>
+              <a:t>14</a:t>
+            </a:fld>
+            <a:endParaRPr lang="en-US"/>
+          </a:p>
+        </p:txBody>
+      </p:sp>
+    </p:spTree>
+    <p:extLst>
+      <p:ext uri="{BB962C8B-B14F-4D97-AF65-F5344CB8AC3E}">
+        <p14:creationId xmlns:p14="http://schemas.microsoft.com/office/powerpoint/2010/main" val="1024086991"/>
+      </p:ext>
+    </p:extLst>
+  </p:cSld>
+  <p:clrMapOvr>
+    <a:masterClrMapping/>
+  </p:clrMapOvr>
+</p:notes>
+</file>
+
+<file path=ppt/notesSlides/notesSlide15.xml><?xml version="1.0" encoding="utf-8"?>
+<p:notes xmlns:a="http://schemas.openxmlformats.org/drawingml/2006/main" xmlns:r="http://schemas.openxmlformats.org/officeDocument/2006/relationships" xmlns:p="http://schemas.openxmlformats.org/presentationml/2006/main">
+  <p:cSld>
+    <p:spTree>
+      <p:nvGrpSpPr>
+        <p:cNvPr id="1" name=""/>
+        <p:cNvGrpSpPr/>
+        <p:nvPr/>
+      </p:nvGrpSpPr>
+      <p:grpSpPr>
+        <a:xfrm>
+          <a:off x="0" y="0"/>
+          <a:ext cx="0" cy="0"/>
+          <a:chOff x="0" y="0"/>
+          <a:chExt cx="0" cy="0"/>
+        </a:xfrm>
+      </p:grpSpPr>
+      <p:sp>
+        <p:nvSpPr>
+          <p:cNvPr id="2" name="Slide Image Placeholder 1"/>
+          <p:cNvSpPr>
+            <a:spLocks noGrp="1" noRot="1" noChangeAspect="1"/>
+          </p:cNvSpPr>
+          <p:nvPr>
+            <p:ph type="sldImg"/>
+          </p:nvPr>
+        </p:nvSpPr>
+        <p:spPr/>
+      </p:sp>
+      <p:sp>
+        <p:nvSpPr>
+          <p:cNvPr id="3" name="Notes Placeholder 2"/>
+          <p:cNvSpPr>
+            <a:spLocks noGrp="1"/>
+          </p:cNvSpPr>
+          <p:nvPr>
+            <p:ph type="body" idx="1"/>
+          </p:nvPr>
+        </p:nvSpPr>
+        <p:spPr/>
+        <p:txBody>
+          <a:bodyPr/>
+          <a:lstStyle/>
+          <a:p>
+            <a:r>
+              <a:rPr lang="en-US" dirty="0"/>
+              <a:t>Every quotation above exists verbatim in the retained posting text.</a:t>
+            </a:r>
+            <a:endParaRPr lang="en-US" dirty="0"/>
+          </a:p>
+        </p:txBody>
+      </p:sp>
+      <p:sp>
+        <p:nvSpPr>
+          <p:cNvPr id="4" name="Slide Number Placeholder 3"/>
+          <p:cNvSpPr>
+            <a:spLocks noGrp="1"/>
+          </p:cNvSpPr>
+          <p:nvPr>
+            <p:ph type="sldNum" sz="quarter" idx="10"/>
+          </p:nvPr>
+        </p:nvSpPr>
+        <p:spPr/>
+        <p:txBody>
+          <a:bodyPr/>
+          <a:lstStyle/>
+          <a:p>
+            <a:fld id="{F7021451-1387-4CA6-816F-3879F97B5CBC}" type="slidenum">
+              <a:rPr lang="en-US"/>
+              <a:t>15</a:t>
+            </a:fld>
+            <a:endParaRPr lang="en-US"/>
+          </a:p>
+        </p:txBody>
+      </p:sp>
+    </p:spTree>
+    <p:extLst>
+      <p:ext uri="{BB962C8B-B14F-4D97-AF65-F5344CB8AC3E}">
+        <p14:creationId xmlns:p14="http://schemas.microsoft.com/office/powerpoint/2010/main" val="1024086991"/>
+      </p:ext>
+    </p:extLst>
+  </p:cSld>
+  <p:clrMapOvr>
+    <a:masterClrMapping/>
+  </p:clrMapOvr>
+</p:notes>
+</file>
+
+<file path=ppt/notesSlides/notesSlide16.xml><?xml version="1.0" encoding="utf-8"?>
+<p:notes xmlns:a="http://schemas.openxmlformats.org/drawingml/2006/main" xmlns:r="http://schemas.openxmlformats.org/officeDocument/2006/relationships" xmlns:p="http://schemas.openxmlformats.org/presentationml/2006/main">
+  <p:cSld>
+    <p:spTree>
+      <p:nvGrpSpPr>
+        <p:cNvPr id="1" name=""/>
+        <p:cNvGrpSpPr/>
+        <p:nvPr/>
+      </p:nvGrpSpPr>
+      <p:grpSpPr>
+        <a:xfrm>
+          <a:off x="0" y="0"/>
+          <a:ext cx="0" cy="0"/>
+          <a:chOff x="0" y="0"/>
+          <a:chExt cx="0" cy="0"/>
+        </a:xfrm>
+      </p:grpSpPr>
+      <p:sp>
+        <p:nvSpPr>
+          <p:cNvPr id="2" name="Slide Image Placeholder 1"/>
+          <p:cNvSpPr>
+            <a:spLocks noGrp="1" noRot="1" noChangeAspect="1"/>
+          </p:cNvSpPr>
+          <p:nvPr>
+            <p:ph type="sldImg"/>
+          </p:nvPr>
+        </p:nvSpPr>
+        <p:spPr/>
+      </p:sp>
+      <p:sp>
+        <p:nvSpPr>
+          <p:cNvPr id="3" name="Notes Placeholder 2"/>
+          <p:cNvSpPr>
+            <a:spLocks noGrp="1"/>
+          </p:cNvSpPr>
+          <p:nvPr>
+            <p:ph type="body" idx="1"/>
+          </p:nvPr>
+        </p:nvSpPr>
+        <p:spPr/>
+        <p:txBody>
+          <a:bodyPr/>
+          <a:lstStyle/>
+          <a:p>
+            <a:r>
+              <a:rPr lang="en-US" dirty="0"/>
+              <a:t>Every quotation above exists verbatim in the retained posting text.</a:t>
+            </a:r>
+            <a:endParaRPr lang="en-US" dirty="0"/>
+          </a:p>
+        </p:txBody>
+      </p:sp>
+      <p:sp>
+        <p:nvSpPr>
+          <p:cNvPr id="4" name="Slide Number Placeholder 3"/>
+          <p:cNvSpPr>
+            <a:spLocks noGrp="1"/>
+          </p:cNvSpPr>
+          <p:nvPr>
+            <p:ph type="sldNum" sz="quarter" idx="10"/>
+          </p:nvPr>
+        </p:nvSpPr>
+        <p:spPr/>
+        <p:txBody>
+          <a:bodyPr/>
+          <a:lstStyle/>
+          <a:p>
+            <a:fld id="{F7021451-1387-4CA6-816F-3879F97B5CBC}" type="slidenum">
+              <a:rPr lang="en-US"/>
+              <a:t>16</a:t>
+            </a:fld>
+            <a:endParaRPr lang="en-US"/>
+          </a:p>
+        </p:txBody>
+      </p:sp>
+    </p:spTree>
+    <p:extLst>
+      <p:ext uri="{BB962C8B-B14F-4D97-AF65-F5344CB8AC3E}">
+        <p14:creationId xmlns:p14="http://schemas.microsoft.com/office/powerpoint/2010/main" val="1024086991"/>
+      </p:ext>
+    </p:extLst>
+  </p:cSld>
+  <p:clrMapOvr>
+    <a:masterClrMapping/>
+  </p:clrMapOvr>
+</p:notes>
+</file>
+
+<file path=ppt/notesSlides/notesSlide17.xml><?xml version="1.0" encoding="utf-8"?>
+<p:notes xmlns:a="http://schemas.openxmlformats.org/drawingml/2006/main" xmlns:r="http://schemas.openxmlformats.org/officeDocument/2006/relationships" xmlns:p="http://schemas.openxmlformats.org/presentationml/2006/main">
+  <p:cSld>
+    <p:spTree>
+      <p:nvGrpSpPr>
+        <p:cNvPr id="1" name=""/>
+        <p:cNvGrpSpPr/>
+        <p:nvPr/>
+      </p:nvGrpSpPr>
+      <p:grpSpPr>
+        <a:xfrm>
+          <a:off x="0" y="0"/>
+          <a:ext cx="0" cy="0"/>
+          <a:chOff x="0" y="0"/>
+          <a:chExt cx="0" cy="0"/>
+        </a:xfrm>
+      </p:grpSpPr>
+      <p:sp>
+        <p:nvSpPr>
+          <p:cNvPr id="2" name="Slide Image Placeholder 1"/>
+          <p:cNvSpPr>
+            <a:spLocks noGrp="1" noRot="1" noChangeAspect="1"/>
+          </p:cNvSpPr>
+          <p:nvPr>
+            <p:ph type="sldImg"/>
+          </p:nvPr>
+        </p:nvSpPr>
+        <p:spPr/>
+      </p:sp>
+      <p:sp>
+        <p:nvSpPr>
+          <p:cNvPr id="3" name="Notes Placeholder 2"/>
+          <p:cNvSpPr>
+            <a:spLocks noGrp="1"/>
+          </p:cNvSpPr>
+          <p:nvPr>
+            <p:ph type="body" idx="1"/>
+          </p:nvPr>
+        </p:nvSpPr>
+        <p:spPr/>
+        <p:txBody>
+          <a:bodyPr/>
+          <a:lstStyle/>
+          <a:p>
+            <a:r>
+              <a:rPr lang="en-US" dirty="0"/>
+              <a:t>Every quotation above exists verbatim in the retained posting text.</a:t>
+            </a:r>
+            <a:endParaRPr lang="en-US" dirty="0"/>
+          </a:p>
+        </p:txBody>
+      </p:sp>
+      <p:sp>
+        <p:nvSpPr>
+          <p:cNvPr id="4" name="Slide Number Placeholder 3"/>
+          <p:cNvSpPr>
+            <a:spLocks noGrp="1"/>
+          </p:cNvSpPr>
+          <p:nvPr>
+            <p:ph type="sldNum" sz="quarter" idx="10"/>
+          </p:nvPr>
+        </p:nvSpPr>
+        <p:spPr/>
+        <p:txBody>
+          <a:bodyPr/>
+          <a:lstStyle/>
+          <a:p>
+            <a:fld id="{F7021451-1387-4CA6-816F-3879F97B5CBC}" type="slidenum">
+              <a:rPr lang="en-US"/>
+              <a:t>17</a:t>
+            </a:fld>
+            <a:endParaRPr lang="en-US"/>
+          </a:p>
+        </p:txBody>
+      </p:sp>
+    </p:spTree>
+    <p:extLst>
+      <p:ext uri="{BB962C8B-B14F-4D97-AF65-F5344CB8AC3E}">
+        <p14:creationId xmlns:p14="http://schemas.microsoft.com/office/powerpoint/2010/main" val="1024086991"/>
+      </p:ext>
+    </p:extLst>
+  </p:cSld>
+  <p:clrMapOvr>
+    <a:masterClrMapping/>
+  </p:clrMapOvr>
+</p:notes>
+</file>
+
 <file path=ppt/notesSlides/notesSlide2.xml><?xml version="1.0" encoding="utf-8"?>
 <p:notes xmlns:a="http://schemas.openxmlformats.org/drawingml/2006/main" xmlns:r="http://schemas.openxmlformats.org/officeDocument/2006/relationships" xmlns:p="http://schemas.openxmlformats.org/presentationml/2006/main">
   <p:cSld>
@@ -1129,7 +1815,7 @@
           <a:p>
             <a:r>
               <a:rPr lang="en-US" dirty="0"/>
-              <a:t>Coverage stages are the lecturer's reviewed judgement with cited course evidence.</a:t>
+              <a:t>One series, one colour, the count written on each bar. Bar length is the count over the reviewed denominator, not a market share.</a:t>
             </a:r>
             <a:endParaRPr lang="en-US" dirty="0"/>
           </a:p>
@@ -1217,7 +1903,7 @@
           <a:p>
             <a:r>
               <a:rPr lang="en-US" dirty="0"/>
-              <a:t>Keeping the course unchanged is a valid option.</a:t>
+              <a:t>Coverage stages are the lecturer's reviewed judgement with cited course evidence.</a:t>
             </a:r>
             <a:endParaRPr lang="en-US" dirty="0"/>
           </a:p>
@@ -1305,7 +1991,7 @@
           <a:p>
             <a:r>
               <a:rPr lang="en-US" dirty="0"/>
-              <a:t/>
+              <a:t>Keeping the course unchanged is a valid option.</a:t>
             </a:r>
             <a:endParaRPr lang="en-US" dirty="0"/>
           </a:p>
@@ -1393,7 +2079,7 @@
           <a:p>
             <a:r>
               <a:rPr lang="en-US" dirty="0"/>
-              <a:t>Every quotation above exists verbatim in the retained posting text.</a:t>
+              <a:t/>
             </a:r>
             <a:endParaRPr lang="en-US" dirty="0"/>
           </a:p>
@@ -1836,7 +2522,7 @@
     <p:bg>
       <p:bgPr>
         <a:solidFill>
-          <a:srgbClr val="14213D"/>
+          <a:srgbClr val="0F2A20"/>
         </a:solidFill>
       </p:bgPr>
     </p:bg>
@@ -1883,11 +2569,11 @@
             <a:r>
               <a:rPr lang="en-US" sz="3400" b="1" dirty="0">
                 <a:solidFill>
-                  <a:srgbClr val="FBFBF8"/>
-                </a:solidFill>
-                <a:latin typeface="Georgia" pitchFamily="34" charset="0"/>
-                <a:ea typeface="Georgia" pitchFamily="34" charset="-122"/>
-                <a:cs typeface="Georgia" pitchFamily="34" charset="-120"/>
+                  <a:srgbClr val="FFFFFF"/>
+                </a:solidFill>
+                <a:latin typeface="Calibri" pitchFamily="34" charset="0"/>
+                <a:ea typeface="Calibri" pitchFamily="34" charset="-122"/>
+                <a:cs typeface="Calibri" pitchFamily="34" charset="-120"/>
               </a:rPr>
               <a:t>CS310 Data Visualisation</a:t>
             </a:r>
@@ -1924,7 +2610,7 @@
             <a:r>
               <a:rPr lang="en-US" sz="2000" dirty="0">
                 <a:solidFill>
-                  <a:srgbClr val="BFD8D5"/>
+                  <a:srgbClr val="B9CDBF"/>
                 </a:solidFill>
                 <a:latin typeface="Calibri" pitchFamily="34" charset="0"/>
                 <a:ea typeface="Calibri" pitchFamily="34" charset="-122"/>
@@ -1965,7 +2651,7 @@
             <a:r>
               <a:rPr lang="en-US" sz="1400" dirty="0">
                 <a:solidFill>
-                  <a:srgbClr val="BFD8D5"/>
+                  <a:srgbClr val="B9CDBF"/>
                 </a:solidFill>
                 <a:latin typeface="Calibri" pitchFamily="34" charset="0"/>
                 <a:ea typeface="Calibri" pitchFamily="34" charset="-122"/>
@@ -1982,7 +2668,7 @@
             <a:r>
               <a:rPr lang="en-US" sz="1400" dirty="0">
                 <a:solidFill>
-                  <a:srgbClr val="BFD8D5"/>
+                  <a:srgbClr val="B9CDBF"/>
                 </a:solidFill>
                 <a:latin typeface="Calibri" pitchFamily="34" charset="0"/>
                 <a:ea typeface="Calibri" pitchFamily="34" charset="-122"/>
@@ -2021,7 +2707,7 @@
             <a:r>
               <a:rPr lang="en-US" sz="1000" dirty="0">
                 <a:solidFill>
-                  <a:srgbClr val="9AD4A8"/>
+                  <a:srgbClr val="B9CDBF"/>
                 </a:solidFill>
                 <a:latin typeface="Calibri" pitchFamily="34" charset="0"/>
                 <a:ea typeface="Calibri" pitchFamily="34" charset="-122"/>
@@ -2047,7 +2733,7 @@
     <p:bg>
       <p:bgPr>
         <a:solidFill>
-          <a:srgbClr val="FBFBF8"/>
+          <a:srgbClr val="FFFFFF"/>
         </a:solidFill>
       </p:bgPr>
     </p:bg>
@@ -2094,13 +2780,13 @@
             <a:r>
               <a:rPr lang="en-US" sz="2600" b="1" dirty="0">
                 <a:solidFill>
-                  <a:srgbClr val="14213D"/>
-                </a:solidFill>
-                <a:latin typeface="Georgia" pitchFamily="34" charset="0"/>
-                <a:ea typeface="Georgia" pitchFamily="34" charset="-122"/>
-                <a:cs typeface="Georgia" pitchFamily="34" charset="-120"/>
-              </a:rPr>
-              <a:t>Receipt: Data Analyst, Intern</a:t>
+                  <a:srgbClr val="0F2A20"/>
+                </a:solidFill>
+                <a:latin typeface="Calibri" pitchFamily="34" charset="0"/>
+                <a:ea typeface="Calibri" pitchFamily="34" charset="-122"/>
+                <a:cs typeface="Calibri" pitchFamily="34" charset="-120"/>
+              </a:rPr>
+              <a:t>Receipt: Data Analyst, Global Growth</a:t>
             </a:r>
             <a:endParaRPr lang="en-US" sz="2600" dirty="0"/>
           </a:p>
@@ -2139,13 +2825,13 @@
             <a:r>
               <a:rPr lang="en-US" sz="1400" dirty="0">
                 <a:solidFill>
-                  <a:srgbClr val="1F2937"/>
-                </a:solidFill>
-                <a:latin typeface="Calibri" pitchFamily="34" charset="0"/>
-                <a:ea typeface="Calibri" pitchFamily="34" charset="-122"/>
-                <a:cs typeface="Calibri" pitchFamily="34" charset="-120"/>
-              </a:rPr>
-              <a:t>Stripe. Published 2026-10-01. Recorded 2026-07-01T10:00:00Z from Saved sample: real postings from the stripe Greenhouse board, retrieved 2026-10-09 and truncated for the demo.</a:t>
+                  <a:srgbClr val="0F2A20"/>
+                </a:solidFill>
+                <a:latin typeface="Calibri" pitchFamily="34" charset="0"/>
+                <a:ea typeface="Calibri" pitchFamily="34" charset="-122"/>
+                <a:cs typeface="Calibri" pitchFamily="34" charset="-120"/>
+              </a:rPr>
+              <a:t>Stripe. Published 2026-09-25. Recorded 2026-07-01T10:00:00Z from Saved sample: real postings from the stripe Greenhouse board, retrieved 2026-10-09 and truncated for the demo.</a:t>
             </a:r>
             <a:endParaRPr lang="en-US" sz="1400" dirty="0"/>
           </a:p>
@@ -2160,13 +2846,13 @@
             <a:r>
               <a:rPr lang="en-US" sz="1400" dirty="0">
                 <a:solidFill>
-                  <a:srgbClr val="1F2937"/>
-                </a:solidFill>
-                <a:latin typeface="Calibri" pitchFamily="34" charset="0"/>
-                <a:ea typeface="Calibri" pitchFamily="34" charset="-122"/>
-                <a:cs typeface="Calibri" pitchFamily="34" charset="-120"/>
-              </a:rPr>
-              <a:t>Link: https://stripe.com/jobs/search?gh_jid=8194291</a:t>
+                  <a:srgbClr val="0F2A20"/>
+                </a:solidFill>
+                <a:latin typeface="Calibri" pitchFamily="34" charset="0"/>
+                <a:ea typeface="Calibri" pitchFamily="34" charset="-122"/>
+                <a:cs typeface="Calibri" pitchFamily="34" charset="-120"/>
+              </a:rPr>
+              <a:t>Link: https://stripe.com/jobs/search?gh_jid=8230296</a:t>
             </a:r>
             <a:endParaRPr lang="en-US" sz="1400" dirty="0"/>
           </a:p>
@@ -2181,13 +2867,55 @@
             <a:r>
               <a:rPr lang="en-US" sz="1400" dirty="0">
                 <a:solidFill>
-                  <a:srgbClr val="1F2937"/>
-                </a:solidFill>
-                <a:latin typeface="Calibri" pitchFamily="34" charset="0"/>
-                <a:ea typeface="Calibri" pitchFamily="34" charset="-122"/>
-                <a:cs typeface="Calibri" pitchFamily="34" charset="-120"/>
-              </a:rPr>
-              <a:t>"You'll build metrics, scalable data pipelines, dashboards, and reports to inform and run the business." (dashboards, unclear)</a:t>
+                  <a:srgbClr val="0F2A20"/>
+                </a:solidFill>
+                <a:latin typeface="Calibri" pitchFamily="34" charset="0"/>
+                <a:ea typeface="Calibri" pitchFamily="34" charset="-122"/>
+                <a:cs typeface="Calibri" pitchFamily="34" charset="-120"/>
+              </a:rPr>
+              <a:t>"From building scalable dashboards to crafting compelling data narratives, your insights will directly shape how we run and grow the business." (dashboards, unclear)</a:t>
+            </a:r>
+            <a:endParaRPr lang="en-US" sz="1400" dirty="0"/>
+          </a:p>
+          <a:p>
+            <a:pPr marL="342900" indent="-342900">
+              <a:spcAft>
+                <a:spcPts val="600"/>
+              </a:spcAft>
+              <a:buSzPct val="100000"/>
+              <a:buChar char="•"/>
+            </a:pPr>
+            <a:r>
+              <a:rPr lang="en-US" sz="1400" dirty="0">
+                <a:solidFill>
+                  <a:srgbClr val="0F2A20"/>
+                </a:solidFill>
+                <a:latin typeface="Calibri" pitchFamily="34" charset="0"/>
+                <a:ea typeface="Calibri" pitchFamily="34" charset="-122"/>
+                <a:cs typeface="Calibri" pitchFamily="34" charset="-120"/>
+              </a:rPr>
+              <a:t>"- Build and maintain the metric definitions, metadata, and business context that enable AI agents to help stakeholders explore trusted data and answer business questions independently" (stakeholders, unclear)</a:t>
+            </a:r>
+            <a:endParaRPr lang="en-US" sz="1400" dirty="0"/>
+          </a:p>
+          <a:p>
+            <a:pPr marL="342900" indent="-342900">
+              <a:spcAft>
+                <a:spcPts val="600"/>
+              </a:spcAft>
+              <a:buSzPct val="100000"/>
+              <a:buChar char="•"/>
+            </a:pPr>
+            <a:r>
+              <a:rPr lang="en-US" sz="1400" dirty="0">
+                <a:solidFill>
+                  <a:srgbClr val="0F2A20"/>
+                </a:solidFill>
+                <a:latin typeface="Calibri" pitchFamily="34" charset="0"/>
+                <a:ea typeface="Calibri" pitchFamily="34" charset="-122"/>
+                <a:cs typeface="Calibri" pitchFamily="34" charset="-120"/>
+              </a:rPr>
+              <a:t>"We're looking for a data analyst with a passion for analyzing data, statistical models, and running experiments to drive impact." (statistics, unclear)</a:t>
             </a:r>
             <a:endParaRPr lang="en-US" sz="1400" dirty="0"/>
           </a:p>
@@ -2220,13 +2948,13 @@
             <a:r>
               <a:rPr lang="en-US" sz="900" dirty="0">
                 <a:solidFill>
-                  <a:srgbClr val="6A7179"/>
-                </a:solidFill>
-                <a:latin typeface="Calibri" pitchFamily="34" charset="0"/>
-                <a:ea typeface="Calibri" pitchFamily="34" charset="-122"/>
-                <a:cs typeface="Calibri" pitchFamily="34" charset="-120"/>
-              </a:rPr>
-              <a:t>Generated by Lyceum from saved data; editable; no AI-written text.  10 / 12</a:t>
+                  <a:srgbClr val="4E6258"/>
+                </a:solidFill>
+                <a:latin typeface="Calibri" pitchFamily="34" charset="0"/>
+                <a:ea typeface="Calibri" pitchFamily="34" charset="-122"/>
+                <a:cs typeface="Calibri" pitchFamily="34" charset="-120"/>
+              </a:rPr>
+              <a:t>Generated by Lyceum from saved data; editable; no AI-written text.  10 / 17</a:t>
             </a:r>
             <a:endParaRPr lang="en-US" sz="900" dirty="0"/>
           </a:p>
@@ -2246,7 +2974,7 @@
     <p:bg>
       <p:bgPr>
         <a:solidFill>
-          <a:srgbClr val="FBFBF8"/>
+          <a:srgbClr val="FFFFFF"/>
         </a:solidFill>
       </p:bgPr>
     </p:bg>
@@ -2293,13 +3021,13 @@
             <a:r>
               <a:rPr lang="en-US" sz="2600" b="1" dirty="0">
                 <a:solidFill>
-                  <a:srgbClr val="14213D"/>
-                </a:solidFill>
-                <a:latin typeface="Georgia" pitchFamily="34" charset="0"/>
-                <a:ea typeface="Georgia" pitchFamily="34" charset="-122"/>
-                <a:cs typeface="Georgia" pitchFamily="34" charset="-120"/>
-              </a:rPr>
-              <a:t>Receipt: Data Analyst, NYC</a:t>
+                  <a:srgbClr val="0F2A20"/>
+                </a:solidFill>
+                <a:latin typeface="Calibri" pitchFamily="34" charset="0"/>
+                <a:ea typeface="Calibri" pitchFamily="34" charset="-122"/>
+                <a:cs typeface="Calibri" pitchFamily="34" charset="-120"/>
+              </a:rPr>
+              <a:t>Receipt: Data Analyst, Intern</a:t>
             </a:r>
             <a:endParaRPr lang="en-US" sz="2600" dirty="0"/>
           </a:p>
@@ -2338,13 +3066,13 @@
             <a:r>
               <a:rPr lang="en-US" sz="1400" dirty="0">
                 <a:solidFill>
-                  <a:srgbClr val="1F2937"/>
-                </a:solidFill>
-                <a:latin typeface="Calibri" pitchFamily="34" charset="0"/>
-                <a:ea typeface="Calibri" pitchFamily="34" charset="-122"/>
-                <a:cs typeface="Calibri" pitchFamily="34" charset="-120"/>
-              </a:rPr>
-              <a:t>Stripe. Published 2026-09-10. Recorded 2026-07-01T10:00:00Z from Saved sample: real postings from the stripe Greenhouse board, retrieved 2026-10-09 and truncated for the demo.</a:t>
+                  <a:srgbClr val="0F2A20"/>
+                </a:solidFill>
+                <a:latin typeface="Calibri" pitchFamily="34" charset="0"/>
+                <a:ea typeface="Calibri" pitchFamily="34" charset="-122"/>
+                <a:cs typeface="Calibri" pitchFamily="34" charset="-120"/>
+              </a:rPr>
+              <a:t>Stripe. Published 2026-10-01. Recorded 2026-07-01T10:00:00Z from Saved sample: real postings from the stripe Greenhouse board, retrieved 2026-10-09 and truncated for the demo.</a:t>
             </a:r>
             <a:endParaRPr lang="en-US" sz="1400" dirty="0"/>
           </a:p>
@@ -2359,13 +3087,13 @@
             <a:r>
               <a:rPr lang="en-US" sz="1400" dirty="0">
                 <a:solidFill>
-                  <a:srgbClr val="1F2937"/>
-                </a:solidFill>
-                <a:latin typeface="Calibri" pitchFamily="34" charset="0"/>
-                <a:ea typeface="Calibri" pitchFamily="34" charset="-122"/>
-                <a:cs typeface="Calibri" pitchFamily="34" charset="-120"/>
-              </a:rPr>
-              <a:t>Link: https://stripe.com/jobs/search?gh_jid=8189909</a:t>
+                  <a:srgbClr val="0F2A20"/>
+                </a:solidFill>
+                <a:latin typeface="Calibri" pitchFamily="34" charset="0"/>
+                <a:ea typeface="Calibri" pitchFamily="34" charset="-122"/>
+                <a:cs typeface="Calibri" pitchFamily="34" charset="-120"/>
+              </a:rPr>
+              <a:t>Link: https://stripe.com/jobs/search?gh_jid=8194291</a:t>
             </a:r>
             <a:endParaRPr lang="en-US" sz="1400" dirty="0"/>
           </a:p>
@@ -2380,76 +3108,13 @@
             <a:r>
               <a:rPr lang="en-US" sz="1400" dirty="0">
                 <a:solidFill>
-                  <a:srgbClr val="1F2937"/>
-                </a:solidFill>
-                <a:latin typeface="Calibri" pitchFamily="34" charset="0"/>
-                <a:ea typeface="Calibri" pitchFamily="34" charset="-122"/>
-                <a:cs typeface="Calibri" pitchFamily="34" charset="-120"/>
-              </a:rPr>
-              <a:t>"- Proficiency in SQL, including complex query optimization and data modeling" (SQL, unclear)</a:t>
-            </a:r>
-            <a:endParaRPr lang="en-US" sz="1400" dirty="0"/>
-          </a:p>
-          <a:p>
-            <a:pPr marL="342900" indent="-342900">
-              <a:spcAft>
-                <a:spcPts val="600"/>
-              </a:spcAft>
-              <a:buSzPct val="100000"/>
-              <a:buChar char="•"/>
-            </a:pPr>
-            <a:r>
-              <a:rPr lang="en-US" sz="1400" dirty="0">
-                <a:solidFill>
-                  <a:srgbClr val="1F2937"/>
-                </a:solidFill>
-                <a:latin typeface="Calibri" pitchFamily="34" charset="0"/>
-                <a:ea typeface="Calibri" pitchFamily="34" charset="-122"/>
-                <a:cs typeface="Calibri" pitchFamily="34" charset="-120"/>
-              </a:rPr>
-              <a:t>"- Proficiency in Scala or Python for data pipeline development, not just scripting and SQL" (Python, unclear)</a:t>
-            </a:r>
-            <a:endParaRPr lang="en-US" sz="1400" dirty="0"/>
-          </a:p>
-          <a:p>
-            <a:pPr marL="342900" indent="-342900">
-              <a:spcAft>
-                <a:spcPts val="600"/>
-              </a:spcAft>
-              <a:buSzPct val="100000"/>
-              <a:buChar char="•"/>
-            </a:pPr>
-            <a:r>
-              <a:rPr lang="en-US" sz="1400" dirty="0">
-                <a:solidFill>
-                  <a:srgbClr val="1F2937"/>
-                </a:solidFill>
-                <a:latin typeface="Calibri" pitchFamily="34" charset="0"/>
-                <a:ea typeface="Calibri" pitchFamily="34" charset="-122"/>
-                <a:cs typeface="Calibri" pitchFamily="34" charset="-120"/>
-              </a:rPr>
-              <a:t>"- Develop dashboards, automated reporting, and thoughtful analyses to surface actionable insights and proactively identify business opportunities" (dashboards, unclear)</a:t>
-            </a:r>
-            <a:endParaRPr lang="en-US" sz="1400" dirty="0"/>
-          </a:p>
-          <a:p>
-            <a:pPr marL="342900" indent="-342900">
-              <a:spcAft>
-                <a:spcPts val="600"/>
-              </a:spcAft>
-              <a:buSzPct val="100000"/>
-              <a:buChar char="•"/>
-            </a:pPr>
-            <a:r>
-              <a:rPr lang="en-US" sz="1400" dirty="0">
-                <a:solidFill>
-                  <a:srgbClr val="1F2937"/>
-                </a:solidFill>
-                <a:latin typeface="Calibri" pitchFamily="34" charset="0"/>
-                <a:ea typeface="Calibri" pitchFamily="34" charset="-122"/>
-                <a:cs typeface="Calibri" pitchFamily="34" charset="-120"/>
-              </a:rPr>
-              <a:t>"- Build and maintain the metric definitions, metadata, and business context that enable AI agents to help stakeholders explore trusted data and answer business questions independently" (stakeholders, unclear)</a:t>
+                  <a:srgbClr val="0F2A20"/>
+                </a:solidFill>
+                <a:latin typeface="Calibri" pitchFamily="34" charset="0"/>
+                <a:ea typeface="Calibri" pitchFamily="34" charset="-122"/>
+                <a:cs typeface="Calibri" pitchFamily="34" charset="-120"/>
+              </a:rPr>
+              <a:t>"You'll build metrics, scalable data pipelines, dashboards, and reports to inform and run the business." (dashboards, unclear)</a:t>
             </a:r>
             <a:endParaRPr lang="en-US" sz="1400" dirty="0"/>
           </a:p>
@@ -2482,13 +3147,13 @@
             <a:r>
               <a:rPr lang="en-US" sz="900" dirty="0">
                 <a:solidFill>
-                  <a:srgbClr val="6A7179"/>
-                </a:solidFill>
-                <a:latin typeface="Calibri" pitchFamily="34" charset="0"/>
-                <a:ea typeface="Calibri" pitchFamily="34" charset="-122"/>
-                <a:cs typeface="Calibri" pitchFamily="34" charset="-120"/>
-              </a:rPr>
-              <a:t>Generated by Lyceum from saved data; editable; no AI-written text.  11 / 12</a:t>
+                  <a:srgbClr val="4E6258"/>
+                </a:solidFill>
+                <a:latin typeface="Calibri" pitchFamily="34" charset="0"/>
+                <a:ea typeface="Calibri" pitchFamily="34" charset="-122"/>
+                <a:cs typeface="Calibri" pitchFamily="34" charset="-120"/>
+              </a:rPr>
+              <a:t>Generated by Lyceum from saved data; editable; no AI-written text.  11 / 17</a:t>
             </a:r>
             <a:endParaRPr lang="en-US" sz="900" dirty="0"/>
           </a:p>
@@ -2508,7 +3173,7 @@
     <p:bg>
       <p:bgPr>
         <a:solidFill>
-          <a:srgbClr val="FBFBF8"/>
+          <a:srgbClr val="FFFFFF"/>
         </a:solidFill>
       </p:bgPr>
     </p:bg>
@@ -2555,13 +3220,13 @@
             <a:r>
               <a:rPr lang="en-US" sz="2600" b="1" dirty="0">
                 <a:solidFill>
-                  <a:srgbClr val="14213D"/>
-                </a:solidFill>
-                <a:latin typeface="Georgia" pitchFamily="34" charset="0"/>
-                <a:ea typeface="Georgia" pitchFamily="34" charset="-122"/>
-                <a:cs typeface="Georgia" pitchFamily="34" charset="-120"/>
-              </a:rPr>
-              <a:t>Receipt: Data Analyst, Payments</a:t>
+                  <a:srgbClr val="0F2A20"/>
+                </a:solidFill>
+                <a:latin typeface="Calibri" pitchFamily="34" charset="0"/>
+                <a:ea typeface="Calibri" pitchFamily="34" charset="-122"/>
+                <a:cs typeface="Calibri" pitchFamily="34" charset="-120"/>
+              </a:rPr>
+              <a:t>Receipt: Data Analyst, NYC</a:t>
             </a:r>
             <a:endParaRPr lang="en-US" sz="2600" dirty="0"/>
           </a:p>
@@ -2600,13 +3265,13 @@
             <a:r>
               <a:rPr lang="en-US" sz="1400" dirty="0">
                 <a:solidFill>
-                  <a:srgbClr val="1F2937"/>
-                </a:solidFill>
-                <a:latin typeface="Calibri" pitchFamily="34" charset="0"/>
-                <a:ea typeface="Calibri" pitchFamily="34" charset="-122"/>
-                <a:cs typeface="Calibri" pitchFamily="34" charset="-120"/>
-              </a:rPr>
-              <a:t>Stripe. Published 2026-07-13. Recorded 2026-07-01T10:00:00Z from Saved sample: real postings from the stripe Greenhouse board, retrieved 2026-10-09 and truncated for the demo.</a:t>
+                  <a:srgbClr val="0F2A20"/>
+                </a:solidFill>
+                <a:latin typeface="Calibri" pitchFamily="34" charset="0"/>
+                <a:ea typeface="Calibri" pitchFamily="34" charset="-122"/>
+                <a:cs typeface="Calibri" pitchFamily="34" charset="-120"/>
+              </a:rPr>
+              <a:t>Stripe. Published 2026-09-10. Recorded 2026-07-01T10:00:00Z from Saved sample: real postings from the stripe Greenhouse board, retrieved 2026-10-09 and truncated for the demo.</a:t>
             </a:r>
             <a:endParaRPr lang="en-US" sz="1400" dirty="0"/>
           </a:p>
@@ -2621,13 +3286,13 @@
             <a:r>
               <a:rPr lang="en-US" sz="1400" dirty="0">
                 <a:solidFill>
-                  <a:srgbClr val="1F2937"/>
-                </a:solidFill>
-                <a:latin typeface="Calibri" pitchFamily="34" charset="0"/>
-                <a:ea typeface="Calibri" pitchFamily="34" charset="-122"/>
-                <a:cs typeface="Calibri" pitchFamily="34" charset="-120"/>
-              </a:rPr>
-              <a:t>Link: https://stripe.com/jobs/search?gh_jid=8044924</a:t>
+                  <a:srgbClr val="0F2A20"/>
+                </a:solidFill>
+                <a:latin typeface="Calibri" pitchFamily="34" charset="0"/>
+                <a:ea typeface="Calibri" pitchFamily="34" charset="-122"/>
+                <a:cs typeface="Calibri" pitchFamily="34" charset="-120"/>
+              </a:rPr>
+              <a:t>Link: https://stripe.com/jobs/search?gh_jid=8189909</a:t>
             </a:r>
             <a:endParaRPr lang="en-US" sz="1400" dirty="0"/>
           </a:p>
@@ -2642,13 +3307,76 @@
             <a:r>
               <a:rPr lang="en-US" sz="1400" dirty="0">
                 <a:solidFill>
-                  <a:srgbClr val="1F2937"/>
-                </a:solidFill>
-                <a:latin typeface="Calibri" pitchFamily="34" charset="0"/>
-                <a:ea typeface="Calibri" pitchFamily="34" charset="-122"/>
-                <a:cs typeface="Calibri" pitchFamily="34" charset="-120"/>
-              </a:rPr>
-              <a:t>"• Create fee explainability to internal and external stakeholders and host education sessions for internal teams to scale knowledge" (stakeholders, unclear)</a:t>
+                  <a:srgbClr val="0F2A20"/>
+                </a:solidFill>
+                <a:latin typeface="Calibri" pitchFamily="34" charset="0"/>
+                <a:ea typeface="Calibri" pitchFamily="34" charset="-122"/>
+                <a:cs typeface="Calibri" pitchFamily="34" charset="-120"/>
+              </a:rPr>
+              <a:t>"- Proficiency in SQL, including complex query optimization and data modeling" (SQL, unclear)</a:t>
+            </a:r>
+            <a:endParaRPr lang="en-US" sz="1400" dirty="0"/>
+          </a:p>
+          <a:p>
+            <a:pPr marL="342900" indent="-342900">
+              <a:spcAft>
+                <a:spcPts val="600"/>
+              </a:spcAft>
+              <a:buSzPct val="100000"/>
+              <a:buChar char="•"/>
+            </a:pPr>
+            <a:r>
+              <a:rPr lang="en-US" sz="1400" dirty="0">
+                <a:solidFill>
+                  <a:srgbClr val="0F2A20"/>
+                </a:solidFill>
+                <a:latin typeface="Calibri" pitchFamily="34" charset="0"/>
+                <a:ea typeface="Calibri" pitchFamily="34" charset="-122"/>
+                <a:cs typeface="Calibri" pitchFamily="34" charset="-120"/>
+              </a:rPr>
+              <a:t>"- Proficiency in Scala or Python for data pipeline development, not just scripting and SQL" (Python, unclear)</a:t>
+            </a:r>
+            <a:endParaRPr lang="en-US" sz="1400" dirty="0"/>
+          </a:p>
+          <a:p>
+            <a:pPr marL="342900" indent="-342900">
+              <a:spcAft>
+                <a:spcPts val="600"/>
+              </a:spcAft>
+              <a:buSzPct val="100000"/>
+              <a:buChar char="•"/>
+            </a:pPr>
+            <a:r>
+              <a:rPr lang="en-US" sz="1400" dirty="0">
+                <a:solidFill>
+                  <a:srgbClr val="0F2A20"/>
+                </a:solidFill>
+                <a:latin typeface="Calibri" pitchFamily="34" charset="0"/>
+                <a:ea typeface="Calibri" pitchFamily="34" charset="-122"/>
+                <a:cs typeface="Calibri" pitchFamily="34" charset="-120"/>
+              </a:rPr>
+              <a:t>"- Develop dashboards, automated reporting, and thoughtful analyses to surface actionable insights and proactively identify business opportunities" (dashboards, unclear)</a:t>
+            </a:r>
+            <a:endParaRPr lang="en-US" sz="1400" dirty="0"/>
+          </a:p>
+          <a:p>
+            <a:pPr marL="342900" indent="-342900">
+              <a:spcAft>
+                <a:spcPts val="600"/>
+              </a:spcAft>
+              <a:buSzPct val="100000"/>
+              <a:buChar char="•"/>
+            </a:pPr>
+            <a:r>
+              <a:rPr lang="en-US" sz="1400" dirty="0">
+                <a:solidFill>
+                  <a:srgbClr val="0F2A20"/>
+                </a:solidFill>
+                <a:latin typeface="Calibri" pitchFamily="34" charset="0"/>
+                <a:ea typeface="Calibri" pitchFamily="34" charset="-122"/>
+                <a:cs typeface="Calibri" pitchFamily="34" charset="-120"/>
+              </a:rPr>
+              <a:t>"- Build and maintain the metric definitions, metadata, and business context that enable AI agents to help stakeholders explore trusted data and answer business questions independently" (stakeholders, unclear)</a:t>
             </a:r>
             <a:endParaRPr lang="en-US" sz="1400" dirty="0"/>
           </a:p>
@@ -2681,13 +3409,13 @@
             <a:r>
               <a:rPr lang="en-US" sz="900" dirty="0">
                 <a:solidFill>
-                  <a:srgbClr val="6A7179"/>
-                </a:solidFill>
-                <a:latin typeface="Calibri" pitchFamily="34" charset="0"/>
-                <a:ea typeface="Calibri" pitchFamily="34" charset="-122"/>
-                <a:cs typeface="Calibri" pitchFamily="34" charset="-120"/>
-              </a:rPr>
-              <a:t>Generated by Lyceum from saved data; editable; no AI-written text.  12 / 12</a:t>
+                  <a:srgbClr val="4E6258"/>
+                </a:solidFill>
+                <a:latin typeface="Calibri" pitchFamily="34" charset="0"/>
+                <a:ea typeface="Calibri" pitchFamily="34" charset="-122"/>
+                <a:cs typeface="Calibri" pitchFamily="34" charset="-120"/>
+              </a:rPr>
+              <a:t>Generated by Lyceum from saved data; editable; no AI-written text.  12 / 17</a:t>
             </a:r>
             <a:endParaRPr lang="en-US" sz="900" dirty="0"/>
           </a:p>
@@ -2701,13 +3429,13 @@
 </p:sld>
 </file>
 
-<file path=ppt/slides/slide2.xml><?xml version="1.0" encoding="utf-8"?>
+<file path=ppt/slides/slide13.xml><?xml version="1.0" encoding="utf-8"?>
 <p:sld xmlns:a="http://schemas.openxmlformats.org/drawingml/2006/main" xmlns:r="http://schemas.openxmlformats.org/officeDocument/2006/relationships" xmlns:p="http://schemas.openxmlformats.org/presentationml/2006/main">
-  <p:cSld name="Slide 2">
+  <p:cSld name="Slide 13">
     <p:bg>
       <p:bgPr>
         <a:solidFill>
-          <a:srgbClr val="FBFBF8"/>
+          <a:srgbClr val="FFFFFF"/>
         </a:solidFill>
       </p:bgPr>
     </p:bg>
@@ -2754,13 +3482,13 @@
             <a:r>
               <a:rPr lang="en-US" sz="2600" b="1" dirty="0">
                 <a:solidFill>
-                  <a:srgbClr val="14213D"/>
-                </a:solidFill>
-                <a:latin typeface="Georgia" pitchFamily="34" charset="0"/>
-                <a:ea typeface="Georgia" pitchFamily="34" charset="-122"/>
-                <a:cs typeface="Georgia" pitchFamily="34" charset="-120"/>
-              </a:rPr>
-              <a:t>Decision requested</a:t>
+                  <a:srgbClr val="0F2A20"/>
+                </a:solidFill>
+                <a:latin typeface="Calibri" pitchFamily="34" charset="0"/>
+                <a:ea typeface="Calibri" pitchFamily="34" charset="-122"/>
+                <a:cs typeface="Calibri" pitchFamily="34" charset="-120"/>
+              </a:rPr>
+              <a:t>Receipt: Data Analyst, Payments</a:t>
             </a:r>
             <a:endParaRPr lang="en-US" sz="2600" dirty="0"/>
           </a:p>
@@ -2775,7 +3503,7 @@
         <p:spPr>
           <a:xfrm>
             <a:off x="457200" y="1143000"/>
-            <a:ext cx="8229600" cy="3383280"/>
+            <a:ext cx="8229600" cy="3429000"/>
           </a:xfrm>
           <a:prstGeom prst="rect">
             <a:avLst/>
@@ -2789,44 +3517,67 @@
           </a:bodyPr>
           <a:lstStyle/>
           <a:p>
-            <a:pPr indent="0" marL="0">
-              <a:buNone/>
-            </a:pPr>
-            <a:r>
-              <a:rPr lang="en-US" sz="1600" dirty="0">
-                <a:solidFill>
-                  <a:srgbClr val="1F2937"/>
-                </a:solidFill>
-                <a:latin typeface="Calibri" pitchFamily="34" charset="0"/>
-                <a:ea typeface="Calibri" pitchFamily="34" charset="-122"/>
-                <a:cs typeface="Calibri" pitchFamily="34" charset="-120"/>
-              </a:rPr>
-              <a:t>Small refresh within existing hours.</a:t>
-            </a:r>
-            <a:endParaRPr lang="en-US" sz="1600" dirty="0"/>
-          </a:p>
-          <a:p>
-            <a:pPr indent="0" marL="0">
-              <a:buNone/>
-            </a:pPr>
-            <a:endParaRPr lang="en-US" sz="1600" dirty="0"/>
-          </a:p>
-          <a:p>
-            <a:pPr indent="0" marL="0">
-              <a:buNone/>
-            </a:pPr>
-            <a:r>
-              <a:rPr lang="en-US" sz="1600" dirty="0">
-                <a:solidFill>
-                  <a:srgbClr val="1F2937"/>
-                </a:solidFill>
-                <a:latin typeface="Calibri" pitchFamily="34" charset="0"/>
-                <a:ea typeface="Calibri" pitchFamily="34" charset="-122"/>
-                <a:cs typeface="Calibri" pitchFamily="34" charset="-120"/>
-              </a:rPr>
-              <a:t>Add a dashboard exercise in week 6 within existing hours; keep the statistics foundation.</a:t>
-            </a:r>
-            <a:endParaRPr lang="en-US" sz="1600" dirty="0"/>
+            <a:pPr marL="342900" indent="-342900">
+              <a:spcAft>
+                <a:spcPts val="600"/>
+              </a:spcAft>
+              <a:buSzPct val="100000"/>
+              <a:buChar char="•"/>
+            </a:pPr>
+            <a:r>
+              <a:rPr lang="en-US" sz="1400" dirty="0">
+                <a:solidFill>
+                  <a:srgbClr val="0F2A20"/>
+                </a:solidFill>
+                <a:latin typeface="Calibri" pitchFamily="34" charset="0"/>
+                <a:ea typeface="Calibri" pitchFamily="34" charset="-122"/>
+                <a:cs typeface="Calibri" pitchFamily="34" charset="-120"/>
+              </a:rPr>
+              <a:t>Stripe. Published 2026-07-13. Recorded 2026-07-01T10:00:00Z from Saved sample: real postings from the stripe Greenhouse board, retrieved 2026-10-09 and truncated for the demo.</a:t>
+            </a:r>
+            <a:endParaRPr lang="en-US" sz="1400" dirty="0"/>
+          </a:p>
+          <a:p>
+            <a:pPr marL="342900" indent="-342900">
+              <a:spcAft>
+                <a:spcPts val="600"/>
+              </a:spcAft>
+              <a:buSzPct val="100000"/>
+              <a:buChar char="•"/>
+            </a:pPr>
+            <a:r>
+              <a:rPr lang="en-US" sz="1400" dirty="0">
+                <a:solidFill>
+                  <a:srgbClr val="0F2A20"/>
+                </a:solidFill>
+                <a:latin typeface="Calibri" pitchFamily="34" charset="0"/>
+                <a:ea typeface="Calibri" pitchFamily="34" charset="-122"/>
+                <a:cs typeface="Calibri" pitchFamily="34" charset="-120"/>
+              </a:rPr>
+              <a:t>Link: https://stripe.com/jobs/search?gh_jid=8044924</a:t>
+            </a:r>
+            <a:endParaRPr lang="en-US" sz="1400" dirty="0"/>
+          </a:p>
+          <a:p>
+            <a:pPr marL="342900" indent="-342900">
+              <a:spcAft>
+                <a:spcPts val="600"/>
+              </a:spcAft>
+              <a:buSzPct val="100000"/>
+              <a:buChar char="•"/>
+            </a:pPr>
+            <a:r>
+              <a:rPr lang="en-US" sz="1400" dirty="0">
+                <a:solidFill>
+                  <a:srgbClr val="0F2A20"/>
+                </a:solidFill>
+                <a:latin typeface="Calibri" pitchFamily="34" charset="0"/>
+                <a:ea typeface="Calibri" pitchFamily="34" charset="-122"/>
+                <a:cs typeface="Calibri" pitchFamily="34" charset="-120"/>
+              </a:rPr>
+              <a:t>"• Create fee explainability to internal and external stakeholders and host education sessions for internal teams to scale knowledge" (stakeholders, unclear)</a:t>
+            </a:r>
+            <a:endParaRPr lang="en-US" sz="1400" dirty="0"/>
           </a:p>
         </p:txBody>
       </p:sp>
@@ -2857,13 +3608,13 @@
             <a:r>
               <a:rPr lang="en-US" sz="900" dirty="0">
                 <a:solidFill>
-                  <a:srgbClr val="6A7179"/>
-                </a:solidFill>
-                <a:latin typeface="Calibri" pitchFamily="34" charset="0"/>
-                <a:ea typeface="Calibri" pitchFamily="34" charset="-122"/>
-                <a:cs typeface="Calibri" pitchFamily="34" charset="-120"/>
-              </a:rPr>
-              <a:t>Generated by Lyceum from saved data; editable; no AI-written text.  2 / 12</a:t>
+                  <a:srgbClr val="4E6258"/>
+                </a:solidFill>
+                <a:latin typeface="Calibri" pitchFamily="34" charset="0"/>
+                <a:ea typeface="Calibri" pitchFamily="34" charset="-122"/>
+                <a:cs typeface="Calibri" pitchFamily="34" charset="-120"/>
+              </a:rPr>
+              <a:t>Generated by Lyceum from saved data; editable; no AI-written text.  13 / 17</a:t>
             </a:r>
             <a:endParaRPr lang="en-US" sz="900" dirty="0"/>
           </a:p>
@@ -2877,13 +3628,13 @@
 </p:sld>
 </file>
 
-<file path=ppt/slides/slide3.xml><?xml version="1.0" encoding="utf-8"?>
+<file path=ppt/slides/slide14.xml><?xml version="1.0" encoding="utf-8"?>
 <p:sld xmlns:a="http://schemas.openxmlformats.org/drawingml/2006/main" xmlns:r="http://schemas.openxmlformats.org/officeDocument/2006/relationships" xmlns:p="http://schemas.openxmlformats.org/presentationml/2006/main">
-  <p:cSld name="Slide 3">
+  <p:cSld name="Slide 14">
     <p:bg>
       <p:bgPr>
         <a:solidFill>
-          <a:srgbClr val="FBFBF8"/>
+          <a:srgbClr val="FFFFFF"/>
         </a:solidFill>
       </p:bgPr>
     </p:bg>
@@ -2930,13 +3681,13 @@
             <a:r>
               <a:rPr lang="en-US" sz="2600" b="1" dirty="0">
                 <a:solidFill>
-                  <a:srgbClr val="14213D"/>
-                </a:solidFill>
-                <a:latin typeface="Georgia" pitchFamily="34" charset="0"/>
-                <a:ea typeface="Georgia" pitchFamily="34" charset="-122"/>
-                <a:cs typeface="Georgia" pitchFamily="34" charset="-120"/>
-              </a:rPr>
-              <a:t>Evidence base</a:t>
+                  <a:srgbClr val="0F2A20"/>
+                </a:solidFill>
+                <a:latin typeface="Calibri" pitchFamily="34" charset="0"/>
+                <a:ea typeface="Calibri" pitchFamily="34" charset="-122"/>
+                <a:cs typeface="Calibri" pitchFamily="34" charset="-120"/>
+              </a:rPr>
+              <a:t>Receipt: Data Science Manager, Finance and Strategy</a:t>
             </a:r>
             <a:endParaRPr lang="en-US" sz="2600" dirty="0"/>
           </a:p>
@@ -2975,13 +3726,13 @@
             <a:r>
               <a:rPr lang="en-US" sz="1400" dirty="0">
                 <a:solidFill>
-                  <a:srgbClr val="1F2937"/>
-                </a:solidFill>
-                <a:latin typeface="Calibri" pitchFamily="34" charset="0"/>
-                <a:ea typeface="Calibri" pitchFamily="34" charset="-122"/>
-                <a:cs typeface="Calibri" pitchFamily="34" charset="-120"/>
-              </a:rPr>
-              <a:t>5 reviewed job postings in the denominator, from 1 employers.</a:t>
+                  <a:srgbClr val="0F2A20"/>
+                </a:solidFill>
+                <a:latin typeface="Calibri" pitchFamily="34" charset="0"/>
+                <a:ea typeface="Calibri" pitchFamily="34" charset="-122"/>
+                <a:cs typeface="Calibri" pitchFamily="34" charset="-120"/>
+              </a:rPr>
+              <a:t>Stripe. Published 2026-04-22. Recorded 2026-07-01T10:00:00Z from Saved sample: real postings from the stripe Greenhouse board, retrieved 2026-10-09 and truncated for the demo.</a:t>
             </a:r>
             <a:endParaRPr lang="en-US" sz="1400" dirty="0"/>
           </a:p>
@@ -2996,13 +3747,13 @@
             <a:r>
               <a:rPr lang="en-US" sz="1400" dirty="0">
                 <a:solidFill>
-                  <a:srgbClr val="1F2937"/>
-                </a:solidFill>
-                <a:latin typeface="Calibri" pitchFamily="34" charset="0"/>
-                <a:ea typeface="Calibri" pitchFamily="34" charset="-122"/>
-                <a:cs typeface="Calibri" pitchFamily="34" charset="-120"/>
-              </a:rPr>
-              <a:t>Publication dates as supplied: 2023-11-01 to 2026-10-01.</a:t>
+                  <a:srgbClr val="0F2A20"/>
+                </a:solidFill>
+                <a:latin typeface="Calibri" pitchFamily="34" charset="0"/>
+                <a:ea typeface="Calibri" pitchFamily="34" charset="-122"/>
+                <a:cs typeface="Calibri" pitchFamily="34" charset="-120"/>
+              </a:rPr>
+              <a:t>Link: https://stripe.com/jobs/search?gh_jid=7440963</a:t>
             </a:r>
             <a:endParaRPr lang="en-US" sz="1400" dirty="0"/>
           </a:p>
@@ -3017,13 +3768,13 @@
             <a:r>
               <a:rPr lang="en-US" sz="1400" dirty="0">
                 <a:solidFill>
-                  <a:srgbClr val="1F2937"/>
-                </a:solidFill>
-                <a:latin typeface="Calibri" pitchFamily="34" charset="0"/>
-                <a:ea typeface="Calibri" pitchFamily="34" charset="-122"/>
-                <a:cs typeface="Calibri" pitchFamily="34" charset="-120"/>
-              </a:rPr>
-              <a:t>5 collected on request (Saved sample: real postings from the stripe Greenhouse board, retrieved 2026-10-09 and truncated for the demo), 0 lecturer-supplied, 0 contextual documents.</a:t>
+                  <a:srgbClr val="0F2A20"/>
+                </a:solidFill>
+                <a:latin typeface="Calibri" pitchFamily="34" charset="0"/>
+                <a:ea typeface="Calibri" pitchFamily="34" charset="-122"/>
+                <a:cs typeface="Calibri" pitchFamily="34" charset="-120"/>
+              </a:rPr>
+              <a:t>"The team owns everything from hierarchical time series and agentic forecasting tools that predict payment volumes and revenue margins, to the governed metrics platform that feeds company-wide dashboards and executive reporting." (dashboards, unclear)</a:t>
             </a:r>
             <a:endParaRPr lang="en-US" sz="1400" dirty="0"/>
           </a:p>
@@ -3038,13 +3789,13 @@
             <a:r>
               <a:rPr lang="en-US" sz="1400" dirty="0">
                 <a:solidFill>
-                  <a:srgbClr val="1F2937"/>
-                </a:solidFill>
-                <a:latin typeface="Calibri" pitchFamily="34" charset="0"/>
-                <a:ea typeface="Calibri" pitchFamily="34" charset="-122"/>
-                <a:cs typeface="Calibri" pitchFamily="34" charset="-120"/>
-              </a:rPr>
-              <a:t>Excluded: 0 unreviewed postings and 1 duplicate copies.</a:t>
+                  <a:srgbClr val="0F2A20"/>
+                </a:solidFill>
+                <a:latin typeface="Calibri" pitchFamily="34" charset="0"/>
+                <a:ea typeface="Calibri" pitchFamily="34" charset="-122"/>
+                <a:cs typeface="Calibri" pitchFamily="34" charset="-120"/>
+              </a:rPr>
+              <a:t>"We partner closely with Finance and Strategy, GTM, and Product stakeholders to directly inform financial decisions across Stripe's entire business." (stakeholders, unclear)</a:t>
             </a:r>
             <a:endParaRPr lang="en-US" sz="1400" dirty="0"/>
           </a:p>
@@ -3059,13 +3810,13 @@
             <a:r>
               <a:rPr lang="en-US" sz="1400" dirty="0">
                 <a:solidFill>
-                  <a:srgbClr val="1F2937"/>
-                </a:solidFill>
-                <a:latin typeface="Calibri" pitchFamily="34" charset="0"/>
-                <a:ea typeface="Calibri" pitchFamily="34" charset="-122"/>
-                <a:cs typeface="Calibri" pitchFamily="34" charset="-120"/>
-              </a:rPr>
-              <a:t>Trend unavailable: no comparable earlier evidence window has been recorded.</a:t>
+                  <a:srgbClr val="0F2A20"/>
+                </a:solidFill>
+                <a:latin typeface="Calibri" pitchFamily="34" charset="0"/>
+                <a:ea typeface="Calibri" pitchFamily="34" charset="-122"/>
+                <a:cs typeface="Calibri" pitchFamily="34" charset="-120"/>
+              </a:rPr>
+              <a:t>"- A PhD, MS, or BS in a quantitative field (e.g., Statistics, Operations Research, Economics, Computer Science, Engineering)" (statistics, unclear)</a:t>
             </a:r>
             <a:endParaRPr lang="en-US" sz="1400" dirty="0"/>
           </a:p>
@@ -3098,13 +3849,13 @@
             <a:r>
               <a:rPr lang="en-US" sz="900" dirty="0">
                 <a:solidFill>
-                  <a:srgbClr val="6A7179"/>
-                </a:solidFill>
-                <a:latin typeface="Calibri" pitchFamily="34" charset="0"/>
-                <a:ea typeface="Calibri" pitchFamily="34" charset="-122"/>
-                <a:cs typeface="Calibri" pitchFamily="34" charset="-120"/>
-              </a:rPr>
-              <a:t>Generated by Lyceum from saved data; editable; no AI-written text.  3 / 12</a:t>
+                  <a:srgbClr val="4E6258"/>
+                </a:solidFill>
+                <a:latin typeface="Calibri" pitchFamily="34" charset="0"/>
+                <a:ea typeface="Calibri" pitchFamily="34" charset="-122"/>
+                <a:cs typeface="Calibri" pitchFamily="34" charset="-120"/>
+              </a:rPr>
+              <a:t>Generated by Lyceum from saved data; editable; no AI-written text.  14 / 17</a:t>
             </a:r>
             <a:endParaRPr lang="en-US" sz="900" dirty="0"/>
           </a:p>
@@ -3118,13 +3869,13 @@
 </p:sld>
 </file>
 
-<file path=ppt/slides/slide4.xml><?xml version="1.0" encoding="utf-8"?>
+<file path=ppt/slides/slide15.xml><?xml version="1.0" encoding="utf-8"?>
 <p:sld xmlns:a="http://schemas.openxmlformats.org/drawingml/2006/main" xmlns:r="http://schemas.openxmlformats.org/officeDocument/2006/relationships" xmlns:p="http://schemas.openxmlformats.org/presentationml/2006/main">
-  <p:cSld name="Slide 4">
+  <p:cSld name="Slide 15">
     <p:bg>
       <p:bgPr>
         <a:solidFill>
-          <a:srgbClr val="FBFBF8"/>
+          <a:srgbClr val="FFFFFF"/>
         </a:solidFill>
       </p:bgPr>
     </p:bg>
@@ -3171,11 +3922,1109 @@
             <a:r>
               <a:rPr lang="en-US" sz="2600" b="1" dirty="0">
                 <a:solidFill>
-                  <a:srgbClr val="14213D"/>
-                </a:solidFill>
-                <a:latin typeface="Georgia" pitchFamily="34" charset="0"/>
-                <a:ea typeface="Georgia" pitchFamily="34" charset="-122"/>
-                <a:cs typeface="Georgia" pitchFamily="34" charset="-120"/>
+                  <a:srgbClr val="0F2A20"/>
+                </a:solidFill>
+                <a:latin typeface="Calibri" pitchFamily="34" charset="0"/>
+                <a:ea typeface="Calibri" pitchFamily="34" charset="-122"/>
+                <a:cs typeface="Calibri" pitchFamily="34" charset="-120"/>
+              </a:rPr>
+              <a:t>Receipt: Data Science Manager, Risk</a:t>
+            </a:r>
+            <a:endParaRPr lang="en-US" sz="2600" dirty="0"/>
+          </a:p>
+        </p:txBody>
+      </p:sp>
+      <p:sp>
+        <p:nvSpPr>
+          <p:cNvPr id="3" name="Text 1"/>
+          <p:cNvSpPr/>
+          <p:nvPr/>
+        </p:nvSpPr>
+        <p:spPr>
+          <a:xfrm>
+            <a:off x="457200" y="1143000"/>
+            <a:ext cx="8229600" cy="3429000"/>
+          </a:xfrm>
+          <a:prstGeom prst="rect">
+            <a:avLst/>
+          </a:prstGeom>
+          <a:noFill/>
+          <a:ln/>
+        </p:spPr>
+        <p:txBody>
+          <a:bodyPr wrap="square" rtlCol="0" anchor="t">
+            <a:normAutofit/>
+          </a:bodyPr>
+          <a:lstStyle/>
+          <a:p>
+            <a:pPr marL="342900" indent="-342900">
+              <a:spcAft>
+                <a:spcPts val="600"/>
+              </a:spcAft>
+              <a:buSzPct val="100000"/>
+              <a:buChar char="•"/>
+            </a:pPr>
+            <a:r>
+              <a:rPr lang="en-US" sz="1400" dirty="0">
+                <a:solidFill>
+                  <a:srgbClr val="0F2A20"/>
+                </a:solidFill>
+                <a:latin typeface="Calibri" pitchFamily="34" charset="0"/>
+                <a:ea typeface="Calibri" pitchFamily="34" charset="-122"/>
+                <a:cs typeface="Calibri" pitchFamily="34" charset="-120"/>
+              </a:rPr>
+              <a:t>Stripe. Published 2026-05-14. Recorded 2026-07-01T10:00:00Z from Saved sample: real postings from the stripe Greenhouse board, retrieved 2026-10-09 and truncated for the demo.</a:t>
+            </a:r>
+            <a:endParaRPr lang="en-US" sz="1400" dirty="0"/>
+          </a:p>
+          <a:p>
+            <a:pPr marL="342900" indent="-342900">
+              <a:spcAft>
+                <a:spcPts val="600"/>
+              </a:spcAft>
+              <a:buSzPct val="100000"/>
+              <a:buChar char="•"/>
+            </a:pPr>
+            <a:r>
+              <a:rPr lang="en-US" sz="1400" dirty="0">
+                <a:solidFill>
+                  <a:srgbClr val="0F2A20"/>
+                </a:solidFill>
+                <a:latin typeface="Calibri" pitchFamily="34" charset="0"/>
+                <a:ea typeface="Calibri" pitchFamily="34" charset="-122"/>
+                <a:cs typeface="Calibri" pitchFamily="34" charset="-120"/>
+              </a:rPr>
+              <a:t>Link: https://stripe.com/jobs/search?gh_jid=7923653</a:t>
+            </a:r>
+            <a:endParaRPr lang="en-US" sz="1400" dirty="0"/>
+          </a:p>
+          <a:p>
+            <a:pPr marL="342900" indent="-342900">
+              <a:spcAft>
+                <a:spcPts val="600"/>
+              </a:spcAft>
+              <a:buSzPct val="100000"/>
+              <a:buChar char="•"/>
+            </a:pPr>
+            <a:r>
+              <a:rPr lang="en-US" sz="1400" dirty="0">
+                <a:solidFill>
+                  <a:srgbClr val="0F2A20"/>
+                </a:solidFill>
+                <a:latin typeface="Calibri" pitchFamily="34" charset="0"/>
+                <a:ea typeface="Calibri" pitchFamily="34" charset="-122"/>
+                <a:cs typeface="Calibri" pitchFamily="34" charset="-120"/>
+              </a:rPr>
+              <a:t>"• Own roadmap prioritization, execution quality, and stakeholder alignment for both workstreams." (stakeholders, unclear)</a:t>
+            </a:r>
+            <a:endParaRPr lang="en-US" sz="1400" dirty="0"/>
+          </a:p>
+        </p:txBody>
+      </p:sp>
+      <p:sp>
+        <p:nvSpPr>
+          <p:cNvPr id="4" name="Text 2"/>
+          <p:cNvSpPr/>
+          <p:nvPr/>
+        </p:nvSpPr>
+        <p:spPr>
+          <a:xfrm>
+            <a:off x="457200" y="4709160"/>
+            <a:ext cx="8229600" cy="274320"/>
+          </a:xfrm>
+          <a:prstGeom prst="rect">
+            <a:avLst/>
+          </a:prstGeom>
+          <a:noFill/>
+          <a:ln/>
+        </p:spPr>
+        <p:txBody>
+          <a:bodyPr wrap="square" rtlCol="0" anchor="ctr"/>
+          <a:lstStyle/>
+          <a:p>
+            <a:pPr indent="0" marL="0">
+              <a:buNone/>
+            </a:pPr>
+            <a:r>
+              <a:rPr lang="en-US" sz="900" dirty="0">
+                <a:solidFill>
+                  <a:srgbClr val="4E6258"/>
+                </a:solidFill>
+                <a:latin typeface="Calibri" pitchFamily="34" charset="0"/>
+                <a:ea typeface="Calibri" pitchFamily="34" charset="-122"/>
+                <a:cs typeface="Calibri" pitchFamily="34" charset="-120"/>
+              </a:rPr>
+              <a:t>Generated by Lyceum from saved data; editable; no AI-written text.  15 / 17</a:t>
+            </a:r>
+            <a:endParaRPr lang="en-US" sz="900" dirty="0"/>
+          </a:p>
+        </p:txBody>
+      </p:sp>
+    </p:spTree>
+  </p:cSld>
+  <p:clrMapOvr>
+    <a:masterClrMapping/>
+  </p:clrMapOvr>
+</p:sld>
+</file>
+
+<file path=ppt/slides/slide16.xml><?xml version="1.0" encoding="utf-8"?>
+<p:sld xmlns:a="http://schemas.openxmlformats.org/drawingml/2006/main" xmlns:r="http://schemas.openxmlformats.org/officeDocument/2006/relationships" xmlns:p="http://schemas.openxmlformats.org/presentationml/2006/main">
+  <p:cSld name="Slide 16">
+    <p:bg>
+      <p:bgPr>
+        <a:solidFill>
+          <a:srgbClr val="FFFFFF"/>
+        </a:solidFill>
+      </p:bgPr>
+    </p:bg>
+    <p:spTree>
+      <p:nvGrpSpPr>
+        <p:cNvPr id="1" name=""/>
+        <p:cNvGrpSpPr/>
+        <p:nvPr/>
+      </p:nvGrpSpPr>
+      <p:grpSpPr>
+        <a:xfrm>
+          <a:off x="0" y="0"/>
+          <a:ext cx="0" cy="0"/>
+          <a:chOff x="0" y="0"/>
+          <a:chExt cx="0" cy="0"/>
+        </a:xfrm>
+      </p:grpSpPr>
+      <p:sp>
+        <p:nvSpPr>
+          <p:cNvPr id="2" name="Text 0"/>
+          <p:cNvSpPr/>
+          <p:nvPr/>
+        </p:nvSpPr>
+        <p:spPr>
+          <a:xfrm>
+            <a:off x="457200" y="274320"/>
+            <a:ext cx="8229600" cy="731520"/>
+          </a:xfrm>
+          <a:prstGeom prst="rect">
+            <a:avLst/>
+          </a:prstGeom>
+          <a:noFill/>
+          <a:ln/>
+        </p:spPr>
+        <p:txBody>
+          <a:bodyPr wrap="square" rtlCol="0" anchor="ctr">
+            <a:normAutofit/>
+          </a:bodyPr>
+          <a:lstStyle/>
+          <a:p>
+            <a:pPr indent="0" marL="0">
+              <a:buNone/>
+            </a:pPr>
+            <a:r>
+              <a:rPr lang="en-US" sz="2600" b="1" dirty="0">
+                <a:solidFill>
+                  <a:srgbClr val="0F2A20"/>
+                </a:solidFill>
+                <a:latin typeface="Calibri" pitchFamily="34" charset="0"/>
+                <a:ea typeface="Calibri" pitchFamily="34" charset="-122"/>
+                <a:cs typeface="Calibri" pitchFamily="34" charset="-120"/>
+              </a:rPr>
+              <a:t>Receipt: Data Scientist</a:t>
+            </a:r>
+            <a:endParaRPr lang="en-US" sz="2600" dirty="0"/>
+          </a:p>
+        </p:txBody>
+      </p:sp>
+      <p:sp>
+        <p:nvSpPr>
+          <p:cNvPr id="3" name="Text 1"/>
+          <p:cNvSpPr/>
+          <p:nvPr/>
+        </p:nvSpPr>
+        <p:spPr>
+          <a:xfrm>
+            <a:off x="457200" y="1143000"/>
+            <a:ext cx="8229600" cy="3429000"/>
+          </a:xfrm>
+          <a:prstGeom prst="rect">
+            <a:avLst/>
+          </a:prstGeom>
+          <a:noFill/>
+          <a:ln/>
+        </p:spPr>
+        <p:txBody>
+          <a:bodyPr wrap="square" rtlCol="0" anchor="t">
+            <a:normAutofit/>
+          </a:bodyPr>
+          <a:lstStyle/>
+          <a:p>
+            <a:pPr marL="342900" indent="-342900">
+              <a:spcAft>
+                <a:spcPts val="600"/>
+              </a:spcAft>
+              <a:buSzPct val="100000"/>
+              <a:buChar char="•"/>
+            </a:pPr>
+            <a:r>
+              <a:rPr lang="en-US" sz="1400" dirty="0">
+                <a:solidFill>
+                  <a:srgbClr val="0F2A20"/>
+                </a:solidFill>
+                <a:latin typeface="Calibri" pitchFamily="34" charset="0"/>
+                <a:ea typeface="Calibri" pitchFamily="34" charset="-122"/>
+                <a:cs typeface="Calibri" pitchFamily="34" charset="-120"/>
+              </a:rPr>
+              <a:t>Stripe. Published 2026-09-22. Recorded 2026-07-01T10:00:00Z from Saved sample: real postings from the stripe Greenhouse board, retrieved 2026-10-09 and truncated for the demo.</a:t>
+            </a:r>
+            <a:endParaRPr lang="en-US" sz="1400" dirty="0"/>
+          </a:p>
+          <a:p>
+            <a:pPr marL="342900" indent="-342900">
+              <a:spcAft>
+                <a:spcPts val="600"/>
+              </a:spcAft>
+              <a:buSzPct val="100000"/>
+              <a:buChar char="•"/>
+            </a:pPr>
+            <a:r>
+              <a:rPr lang="en-US" sz="1400" dirty="0">
+                <a:solidFill>
+                  <a:srgbClr val="0F2A20"/>
+                </a:solidFill>
+                <a:latin typeface="Calibri" pitchFamily="34" charset="0"/>
+                <a:ea typeface="Calibri" pitchFamily="34" charset="-122"/>
+                <a:cs typeface="Calibri" pitchFamily="34" charset="-120"/>
+              </a:rPr>
+              <a:t>Link: https://stripe.com/jobs/search?gh_jid=8222149</a:t>
+            </a:r>
+            <a:endParaRPr lang="en-US" sz="1400" dirty="0"/>
+          </a:p>
+          <a:p>
+            <a:pPr marL="342900" indent="-342900">
+              <a:spcAft>
+                <a:spcPts val="600"/>
+              </a:spcAft>
+              <a:buSzPct val="100000"/>
+              <a:buChar char="•"/>
+            </a:pPr>
+            <a:r>
+              <a:rPr lang="en-US" sz="1400" dirty="0">
+                <a:solidFill>
+                  <a:srgbClr val="0F2A20"/>
+                </a:solidFill>
+                <a:latin typeface="Calibri" pitchFamily="34" charset="0"/>
+                <a:ea typeface="Calibri" pitchFamily="34" charset="-122"/>
+                <a:cs typeface="Calibri" pitchFamily="34" charset="-120"/>
+              </a:rPr>
+              <a:t>"- SQL;" (SQL, unclear)</a:t>
+            </a:r>
+            <a:endParaRPr lang="en-US" sz="1400" dirty="0"/>
+          </a:p>
+          <a:p>
+            <a:pPr marL="342900" indent="-342900">
+              <a:spcAft>
+                <a:spcPts val="600"/>
+              </a:spcAft>
+              <a:buSzPct val="100000"/>
+              <a:buChar char="•"/>
+            </a:pPr>
+            <a:r>
+              <a:rPr lang="en-US" sz="1400" dirty="0">
+                <a:solidFill>
+                  <a:srgbClr val="0F2A20"/>
+                </a:solidFill>
+                <a:latin typeface="Calibri" pitchFamily="34" charset="0"/>
+                <a:ea typeface="Calibri" pitchFamily="34" charset="-122"/>
+                <a:cs typeface="Calibri" pitchFamily="34" charset="-120"/>
+              </a:rPr>
+              <a:t>"- Programming languages including Python or R;" (Python, unclear)</a:t>
+            </a:r>
+            <a:endParaRPr lang="en-US" sz="1400" dirty="0"/>
+          </a:p>
+          <a:p>
+            <a:pPr marL="342900" indent="-342900">
+              <a:spcAft>
+                <a:spcPts val="600"/>
+              </a:spcAft>
+              <a:buSzPct val="100000"/>
+              <a:buChar char="•"/>
+            </a:pPr>
+            <a:r>
+              <a:rPr lang="en-US" sz="1400" dirty="0">
+                <a:solidFill>
+                  <a:srgbClr val="0F2A20"/>
+                </a:solidFill>
+                <a:latin typeface="Calibri" pitchFamily="34" charset="0"/>
+                <a:ea typeface="Calibri" pitchFamily="34" charset="-122"/>
+                <a:cs typeface="Calibri" pitchFamily="34" charset="-120"/>
+              </a:rPr>
+              <a:t>"Master’s degree or foreign equivalent in Statistics, Data Analytics, Engineering or a related field, plus 5 years of related work experience in data science or quantitative modeling." (statistics, unclear)</a:t>
+            </a:r>
+            <a:endParaRPr lang="en-US" sz="1400" dirty="0"/>
+          </a:p>
+        </p:txBody>
+      </p:sp>
+      <p:sp>
+        <p:nvSpPr>
+          <p:cNvPr id="4" name="Text 2"/>
+          <p:cNvSpPr/>
+          <p:nvPr/>
+        </p:nvSpPr>
+        <p:spPr>
+          <a:xfrm>
+            <a:off x="457200" y="4709160"/>
+            <a:ext cx="8229600" cy="274320"/>
+          </a:xfrm>
+          <a:prstGeom prst="rect">
+            <a:avLst/>
+          </a:prstGeom>
+          <a:noFill/>
+          <a:ln/>
+        </p:spPr>
+        <p:txBody>
+          <a:bodyPr wrap="square" rtlCol="0" anchor="ctr"/>
+          <a:lstStyle/>
+          <a:p>
+            <a:pPr indent="0" marL="0">
+              <a:buNone/>
+            </a:pPr>
+            <a:r>
+              <a:rPr lang="en-US" sz="900" dirty="0">
+                <a:solidFill>
+                  <a:srgbClr val="4E6258"/>
+                </a:solidFill>
+                <a:latin typeface="Calibri" pitchFamily="34" charset="0"/>
+                <a:ea typeface="Calibri" pitchFamily="34" charset="-122"/>
+                <a:cs typeface="Calibri" pitchFamily="34" charset="-120"/>
+              </a:rPr>
+              <a:t>Generated by Lyceum from saved data; editable; no AI-written text.  16 / 17</a:t>
+            </a:r>
+            <a:endParaRPr lang="en-US" sz="900" dirty="0"/>
+          </a:p>
+        </p:txBody>
+      </p:sp>
+    </p:spTree>
+  </p:cSld>
+  <p:clrMapOvr>
+    <a:masterClrMapping/>
+  </p:clrMapOvr>
+</p:sld>
+</file>
+
+<file path=ppt/slides/slide17.xml><?xml version="1.0" encoding="utf-8"?>
+<p:sld xmlns:a="http://schemas.openxmlformats.org/drawingml/2006/main" xmlns:r="http://schemas.openxmlformats.org/officeDocument/2006/relationships" xmlns:p="http://schemas.openxmlformats.org/presentationml/2006/main">
+  <p:cSld name="Slide 17">
+    <p:bg>
+      <p:bgPr>
+        <a:solidFill>
+          <a:srgbClr val="FFFFFF"/>
+        </a:solidFill>
+      </p:bgPr>
+    </p:bg>
+    <p:spTree>
+      <p:nvGrpSpPr>
+        <p:cNvPr id="1" name=""/>
+        <p:cNvGrpSpPr/>
+        <p:nvPr/>
+      </p:nvGrpSpPr>
+      <p:grpSpPr>
+        <a:xfrm>
+          <a:off x="0" y="0"/>
+          <a:ext cx="0" cy="0"/>
+          <a:chOff x="0" y="0"/>
+          <a:chExt cx="0" cy="0"/>
+        </a:xfrm>
+      </p:grpSpPr>
+      <p:sp>
+        <p:nvSpPr>
+          <p:cNvPr id="2" name="Text 0"/>
+          <p:cNvSpPr/>
+          <p:nvPr/>
+        </p:nvSpPr>
+        <p:spPr>
+          <a:xfrm>
+            <a:off x="457200" y="274320"/>
+            <a:ext cx="8229600" cy="731520"/>
+          </a:xfrm>
+          <a:prstGeom prst="rect">
+            <a:avLst/>
+          </a:prstGeom>
+          <a:noFill/>
+          <a:ln/>
+        </p:spPr>
+        <p:txBody>
+          <a:bodyPr wrap="square" rtlCol="0" anchor="ctr">
+            <a:normAutofit/>
+          </a:bodyPr>
+          <a:lstStyle/>
+          <a:p>
+            <a:pPr indent="0" marL="0">
+              <a:buNone/>
+            </a:pPr>
+            <a:r>
+              <a:rPr lang="en-US" sz="2600" b="1" dirty="0">
+                <a:solidFill>
+                  <a:srgbClr val="0F2A20"/>
+                </a:solidFill>
+                <a:latin typeface="Calibri" pitchFamily="34" charset="0"/>
+                <a:ea typeface="Calibri" pitchFamily="34" charset="-122"/>
+                <a:cs typeface="Calibri" pitchFamily="34" charset="-120"/>
+              </a:rPr>
+              <a:t>Receipt: Data Scientist</a:t>
+            </a:r>
+            <a:endParaRPr lang="en-US" sz="2600" dirty="0"/>
+          </a:p>
+        </p:txBody>
+      </p:sp>
+      <p:sp>
+        <p:nvSpPr>
+          <p:cNvPr id="3" name="Text 1"/>
+          <p:cNvSpPr/>
+          <p:nvPr/>
+        </p:nvSpPr>
+        <p:spPr>
+          <a:xfrm>
+            <a:off x="457200" y="1143000"/>
+            <a:ext cx="8229600" cy="3429000"/>
+          </a:xfrm>
+          <a:prstGeom prst="rect">
+            <a:avLst/>
+          </a:prstGeom>
+          <a:noFill/>
+          <a:ln/>
+        </p:spPr>
+        <p:txBody>
+          <a:bodyPr wrap="square" rtlCol="0" anchor="t">
+            <a:normAutofit/>
+          </a:bodyPr>
+          <a:lstStyle/>
+          <a:p>
+            <a:pPr marL="342900" indent="-342900">
+              <a:spcAft>
+                <a:spcPts val="600"/>
+              </a:spcAft>
+              <a:buSzPct val="100000"/>
+              <a:buChar char="•"/>
+            </a:pPr>
+            <a:r>
+              <a:rPr lang="en-US" sz="1400" dirty="0">
+                <a:solidFill>
+                  <a:srgbClr val="0F2A20"/>
+                </a:solidFill>
+                <a:latin typeface="Calibri" pitchFamily="34" charset="0"/>
+                <a:ea typeface="Calibri" pitchFamily="34" charset="-122"/>
+                <a:cs typeface="Calibri" pitchFamily="34" charset="-120"/>
+              </a:rPr>
+              <a:t>Stripe. Published 2024-04-30. Recorded 2026-07-01T10:00:00Z from Saved sample: real postings from the stripe Greenhouse board, retrieved 2026-10-09 and truncated for the demo.</a:t>
+            </a:r>
+            <a:endParaRPr lang="en-US" sz="1400" dirty="0"/>
+          </a:p>
+          <a:p>
+            <a:pPr marL="342900" indent="-342900">
+              <a:spcAft>
+                <a:spcPts val="600"/>
+              </a:spcAft>
+              <a:buSzPct val="100000"/>
+              <a:buChar char="•"/>
+            </a:pPr>
+            <a:r>
+              <a:rPr lang="en-US" sz="1400" dirty="0">
+                <a:solidFill>
+                  <a:srgbClr val="0F2A20"/>
+                </a:solidFill>
+                <a:latin typeface="Calibri" pitchFamily="34" charset="0"/>
+                <a:ea typeface="Calibri" pitchFamily="34" charset="-122"/>
+                <a:cs typeface="Calibri" pitchFamily="34" charset="-120"/>
+              </a:rPr>
+              <a:t>Link: https://stripe.com/jobs/search?gh_jid=5895430</a:t>
+            </a:r>
+            <a:endParaRPr lang="en-US" sz="1400" dirty="0"/>
+          </a:p>
+          <a:p>
+            <a:pPr marL="342900" indent="-342900">
+              <a:spcAft>
+                <a:spcPts val="600"/>
+              </a:spcAft>
+              <a:buSzPct val="100000"/>
+              <a:buChar char="•"/>
+            </a:pPr>
+            <a:r>
+              <a:rPr lang="en-US" sz="1400" dirty="0">
+                <a:solidFill>
+                  <a:srgbClr val="0F2A20"/>
+                </a:solidFill>
+                <a:latin typeface="Calibri" pitchFamily="34" charset="0"/>
+                <a:ea typeface="Calibri" pitchFamily="34" charset="-122"/>
+                <a:cs typeface="Calibri" pitchFamily="34" charset="-120"/>
+              </a:rPr>
+              <a:t>"- Proficiency in SQL and a computing language such as Python or R" (SQL, unclear)</a:t>
+            </a:r>
+            <a:endParaRPr lang="en-US" sz="1400" dirty="0"/>
+          </a:p>
+          <a:p>
+            <a:pPr marL="342900" indent="-342900">
+              <a:spcAft>
+                <a:spcPts val="600"/>
+              </a:spcAft>
+              <a:buSzPct val="100000"/>
+              <a:buChar char="•"/>
+            </a:pPr>
+            <a:r>
+              <a:rPr lang="en-US" sz="1400" dirty="0">
+                <a:solidFill>
+                  <a:srgbClr val="0F2A20"/>
+                </a:solidFill>
+                <a:latin typeface="Calibri" pitchFamily="34" charset="0"/>
+                <a:ea typeface="Calibri" pitchFamily="34" charset="-122"/>
+                <a:cs typeface="Calibri" pitchFamily="34" charset="-120"/>
+              </a:rPr>
+              <a:t>"- Proficiency in SQL and a computing language such as Python or R" (Python, unclear)</a:t>
+            </a:r>
+            <a:endParaRPr lang="en-US" sz="1400" dirty="0"/>
+          </a:p>
+          <a:p>
+            <a:pPr marL="342900" indent="-342900">
+              <a:spcAft>
+                <a:spcPts val="600"/>
+              </a:spcAft>
+              <a:buSzPct val="100000"/>
+              <a:buChar char="•"/>
+            </a:pPr>
+            <a:r>
+              <a:rPr lang="en-US" sz="1400" dirty="0">
+                <a:solidFill>
+                  <a:srgbClr val="0F2A20"/>
+                </a:solidFill>
+                <a:latin typeface="Calibri" pitchFamily="34" charset="0"/>
+                <a:ea typeface="Calibri" pitchFamily="34" charset="-122"/>
+                <a:cs typeface="Calibri" pitchFamily="34" charset="-120"/>
+              </a:rPr>
+              <a:t>"We're looking for data scientists with a passion for analyzing data, building machine learning and statistical models, and running experiments to drive impact." (statistics, unclear)</a:t>
+            </a:r>
+            <a:endParaRPr lang="en-US" sz="1400" dirty="0"/>
+          </a:p>
+        </p:txBody>
+      </p:sp>
+      <p:sp>
+        <p:nvSpPr>
+          <p:cNvPr id="4" name="Text 2"/>
+          <p:cNvSpPr/>
+          <p:nvPr/>
+        </p:nvSpPr>
+        <p:spPr>
+          <a:xfrm>
+            <a:off x="457200" y="4709160"/>
+            <a:ext cx="8229600" cy="274320"/>
+          </a:xfrm>
+          <a:prstGeom prst="rect">
+            <a:avLst/>
+          </a:prstGeom>
+          <a:noFill/>
+          <a:ln/>
+        </p:spPr>
+        <p:txBody>
+          <a:bodyPr wrap="square" rtlCol="0" anchor="ctr"/>
+          <a:lstStyle/>
+          <a:p>
+            <a:pPr indent="0" marL="0">
+              <a:buNone/>
+            </a:pPr>
+            <a:r>
+              <a:rPr lang="en-US" sz="900" dirty="0">
+                <a:solidFill>
+                  <a:srgbClr val="4E6258"/>
+                </a:solidFill>
+                <a:latin typeface="Calibri" pitchFamily="34" charset="0"/>
+                <a:ea typeface="Calibri" pitchFamily="34" charset="-122"/>
+                <a:cs typeface="Calibri" pitchFamily="34" charset="-120"/>
+              </a:rPr>
+              <a:t>Generated by Lyceum from saved data; editable; no AI-written text.  17 / 17</a:t>
+            </a:r>
+            <a:endParaRPr lang="en-US" sz="900" dirty="0"/>
+          </a:p>
+        </p:txBody>
+      </p:sp>
+    </p:spTree>
+  </p:cSld>
+  <p:clrMapOvr>
+    <a:masterClrMapping/>
+  </p:clrMapOvr>
+</p:sld>
+</file>
+
+<file path=ppt/slides/slide2.xml><?xml version="1.0" encoding="utf-8"?>
+<p:sld xmlns:a="http://schemas.openxmlformats.org/drawingml/2006/main" xmlns:r="http://schemas.openxmlformats.org/officeDocument/2006/relationships" xmlns:p="http://schemas.openxmlformats.org/presentationml/2006/main">
+  <p:cSld name="Slide 2">
+    <p:bg>
+      <p:bgPr>
+        <a:solidFill>
+          <a:srgbClr val="FFFFFF"/>
+        </a:solidFill>
+      </p:bgPr>
+    </p:bg>
+    <p:spTree>
+      <p:nvGrpSpPr>
+        <p:cNvPr id="1" name=""/>
+        <p:cNvGrpSpPr/>
+        <p:nvPr/>
+      </p:nvGrpSpPr>
+      <p:grpSpPr>
+        <a:xfrm>
+          <a:off x="0" y="0"/>
+          <a:ext cx="0" cy="0"/>
+          <a:chOff x="0" y="0"/>
+          <a:chExt cx="0" cy="0"/>
+        </a:xfrm>
+      </p:grpSpPr>
+      <p:sp>
+        <p:nvSpPr>
+          <p:cNvPr id="2" name="Text 0"/>
+          <p:cNvSpPr/>
+          <p:nvPr/>
+        </p:nvSpPr>
+        <p:spPr>
+          <a:xfrm>
+            <a:off x="457200" y="274320"/>
+            <a:ext cx="8229600" cy="731520"/>
+          </a:xfrm>
+          <a:prstGeom prst="rect">
+            <a:avLst/>
+          </a:prstGeom>
+          <a:noFill/>
+          <a:ln/>
+        </p:spPr>
+        <p:txBody>
+          <a:bodyPr wrap="square" rtlCol="0" anchor="ctr">
+            <a:normAutofit/>
+          </a:bodyPr>
+          <a:lstStyle/>
+          <a:p>
+            <a:pPr indent="0" marL="0">
+              <a:buNone/>
+            </a:pPr>
+            <a:r>
+              <a:rPr lang="en-US" sz="2600" b="1" dirty="0">
+                <a:solidFill>
+                  <a:srgbClr val="0F2A20"/>
+                </a:solidFill>
+                <a:latin typeface="Calibri" pitchFamily="34" charset="0"/>
+                <a:ea typeface="Calibri" pitchFamily="34" charset="-122"/>
+                <a:cs typeface="Calibri" pitchFamily="34" charset="-120"/>
+              </a:rPr>
+              <a:t>Decision requested</a:t>
+            </a:r>
+            <a:endParaRPr lang="en-US" sz="2600" dirty="0"/>
+          </a:p>
+        </p:txBody>
+      </p:sp>
+      <p:sp>
+        <p:nvSpPr>
+          <p:cNvPr id="3" name="Text 1"/>
+          <p:cNvSpPr/>
+          <p:nvPr/>
+        </p:nvSpPr>
+        <p:spPr>
+          <a:xfrm>
+            <a:off x="457200" y="1143000"/>
+            <a:ext cx="8229600" cy="3383280"/>
+          </a:xfrm>
+          <a:prstGeom prst="rect">
+            <a:avLst/>
+          </a:prstGeom>
+          <a:noFill/>
+          <a:ln/>
+        </p:spPr>
+        <p:txBody>
+          <a:bodyPr wrap="square" rtlCol="0" anchor="t">
+            <a:normAutofit/>
+          </a:bodyPr>
+          <a:lstStyle/>
+          <a:p>
+            <a:pPr indent="0" marL="0">
+              <a:buNone/>
+            </a:pPr>
+            <a:r>
+              <a:rPr lang="en-US" sz="1600" dirty="0">
+                <a:solidFill>
+                  <a:srgbClr val="0F2A20"/>
+                </a:solidFill>
+                <a:latin typeface="Calibri" pitchFamily="34" charset="0"/>
+                <a:ea typeface="Calibri" pitchFamily="34" charset="-122"/>
+                <a:cs typeface="Calibri" pitchFamily="34" charset="-120"/>
+              </a:rPr>
+              <a:t>Small refresh within existing hours.</a:t>
+            </a:r>
+            <a:endParaRPr lang="en-US" sz="1600" dirty="0"/>
+          </a:p>
+          <a:p>
+            <a:pPr indent="0" marL="0">
+              <a:buNone/>
+            </a:pPr>
+            <a:endParaRPr lang="en-US" sz="1600" dirty="0"/>
+          </a:p>
+          <a:p>
+            <a:pPr indent="0" marL="0">
+              <a:buNone/>
+            </a:pPr>
+            <a:r>
+              <a:rPr lang="en-US" sz="1600" dirty="0">
+                <a:solidFill>
+                  <a:srgbClr val="0F2A20"/>
+                </a:solidFill>
+                <a:latin typeface="Calibri" pitchFamily="34" charset="0"/>
+                <a:ea typeface="Calibri" pitchFamily="34" charset="-122"/>
+                <a:cs typeface="Calibri" pitchFamily="34" charset="-120"/>
+              </a:rPr>
+              <a:t>Add a dashboard exercise in week 6 within existing hours; keep the statistics foundation.</a:t>
+            </a:r>
+            <a:endParaRPr lang="en-US" sz="1600" dirty="0"/>
+          </a:p>
+        </p:txBody>
+      </p:sp>
+      <p:sp>
+        <p:nvSpPr>
+          <p:cNvPr id="4" name="Text 2"/>
+          <p:cNvSpPr/>
+          <p:nvPr/>
+        </p:nvSpPr>
+        <p:spPr>
+          <a:xfrm>
+            <a:off x="457200" y="4709160"/>
+            <a:ext cx="8229600" cy="274320"/>
+          </a:xfrm>
+          <a:prstGeom prst="rect">
+            <a:avLst/>
+          </a:prstGeom>
+          <a:noFill/>
+          <a:ln/>
+        </p:spPr>
+        <p:txBody>
+          <a:bodyPr wrap="square" rtlCol="0" anchor="ctr"/>
+          <a:lstStyle/>
+          <a:p>
+            <a:pPr indent="0" marL="0">
+              <a:buNone/>
+            </a:pPr>
+            <a:r>
+              <a:rPr lang="en-US" sz="900" dirty="0">
+                <a:solidFill>
+                  <a:srgbClr val="4E6258"/>
+                </a:solidFill>
+                <a:latin typeface="Calibri" pitchFamily="34" charset="0"/>
+                <a:ea typeface="Calibri" pitchFamily="34" charset="-122"/>
+                <a:cs typeface="Calibri" pitchFamily="34" charset="-120"/>
+              </a:rPr>
+              <a:t>Generated by Lyceum from saved data; editable; no AI-written text.  2 / 17</a:t>
+            </a:r>
+            <a:endParaRPr lang="en-US" sz="900" dirty="0"/>
+          </a:p>
+        </p:txBody>
+      </p:sp>
+    </p:spTree>
+  </p:cSld>
+  <p:clrMapOvr>
+    <a:masterClrMapping/>
+  </p:clrMapOvr>
+</p:sld>
+</file>
+
+<file path=ppt/slides/slide3.xml><?xml version="1.0" encoding="utf-8"?>
+<p:sld xmlns:a="http://schemas.openxmlformats.org/drawingml/2006/main" xmlns:r="http://schemas.openxmlformats.org/officeDocument/2006/relationships" xmlns:p="http://schemas.openxmlformats.org/presentationml/2006/main">
+  <p:cSld name="Slide 3">
+    <p:bg>
+      <p:bgPr>
+        <a:solidFill>
+          <a:srgbClr val="FFFFFF"/>
+        </a:solidFill>
+      </p:bgPr>
+    </p:bg>
+    <p:spTree>
+      <p:nvGrpSpPr>
+        <p:cNvPr id="1" name=""/>
+        <p:cNvGrpSpPr/>
+        <p:nvPr/>
+      </p:nvGrpSpPr>
+      <p:grpSpPr>
+        <a:xfrm>
+          <a:off x="0" y="0"/>
+          <a:ext cx="0" cy="0"/>
+          <a:chOff x="0" y="0"/>
+          <a:chExt cx="0" cy="0"/>
+        </a:xfrm>
+      </p:grpSpPr>
+      <p:sp>
+        <p:nvSpPr>
+          <p:cNvPr id="2" name="Text 0"/>
+          <p:cNvSpPr/>
+          <p:nvPr/>
+        </p:nvSpPr>
+        <p:spPr>
+          <a:xfrm>
+            <a:off x="457200" y="274320"/>
+            <a:ext cx="8229600" cy="731520"/>
+          </a:xfrm>
+          <a:prstGeom prst="rect">
+            <a:avLst/>
+          </a:prstGeom>
+          <a:noFill/>
+          <a:ln/>
+        </p:spPr>
+        <p:txBody>
+          <a:bodyPr wrap="square" rtlCol="0" anchor="ctr">
+            <a:normAutofit/>
+          </a:bodyPr>
+          <a:lstStyle/>
+          <a:p>
+            <a:pPr indent="0" marL="0">
+              <a:buNone/>
+            </a:pPr>
+            <a:r>
+              <a:rPr lang="en-US" sz="2600" b="1" dirty="0">
+                <a:solidFill>
+                  <a:srgbClr val="0F2A20"/>
+                </a:solidFill>
+                <a:latin typeface="Calibri" pitchFamily="34" charset="0"/>
+                <a:ea typeface="Calibri" pitchFamily="34" charset="-122"/>
+                <a:cs typeface="Calibri" pitchFamily="34" charset="-120"/>
+              </a:rPr>
+              <a:t>Evidence base</a:t>
+            </a:r>
+            <a:endParaRPr lang="en-US" sz="2600" dirty="0"/>
+          </a:p>
+        </p:txBody>
+      </p:sp>
+      <p:sp>
+        <p:nvSpPr>
+          <p:cNvPr id="3" name="Text 1"/>
+          <p:cNvSpPr/>
+          <p:nvPr/>
+        </p:nvSpPr>
+        <p:spPr>
+          <a:xfrm>
+            <a:off x="457200" y="1143000"/>
+            <a:ext cx="8229600" cy="3429000"/>
+          </a:xfrm>
+          <a:prstGeom prst="rect">
+            <a:avLst/>
+          </a:prstGeom>
+          <a:noFill/>
+          <a:ln/>
+        </p:spPr>
+        <p:txBody>
+          <a:bodyPr wrap="square" rtlCol="0" anchor="t">
+            <a:normAutofit/>
+          </a:bodyPr>
+          <a:lstStyle/>
+          <a:p>
+            <a:pPr marL="342900" indent="-342900">
+              <a:spcAft>
+                <a:spcPts val="600"/>
+              </a:spcAft>
+              <a:buSzPct val="100000"/>
+              <a:buChar char="•"/>
+            </a:pPr>
+            <a:r>
+              <a:rPr lang="en-US" sz="1400" dirty="0">
+                <a:solidFill>
+                  <a:srgbClr val="0F2A20"/>
+                </a:solidFill>
+                <a:latin typeface="Calibri" pitchFamily="34" charset="0"/>
+                <a:ea typeface="Calibri" pitchFamily="34" charset="-122"/>
+                <a:cs typeface="Calibri" pitchFamily="34" charset="-120"/>
+              </a:rPr>
+              <a:t>9 reviewed job postings in the denominator, from 1 employers.</a:t>
+            </a:r>
+            <a:endParaRPr lang="en-US" sz="1400" dirty="0"/>
+          </a:p>
+          <a:p>
+            <a:pPr marL="342900" indent="-342900">
+              <a:spcAft>
+                <a:spcPts val="600"/>
+              </a:spcAft>
+              <a:buSzPct val="100000"/>
+              <a:buChar char="•"/>
+            </a:pPr>
+            <a:r>
+              <a:rPr lang="en-US" sz="1400" dirty="0">
+                <a:solidFill>
+                  <a:srgbClr val="0F2A20"/>
+                </a:solidFill>
+                <a:latin typeface="Calibri" pitchFamily="34" charset="0"/>
+                <a:ea typeface="Calibri" pitchFamily="34" charset="-122"/>
+                <a:cs typeface="Calibri" pitchFamily="34" charset="-120"/>
+              </a:rPr>
+              <a:t>Publication dates as supplied: 2023-11-01 to 2026-10-01.</a:t>
+            </a:r>
+            <a:endParaRPr lang="en-US" sz="1400" dirty="0"/>
+          </a:p>
+          <a:p>
+            <a:pPr marL="342900" indent="-342900">
+              <a:spcAft>
+                <a:spcPts val="600"/>
+              </a:spcAft>
+              <a:buSzPct val="100000"/>
+              <a:buChar char="•"/>
+            </a:pPr>
+            <a:r>
+              <a:rPr lang="en-US" sz="1400" dirty="0">
+                <a:solidFill>
+                  <a:srgbClr val="0F2A20"/>
+                </a:solidFill>
+                <a:latin typeface="Calibri" pitchFamily="34" charset="0"/>
+                <a:ea typeface="Calibri" pitchFamily="34" charset="-122"/>
+                <a:cs typeface="Calibri" pitchFamily="34" charset="-120"/>
+              </a:rPr>
+              <a:t>9 collected on request (Saved sample: real postings from the stripe Greenhouse board, retrieved 2026-10-09 and truncated for the demo), 0 lecturer-supplied, 0 contextual documents.</a:t>
+            </a:r>
+            <a:endParaRPr lang="en-US" sz="1400" dirty="0"/>
+          </a:p>
+          <a:p>
+            <a:pPr marL="342900" indent="-342900">
+              <a:spcAft>
+                <a:spcPts val="600"/>
+              </a:spcAft>
+              <a:buSzPct val="100000"/>
+              <a:buChar char="•"/>
+            </a:pPr>
+            <a:r>
+              <a:rPr lang="en-US" sz="1400" dirty="0">
+                <a:solidFill>
+                  <a:srgbClr val="0F2A20"/>
+                </a:solidFill>
+                <a:latin typeface="Calibri" pitchFamily="34" charset="0"/>
+                <a:ea typeface="Calibri" pitchFamily="34" charset="-122"/>
+                <a:cs typeface="Calibri" pitchFamily="34" charset="-120"/>
+              </a:rPr>
+              <a:t>Excluded: 0 unreviewed postings and 1 duplicate copies.</a:t>
+            </a:r>
+            <a:endParaRPr lang="en-US" sz="1400" dirty="0"/>
+          </a:p>
+          <a:p>
+            <a:pPr marL="342900" indent="-342900">
+              <a:spcAft>
+                <a:spcPts val="600"/>
+              </a:spcAft>
+              <a:buSzPct val="100000"/>
+              <a:buChar char="•"/>
+            </a:pPr>
+            <a:r>
+              <a:rPr lang="en-US" sz="1400" dirty="0">
+                <a:solidFill>
+                  <a:srgbClr val="0F2A20"/>
+                </a:solidFill>
+                <a:latin typeface="Calibri" pitchFamily="34" charset="0"/>
+                <a:ea typeface="Calibri" pitchFamily="34" charset="-122"/>
+                <a:cs typeface="Calibri" pitchFamily="34" charset="-120"/>
+              </a:rPr>
+              <a:t>Trend unavailable: no comparable earlier evidence window has been recorded.</a:t>
+            </a:r>
+            <a:endParaRPr lang="en-US" sz="1400" dirty="0"/>
+          </a:p>
+        </p:txBody>
+      </p:sp>
+      <p:sp>
+        <p:nvSpPr>
+          <p:cNvPr id="4" name="Text 2"/>
+          <p:cNvSpPr/>
+          <p:nvPr/>
+        </p:nvSpPr>
+        <p:spPr>
+          <a:xfrm>
+            <a:off x="457200" y="4709160"/>
+            <a:ext cx="8229600" cy="274320"/>
+          </a:xfrm>
+          <a:prstGeom prst="rect">
+            <a:avLst/>
+          </a:prstGeom>
+          <a:noFill/>
+          <a:ln/>
+        </p:spPr>
+        <p:txBody>
+          <a:bodyPr wrap="square" rtlCol="0" anchor="ctr"/>
+          <a:lstStyle/>
+          <a:p>
+            <a:pPr indent="0" marL="0">
+              <a:buNone/>
+            </a:pPr>
+            <a:r>
+              <a:rPr lang="en-US" sz="900" dirty="0">
+                <a:solidFill>
+                  <a:srgbClr val="4E6258"/>
+                </a:solidFill>
+                <a:latin typeface="Calibri" pitchFamily="34" charset="0"/>
+                <a:ea typeface="Calibri" pitchFamily="34" charset="-122"/>
+                <a:cs typeface="Calibri" pitchFamily="34" charset="-120"/>
+              </a:rPr>
+              <a:t>Generated by Lyceum from saved data; editable; no AI-written text.  3 / 17</a:t>
+            </a:r>
+            <a:endParaRPr lang="en-US" sz="900" dirty="0"/>
+          </a:p>
+        </p:txBody>
+      </p:sp>
+    </p:spTree>
+  </p:cSld>
+  <p:clrMapOvr>
+    <a:masterClrMapping/>
+  </p:clrMapOvr>
+</p:sld>
+</file>
+
+<file path=ppt/slides/slide4.xml><?xml version="1.0" encoding="utf-8"?>
+<p:sld xmlns:a="http://schemas.openxmlformats.org/drawingml/2006/main" xmlns:r="http://schemas.openxmlformats.org/officeDocument/2006/relationships" xmlns:p="http://schemas.openxmlformats.org/presentationml/2006/main">
+  <p:cSld name="Slide 4">
+    <p:bg>
+      <p:bgPr>
+        <a:solidFill>
+          <a:srgbClr val="FFFFFF"/>
+        </a:solidFill>
+      </p:bgPr>
+    </p:bg>
+    <p:spTree>
+      <p:nvGrpSpPr>
+        <p:cNvPr id="1" name=""/>
+        <p:cNvGrpSpPr/>
+        <p:nvPr/>
+      </p:nvGrpSpPr>
+      <p:grpSpPr>
+        <a:xfrm>
+          <a:off x="0" y="0"/>
+          <a:ext cx="0" cy="0"/>
+          <a:chOff x="0" y="0"/>
+          <a:chExt cx="0" cy="0"/>
+        </a:xfrm>
+      </p:grpSpPr>
+      <p:sp>
+        <p:nvSpPr>
+          <p:cNvPr id="2" name="Text 0"/>
+          <p:cNvSpPr/>
+          <p:nvPr/>
+        </p:nvSpPr>
+        <p:spPr>
+          <a:xfrm>
+            <a:off x="457200" y="274320"/>
+            <a:ext cx="8229600" cy="731520"/>
+          </a:xfrm>
+          <a:prstGeom prst="rect">
+            <a:avLst/>
+          </a:prstGeom>
+          <a:noFill/>
+          <a:ln/>
+        </p:spPr>
+        <p:txBody>
+          <a:bodyPr wrap="square" rtlCol="0" anchor="ctr">
+            <a:normAutofit/>
+          </a:bodyPr>
+          <a:lstStyle/>
+          <a:p>
+            <a:pPr indent="0" marL="0">
+              <a:buNone/>
+            </a:pPr>
+            <a:r>
+              <a:rPr lang="en-US" sz="2600" b="1" dirty="0">
+                <a:solidFill>
+                  <a:srgbClr val="0F2A20"/>
+                </a:solidFill>
+                <a:latin typeface="Calibri" pitchFamily="34" charset="0"/>
+                <a:ea typeface="Calibri" pitchFamily="34" charset="-122"/>
+                <a:cs typeface="Calibri" pitchFamily="34" charset="-120"/>
               </a:rPr>
               <a:t>What employers ask for</a:t>
             </a:r>
@@ -3226,7 +5075,7 @@
                       <a:r>
                         <a:rPr lang="en-US" sz="1100" b="1" dirty="0">
                           <a:solidFill>
-                            <a:srgbClr val="14213D"/>
+                            <a:srgbClr val="0F2A20"/>
                           </a:solidFill>
                           <a:latin typeface="Calibri" pitchFamily="34" charset="0"/>
                           <a:ea typeface="Calibri" pitchFamily="34" charset="-122"/>
@@ -3244,7 +5093,7 @@
                   <a:tcPr marL="91440" marR="91440" marT="45720" marB="45720" anchor="ctr">
                     <a:lnL w="6350" cap="flat" cmpd="sng" algn="ctr">
                       <a:solidFill>
-                        <a:srgbClr val="CBD5E1"/>
+                        <a:srgbClr val="D3E0D6"/>
                       </a:solidFill>
                       <a:prstDash val="solid"/>
                       <a:round/>
@@ -3253,7 +5102,7 @@
                     </a:lnL>
                     <a:lnR w="6350" cap="flat" cmpd="sng" algn="ctr">
                       <a:solidFill>
-                        <a:srgbClr val="CBD5E1"/>
+                        <a:srgbClr val="D3E0D6"/>
                       </a:solidFill>
                       <a:prstDash val="solid"/>
                       <a:round/>
@@ -3262,7 +5111,7 @@
                     </a:lnR>
                     <a:lnT w="6350" cap="flat" cmpd="sng" algn="ctr">
                       <a:solidFill>
-                        <a:srgbClr val="CBD5E1"/>
+                        <a:srgbClr val="D3E0D6"/>
                       </a:solidFill>
                       <a:prstDash val="solid"/>
                       <a:round/>
@@ -3271,7 +5120,7 @@
                     </a:lnT>
                     <a:lnB w="6350" cap="flat" cmpd="sng" algn="ctr">
                       <a:solidFill>
-                        <a:srgbClr val="CBD5E1"/>
+                        <a:srgbClr val="D3E0D6"/>
                       </a:solidFill>
                       <a:prstDash val="solid"/>
                       <a:round/>
@@ -3279,7 +5128,7 @@
                       <a:tailEnd type="none" w="med" len="med"/>
                     </a:lnB>
                     <a:solidFill>
-                      <a:srgbClr val="F1F3EF"/>
+                      <a:srgbClr val="DDEFE1"/>
                     </a:solidFill>
                   </a:tcPr>
                 </a:tc>
@@ -3294,7 +5143,7 @@
                       <a:r>
                         <a:rPr lang="en-US" sz="1100" b="1" dirty="0">
                           <a:solidFill>
-                            <a:srgbClr val="14213D"/>
+                            <a:srgbClr val="0F2A20"/>
                           </a:solidFill>
                           <a:latin typeface="Calibri" pitchFamily="34" charset="0"/>
                           <a:ea typeface="Calibri" pitchFamily="34" charset="-122"/>
@@ -3312,7 +5161,7 @@
                   <a:tcPr marL="91440" marR="91440" marT="45720" marB="45720" anchor="ctr">
                     <a:lnL w="6350" cap="flat" cmpd="sng" algn="ctr">
                       <a:solidFill>
-                        <a:srgbClr val="CBD5E1"/>
+                        <a:srgbClr val="D3E0D6"/>
                       </a:solidFill>
                       <a:prstDash val="solid"/>
                       <a:round/>
@@ -3321,7 +5170,7 @@
                     </a:lnL>
                     <a:lnR w="6350" cap="flat" cmpd="sng" algn="ctr">
                       <a:solidFill>
-                        <a:srgbClr val="CBD5E1"/>
+                        <a:srgbClr val="D3E0D6"/>
                       </a:solidFill>
                       <a:prstDash val="solid"/>
                       <a:round/>
@@ -3330,7 +5179,7 @@
                     </a:lnR>
                     <a:lnT w="6350" cap="flat" cmpd="sng" algn="ctr">
                       <a:solidFill>
-                        <a:srgbClr val="CBD5E1"/>
+                        <a:srgbClr val="D3E0D6"/>
                       </a:solidFill>
                       <a:prstDash val="solid"/>
                       <a:round/>
@@ -3339,7 +5188,7 @@
                     </a:lnT>
                     <a:lnB w="6350" cap="flat" cmpd="sng" algn="ctr">
                       <a:solidFill>
-                        <a:srgbClr val="CBD5E1"/>
+                        <a:srgbClr val="D3E0D6"/>
                       </a:solidFill>
                       <a:prstDash val="solid"/>
                       <a:round/>
@@ -3347,7 +5196,7 @@
                       <a:tailEnd type="none" w="med" len="med"/>
                     </a:lnB>
                     <a:solidFill>
-                      <a:srgbClr val="F1F3EF"/>
+                      <a:srgbClr val="DDEFE1"/>
                     </a:solidFill>
                   </a:tcPr>
                 </a:tc>
@@ -3362,7 +5211,7 @@
                       <a:r>
                         <a:rPr lang="en-US" sz="1100" b="1" dirty="0">
                           <a:solidFill>
-                            <a:srgbClr val="14213D"/>
+                            <a:srgbClr val="0F2A20"/>
                           </a:solidFill>
                           <a:latin typeface="Calibri" pitchFamily="34" charset="0"/>
                           <a:ea typeface="Calibri" pitchFamily="34" charset="-122"/>
@@ -3380,7 +5229,7 @@
                   <a:tcPr marL="91440" marR="91440" marT="45720" marB="45720" anchor="ctr">
                     <a:lnL w="6350" cap="flat" cmpd="sng" algn="ctr">
                       <a:solidFill>
-                        <a:srgbClr val="CBD5E1"/>
+                        <a:srgbClr val="D3E0D6"/>
                       </a:solidFill>
                       <a:prstDash val="solid"/>
                       <a:round/>
@@ -3389,7 +5238,7 @@
                     </a:lnL>
                     <a:lnR w="6350" cap="flat" cmpd="sng" algn="ctr">
                       <a:solidFill>
-                        <a:srgbClr val="CBD5E1"/>
+                        <a:srgbClr val="D3E0D6"/>
                       </a:solidFill>
                       <a:prstDash val="solid"/>
                       <a:round/>
@@ -3398,7 +5247,7 @@
                     </a:lnR>
                     <a:lnT w="6350" cap="flat" cmpd="sng" algn="ctr">
                       <a:solidFill>
-                        <a:srgbClr val="CBD5E1"/>
+                        <a:srgbClr val="D3E0D6"/>
                       </a:solidFill>
                       <a:prstDash val="solid"/>
                       <a:round/>
@@ -3407,7 +5256,7 @@
                     </a:lnT>
                     <a:lnB w="6350" cap="flat" cmpd="sng" algn="ctr">
                       <a:solidFill>
-                        <a:srgbClr val="CBD5E1"/>
+                        <a:srgbClr val="D3E0D6"/>
                       </a:solidFill>
                       <a:prstDash val="solid"/>
                       <a:round/>
@@ -3415,7 +5264,7 @@
                       <a:tailEnd type="none" w="med" len="med"/>
                     </a:lnB>
                     <a:solidFill>
-                      <a:srgbClr val="F1F3EF"/>
+                      <a:srgbClr val="DDEFE1"/>
                     </a:solidFill>
                   </a:tcPr>
                 </a:tc>
@@ -3430,7 +5279,7 @@
                       <a:r>
                         <a:rPr lang="en-US" sz="1100" b="1" dirty="0">
                           <a:solidFill>
-                            <a:srgbClr val="14213D"/>
+                            <a:srgbClr val="0F2A20"/>
                           </a:solidFill>
                           <a:latin typeface="Calibri" pitchFamily="34" charset="0"/>
                           <a:ea typeface="Calibri" pitchFamily="34" charset="-122"/>
@@ -3448,7 +5297,7 @@
                   <a:tcPr marL="91440" marR="91440" marT="45720" marB="45720" anchor="ctr">
                     <a:lnL w="6350" cap="flat" cmpd="sng" algn="ctr">
                       <a:solidFill>
-                        <a:srgbClr val="CBD5E1"/>
+                        <a:srgbClr val="D3E0D6"/>
                       </a:solidFill>
                       <a:prstDash val="solid"/>
                       <a:round/>
@@ -3457,7 +5306,7 @@
                     </a:lnL>
                     <a:lnR w="6350" cap="flat" cmpd="sng" algn="ctr">
                       <a:solidFill>
-                        <a:srgbClr val="CBD5E1"/>
+                        <a:srgbClr val="D3E0D6"/>
                       </a:solidFill>
                       <a:prstDash val="solid"/>
                       <a:round/>
@@ -3466,7 +5315,7 @@
                     </a:lnR>
                     <a:lnT w="6350" cap="flat" cmpd="sng" algn="ctr">
                       <a:solidFill>
-                        <a:srgbClr val="CBD5E1"/>
+                        <a:srgbClr val="D3E0D6"/>
                       </a:solidFill>
                       <a:prstDash val="solid"/>
                       <a:round/>
@@ -3475,7 +5324,7 @@
                     </a:lnT>
                     <a:lnB w="6350" cap="flat" cmpd="sng" algn="ctr">
                       <a:solidFill>
-                        <a:srgbClr val="CBD5E1"/>
+                        <a:srgbClr val="D3E0D6"/>
                       </a:solidFill>
                       <a:prstDash val="solid"/>
                       <a:round/>
@@ -3483,7 +5332,7 @@
                       <a:tailEnd type="none" w="med" len="med"/>
                     </a:lnB>
                     <a:solidFill>
-                      <a:srgbClr val="F1F3EF"/>
+                      <a:srgbClr val="DDEFE1"/>
                     </a:solidFill>
                   </a:tcPr>
                 </a:tc>
@@ -3498,7 +5347,7 @@
                       <a:r>
                         <a:rPr lang="en-US" sz="1100" b="1" dirty="0">
                           <a:solidFill>
-                            <a:srgbClr val="14213D"/>
+                            <a:srgbClr val="0F2A20"/>
                           </a:solidFill>
                           <a:latin typeface="Calibri" pitchFamily="34" charset="0"/>
                           <a:ea typeface="Calibri" pitchFamily="34" charset="-122"/>
@@ -3516,7 +5365,7 @@
                   <a:tcPr marL="91440" marR="91440" marT="45720" marB="45720" anchor="ctr">
                     <a:lnL w="6350" cap="flat" cmpd="sng" algn="ctr">
                       <a:solidFill>
-                        <a:srgbClr val="CBD5E1"/>
+                        <a:srgbClr val="D3E0D6"/>
                       </a:solidFill>
                       <a:prstDash val="solid"/>
                       <a:round/>
@@ -3525,7 +5374,7 @@
                     </a:lnL>
                     <a:lnR w="6350" cap="flat" cmpd="sng" algn="ctr">
                       <a:solidFill>
-                        <a:srgbClr val="CBD5E1"/>
+                        <a:srgbClr val="D3E0D6"/>
                       </a:solidFill>
                       <a:prstDash val="solid"/>
                       <a:round/>
@@ -3534,7 +5383,7 @@
                     </a:lnR>
                     <a:lnT w="6350" cap="flat" cmpd="sng" algn="ctr">
                       <a:solidFill>
-                        <a:srgbClr val="CBD5E1"/>
+                        <a:srgbClr val="D3E0D6"/>
                       </a:solidFill>
                       <a:prstDash val="solid"/>
                       <a:round/>
@@ -3543,7 +5392,7 @@
                     </a:lnT>
                     <a:lnB w="6350" cap="flat" cmpd="sng" algn="ctr">
                       <a:solidFill>
-                        <a:srgbClr val="CBD5E1"/>
+                        <a:srgbClr val="D3E0D6"/>
                       </a:solidFill>
                       <a:prstDash val="solid"/>
                       <a:round/>
@@ -3551,7 +5400,7 @@
                       <a:tailEnd type="none" w="med" len="med"/>
                     </a:lnB>
                     <a:solidFill>
-                      <a:srgbClr val="F1F3EF"/>
+                      <a:srgbClr val="DDEFE1"/>
                     </a:solidFill>
                   </a:tcPr>
                 </a:tc>
@@ -3566,7 +5415,7 @@
                       <a:r>
                         <a:rPr lang="en-US" sz="1100" b="1" dirty="0">
                           <a:solidFill>
-                            <a:srgbClr val="14213D"/>
+                            <a:srgbClr val="0F2A20"/>
                           </a:solidFill>
                           <a:latin typeface="Calibri" pitchFamily="34" charset="0"/>
                           <a:ea typeface="Calibri" pitchFamily="34" charset="-122"/>
@@ -3584,7 +5433,7 @@
                   <a:tcPr marL="91440" marR="91440" marT="45720" marB="45720" anchor="ctr">
                     <a:lnL w="6350" cap="flat" cmpd="sng" algn="ctr">
                       <a:solidFill>
-                        <a:srgbClr val="CBD5E1"/>
+                        <a:srgbClr val="D3E0D6"/>
                       </a:solidFill>
                       <a:prstDash val="solid"/>
                       <a:round/>
@@ -3593,7 +5442,7 @@
                     </a:lnL>
                     <a:lnR w="6350" cap="flat" cmpd="sng" algn="ctr">
                       <a:solidFill>
-                        <a:srgbClr val="CBD5E1"/>
+                        <a:srgbClr val="D3E0D6"/>
                       </a:solidFill>
                       <a:prstDash val="solid"/>
                       <a:round/>
@@ -3602,7 +5451,7 @@
                     </a:lnR>
                     <a:lnT w="6350" cap="flat" cmpd="sng" algn="ctr">
                       <a:solidFill>
-                        <a:srgbClr val="CBD5E1"/>
+                        <a:srgbClr val="D3E0D6"/>
                       </a:solidFill>
                       <a:prstDash val="solid"/>
                       <a:round/>
@@ -3611,7 +5460,7 @@
                     </a:lnT>
                     <a:lnB w="6350" cap="flat" cmpd="sng" algn="ctr">
                       <a:solidFill>
-                        <a:srgbClr val="CBD5E1"/>
+                        <a:srgbClr val="D3E0D6"/>
                       </a:solidFill>
                       <a:prstDash val="solid"/>
                       <a:round/>
@@ -3619,7 +5468,7 @@
                       <a:tailEnd type="none" w="med" len="med"/>
                     </a:lnB>
                     <a:solidFill>
-                      <a:srgbClr val="F1F3EF"/>
+                      <a:srgbClr val="DDEFE1"/>
                     </a:solidFill>
                   </a:tcPr>
                 </a:tc>
@@ -3634,7 +5483,7 @@
                       <a:r>
                         <a:rPr lang="en-US" sz="1100" b="1" dirty="0">
                           <a:solidFill>
-                            <a:srgbClr val="14213D"/>
+                            <a:srgbClr val="0F2A20"/>
                           </a:solidFill>
                           <a:latin typeface="Calibri" pitchFamily="34" charset="0"/>
                           <a:ea typeface="Calibri" pitchFamily="34" charset="-122"/>
@@ -3652,7 +5501,7 @@
                   <a:tcPr marL="91440" marR="91440" marT="45720" marB="45720" anchor="ctr">
                     <a:lnL w="6350" cap="flat" cmpd="sng" algn="ctr">
                       <a:solidFill>
-                        <a:srgbClr val="CBD5E1"/>
+                        <a:srgbClr val="D3E0D6"/>
                       </a:solidFill>
                       <a:prstDash val="solid"/>
                       <a:round/>
@@ -3661,7 +5510,7 @@
                     </a:lnL>
                     <a:lnR w="6350" cap="flat" cmpd="sng" algn="ctr">
                       <a:solidFill>
-                        <a:srgbClr val="CBD5E1"/>
+                        <a:srgbClr val="D3E0D6"/>
                       </a:solidFill>
                       <a:prstDash val="solid"/>
                       <a:round/>
@@ -3670,7 +5519,7 @@
                     </a:lnR>
                     <a:lnT w="6350" cap="flat" cmpd="sng" algn="ctr">
                       <a:solidFill>
-                        <a:srgbClr val="CBD5E1"/>
+                        <a:srgbClr val="D3E0D6"/>
                       </a:solidFill>
                       <a:prstDash val="solid"/>
                       <a:round/>
@@ -3679,7 +5528,7 @@
                     </a:lnT>
                     <a:lnB w="6350" cap="flat" cmpd="sng" algn="ctr">
                       <a:solidFill>
-                        <a:srgbClr val="CBD5E1"/>
+                        <a:srgbClr val="D3E0D6"/>
                       </a:solidFill>
                       <a:prstDash val="solid"/>
                       <a:round/>
@@ -3687,7 +5536,7 @@
                       <a:tailEnd type="none" w="med" len="med"/>
                     </a:lnB>
                     <a:solidFill>
-                      <a:srgbClr val="F1F3EF"/>
+                      <a:srgbClr val="DDEFE1"/>
                     </a:solidFill>
                   </a:tcPr>
                 </a:tc>
@@ -3704,7 +5553,464 @@
                       <a:r>
                         <a:rPr lang="en-US" sz="1100" dirty="0">
                           <a:solidFill>
-                            <a:srgbClr val="1F2937"/>
+                            <a:srgbClr val="0F2A20"/>
+                          </a:solidFill>
+                          <a:latin typeface="Calibri" pitchFamily="34" charset="0"/>
+                          <a:ea typeface="Calibri" pitchFamily="34" charset="-122"/>
+                          <a:cs typeface="Calibri" pitchFamily="34" charset="-120"/>
+                        </a:rPr>
+                        <a:t>stakeholders</a:t>
+                      </a:r>
+                      <a:endParaRPr lang="en-US" sz="1100" dirty="0">
+                        <a:latin typeface="Calibri" charset="0"/>
+                        <a:ea typeface="Calibri" charset="0"/>
+                        <a:cs typeface="Calibri" charset="0"/>
+                      </a:endParaRPr>
+                    </a:p>
+                  </a:txBody>
+                  <a:tcPr marL="91440" marR="91440" marT="45720" marB="45720" anchor="ctr">
+                    <a:lnL w="6350" cap="flat" cmpd="sng" algn="ctr">
+                      <a:solidFill>
+                        <a:srgbClr val="D3E0D6"/>
+                      </a:solidFill>
+                      <a:prstDash val="solid"/>
+                      <a:round/>
+                      <a:headEnd type="none" w="med" len="med"/>
+                      <a:tailEnd type="none" w="med" len="med"/>
+                    </a:lnL>
+                    <a:lnR w="6350" cap="flat" cmpd="sng" algn="ctr">
+                      <a:solidFill>
+                        <a:srgbClr val="D3E0D6"/>
+                      </a:solidFill>
+                      <a:prstDash val="solid"/>
+                      <a:round/>
+                      <a:headEnd type="none" w="med" len="med"/>
+                      <a:tailEnd type="none" w="med" len="med"/>
+                    </a:lnR>
+                    <a:lnT w="6350" cap="flat" cmpd="sng" algn="ctr">
+                      <a:solidFill>
+                        <a:srgbClr val="D3E0D6"/>
+                      </a:solidFill>
+                      <a:prstDash val="solid"/>
+                      <a:round/>
+                      <a:headEnd type="none" w="med" len="med"/>
+                      <a:tailEnd type="none" w="med" len="med"/>
+                    </a:lnT>
+                    <a:lnB w="6350" cap="flat" cmpd="sng" algn="ctr">
+                      <a:solidFill>
+                        <a:srgbClr val="D3E0D6"/>
+                      </a:solidFill>
+                      <a:prstDash val="solid"/>
+                      <a:round/>
+                      <a:headEnd type="none" w="med" len="med"/>
+                      <a:tailEnd type="none" w="med" len="med"/>
+                    </a:lnB>
+                  </a:tcPr>
+                </a:tc>
+                <a:tc>
+                  <a:txBody>
+                    <a:bodyPr/>
+                    <a:lstStyle/>
+                    <a:p>
+                      <a:pPr indent="0" marL="0">
+                        <a:buNone/>
+                      </a:pPr>
+                      <a:r>
+                        <a:rPr lang="en-US" sz="1100" dirty="0">
+                          <a:solidFill>
+                            <a:srgbClr val="0F2A20"/>
+                          </a:solidFill>
+                          <a:latin typeface="Calibri" pitchFamily="34" charset="0"/>
+                          <a:ea typeface="Calibri" pitchFamily="34" charset="-122"/>
+                          <a:cs typeface="Calibri" pitchFamily="34" charset="-120"/>
+                        </a:rPr>
+                        <a:t>6 of 9</a:t>
+                      </a:r>
+                      <a:endParaRPr lang="en-US" sz="1100" dirty="0">
+                        <a:latin typeface="Calibri" charset="0"/>
+                        <a:ea typeface="Calibri" charset="0"/>
+                        <a:cs typeface="Calibri" charset="0"/>
+                      </a:endParaRPr>
+                    </a:p>
+                  </a:txBody>
+                  <a:tcPr marL="91440" marR="91440" marT="45720" marB="45720" anchor="ctr">
+                    <a:lnL w="6350" cap="flat" cmpd="sng" algn="ctr">
+                      <a:solidFill>
+                        <a:srgbClr val="D3E0D6"/>
+                      </a:solidFill>
+                      <a:prstDash val="solid"/>
+                      <a:round/>
+                      <a:headEnd type="none" w="med" len="med"/>
+                      <a:tailEnd type="none" w="med" len="med"/>
+                    </a:lnL>
+                    <a:lnR w="6350" cap="flat" cmpd="sng" algn="ctr">
+                      <a:solidFill>
+                        <a:srgbClr val="D3E0D6"/>
+                      </a:solidFill>
+                      <a:prstDash val="solid"/>
+                      <a:round/>
+                      <a:headEnd type="none" w="med" len="med"/>
+                      <a:tailEnd type="none" w="med" len="med"/>
+                    </a:lnR>
+                    <a:lnT w="6350" cap="flat" cmpd="sng" algn="ctr">
+                      <a:solidFill>
+                        <a:srgbClr val="D3E0D6"/>
+                      </a:solidFill>
+                      <a:prstDash val="solid"/>
+                      <a:round/>
+                      <a:headEnd type="none" w="med" len="med"/>
+                      <a:tailEnd type="none" w="med" len="med"/>
+                    </a:lnT>
+                    <a:lnB w="6350" cap="flat" cmpd="sng" algn="ctr">
+                      <a:solidFill>
+                        <a:srgbClr val="D3E0D6"/>
+                      </a:solidFill>
+                      <a:prstDash val="solid"/>
+                      <a:round/>
+                      <a:headEnd type="none" w="med" len="med"/>
+                      <a:tailEnd type="none" w="med" len="med"/>
+                    </a:lnB>
+                  </a:tcPr>
+                </a:tc>
+                <a:tc>
+                  <a:txBody>
+                    <a:bodyPr/>
+                    <a:lstStyle/>
+                    <a:p>
+                      <a:pPr indent="0" marL="0">
+                        <a:buNone/>
+                      </a:pPr>
+                      <a:r>
+                        <a:rPr lang="en-US" sz="1100" dirty="0">
+                          <a:solidFill>
+                            <a:srgbClr val="0F2A20"/>
+                          </a:solidFill>
+                          <a:latin typeface="Calibri" pitchFamily="34" charset="0"/>
+                          <a:ea typeface="Calibri" pitchFamily="34" charset="-122"/>
+                          <a:cs typeface="Calibri" pitchFamily="34" charset="-120"/>
+                        </a:rPr>
+                        <a:t>66.7%</a:t>
+                      </a:r>
+                      <a:endParaRPr lang="en-US" sz="1100" dirty="0">
+                        <a:latin typeface="Calibri" charset="0"/>
+                        <a:ea typeface="Calibri" charset="0"/>
+                        <a:cs typeface="Calibri" charset="0"/>
+                      </a:endParaRPr>
+                    </a:p>
+                  </a:txBody>
+                  <a:tcPr marL="91440" marR="91440" marT="45720" marB="45720" anchor="ctr">
+                    <a:lnL w="6350" cap="flat" cmpd="sng" algn="ctr">
+                      <a:solidFill>
+                        <a:srgbClr val="D3E0D6"/>
+                      </a:solidFill>
+                      <a:prstDash val="solid"/>
+                      <a:round/>
+                      <a:headEnd type="none" w="med" len="med"/>
+                      <a:tailEnd type="none" w="med" len="med"/>
+                    </a:lnL>
+                    <a:lnR w="6350" cap="flat" cmpd="sng" algn="ctr">
+                      <a:solidFill>
+                        <a:srgbClr val="D3E0D6"/>
+                      </a:solidFill>
+                      <a:prstDash val="solid"/>
+                      <a:round/>
+                      <a:headEnd type="none" w="med" len="med"/>
+                      <a:tailEnd type="none" w="med" len="med"/>
+                    </a:lnR>
+                    <a:lnT w="6350" cap="flat" cmpd="sng" algn="ctr">
+                      <a:solidFill>
+                        <a:srgbClr val="D3E0D6"/>
+                      </a:solidFill>
+                      <a:prstDash val="solid"/>
+                      <a:round/>
+                      <a:headEnd type="none" w="med" len="med"/>
+                      <a:tailEnd type="none" w="med" len="med"/>
+                    </a:lnT>
+                    <a:lnB w="6350" cap="flat" cmpd="sng" algn="ctr">
+                      <a:solidFill>
+                        <a:srgbClr val="D3E0D6"/>
+                      </a:solidFill>
+                      <a:prstDash val="solid"/>
+                      <a:round/>
+                      <a:headEnd type="none" w="med" len="med"/>
+                      <a:tailEnd type="none" w="med" len="med"/>
+                    </a:lnB>
+                  </a:tcPr>
+                </a:tc>
+                <a:tc>
+                  <a:txBody>
+                    <a:bodyPr/>
+                    <a:lstStyle/>
+                    <a:p>
+                      <a:pPr indent="0" marL="0">
+                        <a:buNone/>
+                      </a:pPr>
+                      <a:r>
+                        <a:rPr lang="en-US" sz="1100" dirty="0">
+                          <a:solidFill>
+                            <a:srgbClr val="0F2A20"/>
+                          </a:solidFill>
+                          <a:latin typeface="Calibri" pitchFamily="34" charset="0"/>
+                          <a:ea typeface="Calibri" pitchFamily="34" charset="-122"/>
+                          <a:cs typeface="Calibri" pitchFamily="34" charset="-120"/>
+                        </a:rPr>
+                        <a:t>35.4% to 87.9%</a:t>
+                      </a:r>
+                      <a:endParaRPr lang="en-US" sz="1100" dirty="0">
+                        <a:latin typeface="Calibri" charset="0"/>
+                        <a:ea typeface="Calibri" charset="0"/>
+                        <a:cs typeface="Calibri" charset="0"/>
+                      </a:endParaRPr>
+                    </a:p>
+                  </a:txBody>
+                  <a:tcPr marL="91440" marR="91440" marT="45720" marB="45720" anchor="ctr">
+                    <a:lnL w="6350" cap="flat" cmpd="sng" algn="ctr">
+                      <a:solidFill>
+                        <a:srgbClr val="D3E0D6"/>
+                      </a:solidFill>
+                      <a:prstDash val="solid"/>
+                      <a:round/>
+                      <a:headEnd type="none" w="med" len="med"/>
+                      <a:tailEnd type="none" w="med" len="med"/>
+                    </a:lnL>
+                    <a:lnR w="6350" cap="flat" cmpd="sng" algn="ctr">
+                      <a:solidFill>
+                        <a:srgbClr val="D3E0D6"/>
+                      </a:solidFill>
+                      <a:prstDash val="solid"/>
+                      <a:round/>
+                      <a:headEnd type="none" w="med" len="med"/>
+                      <a:tailEnd type="none" w="med" len="med"/>
+                    </a:lnR>
+                    <a:lnT w="6350" cap="flat" cmpd="sng" algn="ctr">
+                      <a:solidFill>
+                        <a:srgbClr val="D3E0D6"/>
+                      </a:solidFill>
+                      <a:prstDash val="solid"/>
+                      <a:round/>
+                      <a:headEnd type="none" w="med" len="med"/>
+                      <a:tailEnd type="none" w="med" len="med"/>
+                    </a:lnT>
+                    <a:lnB w="6350" cap="flat" cmpd="sng" algn="ctr">
+                      <a:solidFill>
+                        <a:srgbClr val="D3E0D6"/>
+                      </a:solidFill>
+                      <a:prstDash val="solid"/>
+                      <a:round/>
+                      <a:headEnd type="none" w="med" len="med"/>
+                      <a:tailEnd type="none" w="med" len="med"/>
+                    </a:lnB>
+                  </a:tcPr>
+                </a:tc>
+                <a:tc>
+                  <a:txBody>
+                    <a:bodyPr/>
+                    <a:lstStyle/>
+                    <a:p>
+                      <a:pPr indent="0" marL="0">
+                        <a:buNone/>
+                      </a:pPr>
+                      <a:r>
+                        <a:rPr lang="en-US" sz="1100" dirty="0">
+                          <a:solidFill>
+                            <a:srgbClr val="0F2A20"/>
+                          </a:solidFill>
+                          <a:latin typeface="Calibri" pitchFamily="34" charset="0"/>
+                          <a:ea typeface="Calibri" pitchFamily="34" charset="-122"/>
+                          <a:cs typeface="Calibri" pitchFamily="34" charset="-120"/>
+                        </a:rPr>
+                        <a:t>Unknown</a:t>
+                      </a:r>
+                      <a:endParaRPr lang="en-US" sz="1100" dirty="0">
+                        <a:latin typeface="Calibri" charset="0"/>
+                        <a:ea typeface="Calibri" charset="0"/>
+                        <a:cs typeface="Calibri" charset="0"/>
+                      </a:endParaRPr>
+                    </a:p>
+                  </a:txBody>
+                  <a:tcPr marL="91440" marR="91440" marT="45720" marB="45720" anchor="ctr">
+                    <a:lnL w="6350" cap="flat" cmpd="sng" algn="ctr">
+                      <a:solidFill>
+                        <a:srgbClr val="D3E0D6"/>
+                      </a:solidFill>
+                      <a:prstDash val="solid"/>
+                      <a:round/>
+                      <a:headEnd type="none" w="med" len="med"/>
+                      <a:tailEnd type="none" w="med" len="med"/>
+                    </a:lnL>
+                    <a:lnR w="6350" cap="flat" cmpd="sng" algn="ctr">
+                      <a:solidFill>
+                        <a:srgbClr val="D3E0D6"/>
+                      </a:solidFill>
+                      <a:prstDash val="solid"/>
+                      <a:round/>
+                      <a:headEnd type="none" w="med" len="med"/>
+                      <a:tailEnd type="none" w="med" len="med"/>
+                    </a:lnR>
+                    <a:lnT w="6350" cap="flat" cmpd="sng" algn="ctr">
+                      <a:solidFill>
+                        <a:srgbClr val="D3E0D6"/>
+                      </a:solidFill>
+                      <a:prstDash val="solid"/>
+                      <a:round/>
+                      <a:headEnd type="none" w="med" len="med"/>
+                      <a:tailEnd type="none" w="med" len="med"/>
+                    </a:lnT>
+                    <a:lnB w="6350" cap="flat" cmpd="sng" algn="ctr">
+                      <a:solidFill>
+                        <a:srgbClr val="D3E0D6"/>
+                      </a:solidFill>
+                      <a:prstDash val="solid"/>
+                      <a:round/>
+                      <a:headEnd type="none" w="med" len="med"/>
+                      <a:tailEnd type="none" w="med" len="med"/>
+                    </a:lnB>
+                  </a:tcPr>
+                </a:tc>
+                <a:tc>
+                  <a:txBody>
+                    <a:bodyPr/>
+                    <a:lstStyle/>
+                    <a:p>
+                      <a:pPr indent="0" marL="0">
+                        <a:buNone/>
+                      </a:pPr>
+                      <a:r>
+                        <a:rPr lang="en-US" sz="1100" dirty="0">
+                          <a:solidFill>
+                            <a:srgbClr val="0F2A20"/>
+                          </a:solidFill>
+                          <a:latin typeface="Calibri" pitchFamily="34" charset="0"/>
+                          <a:ea typeface="Calibri" pitchFamily="34" charset="-122"/>
+                          <a:cs typeface="Calibri" pitchFamily="34" charset="-120"/>
+                        </a:rPr>
+                        <a:t>Unknown</a:t>
+                      </a:r>
+                      <a:endParaRPr lang="en-US" sz="1100" dirty="0">
+                        <a:latin typeface="Calibri" charset="0"/>
+                        <a:ea typeface="Calibri" charset="0"/>
+                        <a:cs typeface="Calibri" charset="0"/>
+                      </a:endParaRPr>
+                    </a:p>
+                  </a:txBody>
+                  <a:tcPr marL="91440" marR="91440" marT="45720" marB="45720" anchor="ctr">
+                    <a:lnL w="6350" cap="flat" cmpd="sng" algn="ctr">
+                      <a:solidFill>
+                        <a:srgbClr val="D3E0D6"/>
+                      </a:solidFill>
+                      <a:prstDash val="solid"/>
+                      <a:round/>
+                      <a:headEnd type="none" w="med" len="med"/>
+                      <a:tailEnd type="none" w="med" len="med"/>
+                    </a:lnL>
+                    <a:lnR w="6350" cap="flat" cmpd="sng" algn="ctr">
+                      <a:solidFill>
+                        <a:srgbClr val="D3E0D6"/>
+                      </a:solidFill>
+                      <a:prstDash val="solid"/>
+                      <a:round/>
+                      <a:headEnd type="none" w="med" len="med"/>
+                      <a:tailEnd type="none" w="med" len="med"/>
+                    </a:lnR>
+                    <a:lnT w="6350" cap="flat" cmpd="sng" algn="ctr">
+                      <a:solidFill>
+                        <a:srgbClr val="D3E0D6"/>
+                      </a:solidFill>
+                      <a:prstDash val="solid"/>
+                      <a:round/>
+                      <a:headEnd type="none" w="med" len="med"/>
+                      <a:tailEnd type="none" w="med" len="med"/>
+                    </a:lnT>
+                    <a:lnB w="6350" cap="flat" cmpd="sng" algn="ctr">
+                      <a:solidFill>
+                        <a:srgbClr val="D3E0D6"/>
+                      </a:solidFill>
+                      <a:prstDash val="solid"/>
+                      <a:round/>
+                      <a:headEnd type="none" w="med" len="med"/>
+                      <a:tailEnd type="none" w="med" len="med"/>
+                    </a:lnB>
+                  </a:tcPr>
+                </a:tc>
+                <a:tc>
+                  <a:txBody>
+                    <a:bodyPr/>
+                    <a:lstStyle/>
+                    <a:p>
+                      <a:pPr indent="0" marL="0">
+                        <a:buNone/>
+                      </a:pPr>
+                      <a:r>
+                        <a:rPr lang="en-US" sz="1100" dirty="0">
+                          <a:solidFill>
+                            <a:srgbClr val="0F2A20"/>
+                          </a:solidFill>
+                          <a:latin typeface="Calibri" pitchFamily="34" charset="0"/>
+                          <a:ea typeface="Calibri" pitchFamily="34" charset="-122"/>
+                          <a:cs typeface="Calibri" pitchFamily="34" charset="-120"/>
+                        </a:rPr>
+                        <a:t>Not assessed</a:t>
+                      </a:r>
+                      <a:endParaRPr lang="en-US" sz="1100" dirty="0">
+                        <a:latin typeface="Calibri" charset="0"/>
+                        <a:ea typeface="Calibri" charset="0"/>
+                        <a:cs typeface="Calibri" charset="0"/>
+                      </a:endParaRPr>
+                    </a:p>
+                  </a:txBody>
+                  <a:tcPr marL="91440" marR="91440" marT="45720" marB="45720" anchor="ctr">
+                    <a:lnL w="6350" cap="flat" cmpd="sng" algn="ctr">
+                      <a:solidFill>
+                        <a:srgbClr val="D3E0D6"/>
+                      </a:solidFill>
+                      <a:prstDash val="solid"/>
+                      <a:round/>
+                      <a:headEnd type="none" w="med" len="med"/>
+                      <a:tailEnd type="none" w="med" len="med"/>
+                    </a:lnL>
+                    <a:lnR w="6350" cap="flat" cmpd="sng" algn="ctr">
+                      <a:solidFill>
+                        <a:srgbClr val="D3E0D6"/>
+                      </a:solidFill>
+                      <a:prstDash val="solid"/>
+                      <a:round/>
+                      <a:headEnd type="none" w="med" len="med"/>
+                      <a:tailEnd type="none" w="med" len="med"/>
+                    </a:lnR>
+                    <a:lnT w="6350" cap="flat" cmpd="sng" algn="ctr">
+                      <a:solidFill>
+                        <a:srgbClr val="D3E0D6"/>
+                      </a:solidFill>
+                      <a:prstDash val="solid"/>
+                      <a:round/>
+                      <a:headEnd type="none" w="med" len="med"/>
+                      <a:tailEnd type="none" w="med" len="med"/>
+                    </a:lnT>
+                    <a:lnB w="6350" cap="flat" cmpd="sng" algn="ctr">
+                      <a:solidFill>
+                        <a:srgbClr val="D3E0D6"/>
+                      </a:solidFill>
+                      <a:prstDash val="solid"/>
+                      <a:round/>
+                      <a:headEnd type="none" w="med" len="med"/>
+                      <a:tailEnd type="none" w="med" len="med"/>
+                    </a:lnB>
+                  </a:tcPr>
+                </a:tc>
+              </a:tr>
+              <a:tr h="0">
+                <a:tc>
+                  <a:txBody>
+                    <a:bodyPr/>
+                    <a:lstStyle/>
+                    <a:p>
+                      <a:pPr indent="0" marL="0">
+                        <a:buNone/>
+                      </a:pPr>
+                      <a:r>
+                        <a:rPr lang="en-US" sz="1100" dirty="0">
+                          <a:solidFill>
+                            <a:srgbClr val="0F2A20"/>
                           </a:solidFill>
                           <a:latin typeface="Calibri" pitchFamily="34" charset="0"/>
                           <a:ea typeface="Calibri" pitchFamily="34" charset="-122"/>
@@ -3722,7 +6028,7 @@
                   <a:tcPr marL="91440" marR="91440" marT="45720" marB="45720" anchor="ctr">
                     <a:lnL w="6350" cap="flat" cmpd="sng" algn="ctr">
                       <a:solidFill>
-                        <a:srgbClr val="CBD5E1"/>
+                        <a:srgbClr val="D3E0D6"/>
                       </a:solidFill>
                       <a:prstDash val="solid"/>
                       <a:round/>
@@ -3731,7 +6037,7 @@
                     </a:lnL>
                     <a:lnR w="6350" cap="flat" cmpd="sng" algn="ctr">
                       <a:solidFill>
-                        <a:srgbClr val="CBD5E1"/>
+                        <a:srgbClr val="D3E0D6"/>
                       </a:solidFill>
                       <a:prstDash val="solid"/>
                       <a:round/>
@@ -3740,7 +6046,7 @@
                     </a:lnR>
                     <a:lnT w="6350" cap="flat" cmpd="sng" algn="ctr">
                       <a:solidFill>
-                        <a:srgbClr val="CBD5E1"/>
+                        <a:srgbClr val="D3E0D6"/>
                       </a:solidFill>
                       <a:prstDash val="solid"/>
                       <a:round/>
@@ -3749,7 +6055,7 @@
                     </a:lnT>
                     <a:lnB w="6350" cap="flat" cmpd="sng" algn="ctr">
                       <a:solidFill>
-                        <a:srgbClr val="CBD5E1"/>
+                        <a:srgbClr val="D3E0D6"/>
                       </a:solidFill>
                       <a:prstDash val="solid"/>
                       <a:round/>
@@ -3769,13 +6075,13 @@
                       <a:r>
                         <a:rPr lang="en-US" sz="1100" dirty="0">
                           <a:solidFill>
-                            <a:srgbClr val="1F2937"/>
+                            <a:srgbClr val="0F2A20"/>
                           </a:solidFill>
                           <a:latin typeface="Calibri" pitchFamily="34" charset="0"/>
                           <a:ea typeface="Calibri" pitchFamily="34" charset="-122"/>
                           <a:cs typeface="Calibri" pitchFamily="34" charset="-120"/>
                         </a:rPr>
-                        <a:t>4 of 5</a:t>
+                        <a:t>5 of 9</a:t>
                       </a:r>
                       <a:endParaRPr lang="en-US" sz="1100" dirty="0">
                         <a:latin typeface="Calibri" charset="0"/>
@@ -3787,7 +6093,7 @@
                   <a:tcPr marL="91440" marR="91440" marT="45720" marB="45720" anchor="ctr">
                     <a:lnL w="6350" cap="flat" cmpd="sng" algn="ctr">
                       <a:solidFill>
-                        <a:srgbClr val="CBD5E1"/>
+                        <a:srgbClr val="D3E0D6"/>
                       </a:solidFill>
                       <a:prstDash val="solid"/>
                       <a:round/>
@@ -3796,7 +6102,7 @@
                     </a:lnL>
                     <a:lnR w="6350" cap="flat" cmpd="sng" algn="ctr">
                       <a:solidFill>
-                        <a:srgbClr val="CBD5E1"/>
+                        <a:srgbClr val="D3E0D6"/>
                       </a:solidFill>
                       <a:prstDash val="solid"/>
                       <a:round/>
@@ -3805,7 +6111,7 @@
                     </a:lnR>
                     <a:lnT w="6350" cap="flat" cmpd="sng" algn="ctr">
                       <a:solidFill>
-                        <a:srgbClr val="CBD5E1"/>
+                        <a:srgbClr val="D3E0D6"/>
                       </a:solidFill>
                       <a:prstDash val="solid"/>
                       <a:round/>
@@ -3814,7 +6120,7 @@
                     </a:lnT>
                     <a:lnB w="6350" cap="flat" cmpd="sng" algn="ctr">
                       <a:solidFill>
-                        <a:srgbClr val="CBD5E1"/>
+                        <a:srgbClr val="D3E0D6"/>
                       </a:solidFill>
                       <a:prstDash val="solid"/>
                       <a:round/>
@@ -3834,13 +6140,13 @@
                       <a:r>
                         <a:rPr lang="en-US" sz="1100" dirty="0">
                           <a:solidFill>
-                            <a:srgbClr val="1F2937"/>
+                            <a:srgbClr val="0F2A20"/>
                           </a:solidFill>
                           <a:latin typeface="Calibri" pitchFamily="34" charset="0"/>
                           <a:ea typeface="Calibri" pitchFamily="34" charset="-122"/>
                           <a:cs typeface="Calibri" pitchFamily="34" charset="-120"/>
                         </a:rPr>
-                        <a:t>80%</a:t>
+                        <a:t>55.6%</a:t>
                       </a:r>
                       <a:endParaRPr lang="en-US" sz="1100" dirty="0">
                         <a:latin typeface="Calibri" charset="0"/>
@@ -3852,7 +6158,7 @@
                   <a:tcPr marL="91440" marR="91440" marT="45720" marB="45720" anchor="ctr">
                     <a:lnL w="6350" cap="flat" cmpd="sng" algn="ctr">
                       <a:solidFill>
-                        <a:srgbClr val="CBD5E1"/>
+                        <a:srgbClr val="D3E0D6"/>
                       </a:solidFill>
                       <a:prstDash val="solid"/>
                       <a:round/>
@@ -3861,7 +6167,7 @@
                     </a:lnL>
                     <a:lnR w="6350" cap="flat" cmpd="sng" algn="ctr">
                       <a:solidFill>
-                        <a:srgbClr val="CBD5E1"/>
+                        <a:srgbClr val="D3E0D6"/>
                       </a:solidFill>
                       <a:prstDash val="solid"/>
                       <a:round/>
@@ -3870,7 +6176,7 @@
                     </a:lnR>
                     <a:lnT w="6350" cap="flat" cmpd="sng" algn="ctr">
                       <a:solidFill>
-                        <a:srgbClr val="CBD5E1"/>
+                        <a:srgbClr val="D3E0D6"/>
                       </a:solidFill>
                       <a:prstDash val="solid"/>
                       <a:round/>
@@ -3879,7 +6185,7 @@
                     </a:lnT>
                     <a:lnB w="6350" cap="flat" cmpd="sng" algn="ctr">
                       <a:solidFill>
-                        <a:srgbClr val="CBD5E1"/>
+                        <a:srgbClr val="D3E0D6"/>
                       </a:solidFill>
                       <a:prstDash val="solid"/>
                       <a:round/>
@@ -3899,13 +6205,13 @@
                       <a:r>
                         <a:rPr lang="en-US" sz="1100" dirty="0">
                           <a:solidFill>
-                            <a:srgbClr val="1F2937"/>
+                            <a:srgbClr val="0F2A20"/>
                           </a:solidFill>
                           <a:latin typeface="Calibri" pitchFamily="34" charset="0"/>
                           <a:ea typeface="Calibri" pitchFamily="34" charset="-122"/>
                           <a:cs typeface="Calibri" pitchFamily="34" charset="-120"/>
                         </a:rPr>
-                        <a:t>37.6% to 96.4%</a:t>
+                        <a:t>26.7% to 81.1%</a:t>
                       </a:r>
                       <a:endParaRPr lang="en-US" sz="1100" dirty="0">
                         <a:latin typeface="Calibri" charset="0"/>
@@ -3917,7 +6223,7 @@
                   <a:tcPr marL="91440" marR="91440" marT="45720" marB="45720" anchor="ctr">
                     <a:lnL w="6350" cap="flat" cmpd="sng" algn="ctr">
                       <a:solidFill>
-                        <a:srgbClr val="CBD5E1"/>
+                        <a:srgbClr val="D3E0D6"/>
                       </a:solidFill>
                       <a:prstDash val="solid"/>
                       <a:round/>
@@ -3926,7 +6232,7 @@
                     </a:lnL>
                     <a:lnR w="6350" cap="flat" cmpd="sng" algn="ctr">
                       <a:solidFill>
-                        <a:srgbClr val="CBD5E1"/>
+                        <a:srgbClr val="D3E0D6"/>
                       </a:solidFill>
                       <a:prstDash val="solid"/>
                       <a:round/>
@@ -3935,7 +6241,7 @@
                     </a:lnR>
                     <a:lnT w="6350" cap="flat" cmpd="sng" algn="ctr">
                       <a:solidFill>
-                        <a:srgbClr val="CBD5E1"/>
+                        <a:srgbClr val="D3E0D6"/>
                       </a:solidFill>
                       <a:prstDash val="solid"/>
                       <a:round/>
@@ -3944,7 +6250,7 @@
                     </a:lnT>
                     <a:lnB w="6350" cap="flat" cmpd="sng" algn="ctr">
                       <a:solidFill>
-                        <a:srgbClr val="CBD5E1"/>
+                        <a:srgbClr val="D3E0D6"/>
                       </a:solidFill>
                       <a:prstDash val="solid"/>
                       <a:round/>
@@ -3964,7 +6270,7 @@
                       <a:r>
                         <a:rPr lang="en-US" sz="1100" dirty="0">
                           <a:solidFill>
-                            <a:srgbClr val="1F2937"/>
+                            <a:srgbClr val="0F2A20"/>
                           </a:solidFill>
                           <a:latin typeface="Calibri" pitchFamily="34" charset="0"/>
                           <a:ea typeface="Calibri" pitchFamily="34" charset="-122"/>
@@ -3982,7 +6288,7 @@
                   <a:tcPr marL="91440" marR="91440" marT="45720" marB="45720" anchor="ctr">
                     <a:lnL w="6350" cap="flat" cmpd="sng" algn="ctr">
                       <a:solidFill>
-                        <a:srgbClr val="CBD5E1"/>
+                        <a:srgbClr val="D3E0D6"/>
                       </a:solidFill>
                       <a:prstDash val="solid"/>
                       <a:round/>
@@ -3991,7 +6297,7 @@
                     </a:lnL>
                     <a:lnR w="6350" cap="flat" cmpd="sng" algn="ctr">
                       <a:solidFill>
-                        <a:srgbClr val="CBD5E1"/>
+                        <a:srgbClr val="D3E0D6"/>
                       </a:solidFill>
                       <a:prstDash val="solid"/>
                       <a:round/>
@@ -4000,7 +6306,7 @@
                     </a:lnR>
                     <a:lnT w="6350" cap="flat" cmpd="sng" algn="ctr">
                       <a:solidFill>
-                        <a:srgbClr val="CBD5E1"/>
+                        <a:srgbClr val="D3E0D6"/>
                       </a:solidFill>
                       <a:prstDash val="solid"/>
                       <a:round/>
@@ -4009,7 +6315,7 @@
                     </a:lnT>
                     <a:lnB w="6350" cap="flat" cmpd="sng" algn="ctr">
                       <a:solidFill>
-                        <a:srgbClr val="CBD5E1"/>
+                        <a:srgbClr val="D3E0D6"/>
                       </a:solidFill>
                       <a:prstDash val="solid"/>
                       <a:round/>
@@ -4029,7 +6335,7 @@
                       <a:r>
                         <a:rPr lang="en-US" sz="1100" dirty="0">
                           <a:solidFill>
-                            <a:srgbClr val="1F2937"/>
+                            <a:srgbClr val="0F2A20"/>
                           </a:solidFill>
                           <a:latin typeface="Calibri" pitchFamily="34" charset="0"/>
                           <a:ea typeface="Calibri" pitchFamily="34" charset="-122"/>
@@ -4047,7 +6353,7 @@
                   <a:tcPr marL="91440" marR="91440" marT="45720" marB="45720" anchor="ctr">
                     <a:lnL w="6350" cap="flat" cmpd="sng" algn="ctr">
                       <a:solidFill>
-                        <a:srgbClr val="CBD5E1"/>
+                        <a:srgbClr val="D3E0D6"/>
                       </a:solidFill>
                       <a:prstDash val="solid"/>
                       <a:round/>
@@ -4056,7 +6362,7 @@
                     </a:lnL>
                     <a:lnR w="6350" cap="flat" cmpd="sng" algn="ctr">
                       <a:solidFill>
-                        <a:srgbClr val="CBD5E1"/>
+                        <a:srgbClr val="D3E0D6"/>
                       </a:solidFill>
                       <a:prstDash val="solid"/>
                       <a:round/>
@@ -4065,7 +6371,7 @@
                     </a:lnR>
                     <a:lnT w="6350" cap="flat" cmpd="sng" algn="ctr">
                       <a:solidFill>
-                        <a:srgbClr val="CBD5E1"/>
+                        <a:srgbClr val="D3E0D6"/>
                       </a:solidFill>
                       <a:prstDash val="solid"/>
                       <a:round/>
@@ -4074,7 +6380,7 @@
                     </a:lnT>
                     <a:lnB w="6350" cap="flat" cmpd="sng" algn="ctr">
                       <a:solidFill>
-                        <a:srgbClr val="CBD5E1"/>
+                        <a:srgbClr val="D3E0D6"/>
                       </a:solidFill>
                       <a:prstDash val="solid"/>
                       <a:round/>
@@ -4094,7 +6400,7 @@
                       <a:r>
                         <a:rPr lang="en-US" sz="1100" dirty="0">
                           <a:solidFill>
-                            <a:srgbClr val="1F2937"/>
+                            <a:srgbClr val="0F2A20"/>
                           </a:solidFill>
                           <a:latin typeface="Calibri" pitchFamily="34" charset="0"/>
                           <a:ea typeface="Calibri" pitchFamily="34" charset="-122"/>
@@ -4112,7 +6418,7 @@
                   <a:tcPr marL="91440" marR="91440" marT="45720" marB="45720" anchor="ctr">
                     <a:lnL w="6350" cap="flat" cmpd="sng" algn="ctr">
                       <a:solidFill>
-                        <a:srgbClr val="CBD5E1"/>
+                        <a:srgbClr val="D3E0D6"/>
                       </a:solidFill>
                       <a:prstDash val="solid"/>
                       <a:round/>
@@ -4121,7 +6427,7 @@
                     </a:lnL>
                     <a:lnR w="6350" cap="flat" cmpd="sng" algn="ctr">
                       <a:solidFill>
-                        <a:srgbClr val="CBD5E1"/>
+                        <a:srgbClr val="D3E0D6"/>
                       </a:solidFill>
                       <a:prstDash val="solid"/>
                       <a:round/>
@@ -4130,7 +6436,7 @@
                     </a:lnR>
                     <a:lnT w="6350" cap="flat" cmpd="sng" algn="ctr">
                       <a:solidFill>
-                        <a:srgbClr val="CBD5E1"/>
+                        <a:srgbClr val="D3E0D6"/>
                       </a:solidFill>
                       <a:prstDash val="solid"/>
                       <a:round/>
@@ -4139,7 +6445,7 @@
                     </a:lnT>
                     <a:lnB w="6350" cap="flat" cmpd="sng" algn="ctr">
                       <a:solidFill>
-                        <a:srgbClr val="CBD5E1"/>
+                        <a:srgbClr val="D3E0D6"/>
                       </a:solidFill>
                       <a:prstDash val="solid"/>
                       <a:round/>
@@ -4161,13 +6467,13 @@
                       <a:r>
                         <a:rPr lang="en-US" sz="1100" dirty="0">
                           <a:solidFill>
-                            <a:srgbClr val="1F2937"/>
+                            <a:srgbClr val="0F2A20"/>
                           </a:solidFill>
                           <a:latin typeface="Calibri" pitchFamily="34" charset="0"/>
                           <a:ea typeface="Calibri" pitchFamily="34" charset="-122"/>
                           <a:cs typeface="Calibri" pitchFamily="34" charset="-120"/>
                         </a:rPr>
-                        <a:t>stakeholders</a:t>
+                        <a:t>SQL</a:t>
                       </a:r>
                       <a:endParaRPr lang="en-US" sz="1100" dirty="0">
                         <a:latin typeface="Calibri" charset="0"/>
@@ -4179,7 +6485,7 @@
                   <a:tcPr marL="91440" marR="91440" marT="45720" marB="45720" anchor="ctr">
                     <a:lnL w="6350" cap="flat" cmpd="sng" algn="ctr">
                       <a:solidFill>
-                        <a:srgbClr val="CBD5E1"/>
+                        <a:srgbClr val="D3E0D6"/>
                       </a:solidFill>
                       <a:prstDash val="solid"/>
                       <a:round/>
@@ -4188,7 +6494,7 @@
                     </a:lnL>
                     <a:lnR w="6350" cap="flat" cmpd="sng" algn="ctr">
                       <a:solidFill>
-                        <a:srgbClr val="CBD5E1"/>
+                        <a:srgbClr val="D3E0D6"/>
                       </a:solidFill>
                       <a:prstDash val="solid"/>
                       <a:round/>
@@ -4197,7 +6503,7 @@
                     </a:lnR>
                     <a:lnT w="6350" cap="flat" cmpd="sng" algn="ctr">
                       <a:solidFill>
-                        <a:srgbClr val="CBD5E1"/>
+                        <a:srgbClr val="D3E0D6"/>
                       </a:solidFill>
                       <a:prstDash val="solid"/>
                       <a:round/>
@@ -4206,7 +6512,7 @@
                     </a:lnT>
                     <a:lnB w="6350" cap="flat" cmpd="sng" algn="ctr">
                       <a:solidFill>
-                        <a:srgbClr val="CBD5E1"/>
+                        <a:srgbClr val="D3E0D6"/>
                       </a:solidFill>
                       <a:prstDash val="solid"/>
                       <a:round/>
@@ -4226,13 +6532,13 @@
                       <a:r>
                         <a:rPr lang="en-US" sz="1100" dirty="0">
                           <a:solidFill>
-                            <a:srgbClr val="1F2937"/>
+                            <a:srgbClr val="0F2A20"/>
                           </a:solidFill>
                           <a:latin typeface="Calibri" pitchFamily="34" charset="0"/>
                           <a:ea typeface="Calibri" pitchFamily="34" charset="-122"/>
                           <a:cs typeface="Calibri" pitchFamily="34" charset="-120"/>
                         </a:rPr>
-                        <a:t>4 of 5</a:t>
+                        <a:t>4 of 9</a:t>
                       </a:r>
                       <a:endParaRPr lang="en-US" sz="1100" dirty="0">
                         <a:latin typeface="Calibri" charset="0"/>
@@ -4244,7 +6550,7 @@
                   <a:tcPr marL="91440" marR="91440" marT="45720" marB="45720" anchor="ctr">
                     <a:lnL w="6350" cap="flat" cmpd="sng" algn="ctr">
                       <a:solidFill>
-                        <a:srgbClr val="CBD5E1"/>
+                        <a:srgbClr val="D3E0D6"/>
                       </a:solidFill>
                       <a:prstDash val="solid"/>
                       <a:round/>
@@ -4253,7 +6559,7 @@
                     </a:lnL>
                     <a:lnR w="6350" cap="flat" cmpd="sng" algn="ctr">
                       <a:solidFill>
-                        <a:srgbClr val="CBD5E1"/>
+                        <a:srgbClr val="D3E0D6"/>
                       </a:solidFill>
                       <a:prstDash val="solid"/>
                       <a:round/>
@@ -4262,7 +6568,7 @@
                     </a:lnR>
                     <a:lnT w="6350" cap="flat" cmpd="sng" algn="ctr">
                       <a:solidFill>
-                        <a:srgbClr val="CBD5E1"/>
+                        <a:srgbClr val="D3E0D6"/>
                       </a:solidFill>
                       <a:prstDash val="solid"/>
                       <a:round/>
@@ -4271,7 +6577,7 @@
                     </a:lnT>
                     <a:lnB w="6350" cap="flat" cmpd="sng" algn="ctr">
                       <a:solidFill>
-                        <a:srgbClr val="CBD5E1"/>
+                        <a:srgbClr val="D3E0D6"/>
                       </a:solidFill>
                       <a:prstDash val="solid"/>
                       <a:round/>
@@ -4291,13 +6597,13 @@
                       <a:r>
                         <a:rPr lang="en-US" sz="1100" dirty="0">
                           <a:solidFill>
-                            <a:srgbClr val="1F2937"/>
+                            <a:srgbClr val="0F2A20"/>
                           </a:solidFill>
                           <a:latin typeface="Calibri" pitchFamily="34" charset="0"/>
                           <a:ea typeface="Calibri" pitchFamily="34" charset="-122"/>
                           <a:cs typeface="Calibri" pitchFamily="34" charset="-120"/>
                         </a:rPr>
-                        <a:t>80%</a:t>
+                        <a:t>44.4%</a:t>
                       </a:r>
                       <a:endParaRPr lang="en-US" sz="1100" dirty="0">
                         <a:latin typeface="Calibri" charset="0"/>
@@ -4309,7 +6615,7 @@
                   <a:tcPr marL="91440" marR="91440" marT="45720" marB="45720" anchor="ctr">
                     <a:lnL w="6350" cap="flat" cmpd="sng" algn="ctr">
                       <a:solidFill>
-                        <a:srgbClr val="CBD5E1"/>
+                        <a:srgbClr val="D3E0D6"/>
                       </a:solidFill>
                       <a:prstDash val="solid"/>
                       <a:round/>
@@ -4318,7 +6624,7 @@
                     </a:lnL>
                     <a:lnR w="6350" cap="flat" cmpd="sng" algn="ctr">
                       <a:solidFill>
-                        <a:srgbClr val="CBD5E1"/>
+                        <a:srgbClr val="D3E0D6"/>
                       </a:solidFill>
                       <a:prstDash val="solid"/>
                       <a:round/>
@@ -4327,7 +6633,7 @@
                     </a:lnR>
                     <a:lnT w="6350" cap="flat" cmpd="sng" algn="ctr">
                       <a:solidFill>
-                        <a:srgbClr val="CBD5E1"/>
+                        <a:srgbClr val="D3E0D6"/>
                       </a:solidFill>
                       <a:prstDash val="solid"/>
                       <a:round/>
@@ -4336,7 +6642,7 @@
                     </a:lnT>
                     <a:lnB w="6350" cap="flat" cmpd="sng" algn="ctr">
                       <a:solidFill>
-                        <a:srgbClr val="CBD5E1"/>
+                        <a:srgbClr val="D3E0D6"/>
                       </a:solidFill>
                       <a:prstDash val="solid"/>
                       <a:round/>
@@ -4356,13 +6662,13 @@
                       <a:r>
                         <a:rPr lang="en-US" sz="1100" dirty="0">
                           <a:solidFill>
-                            <a:srgbClr val="1F2937"/>
+                            <a:srgbClr val="0F2A20"/>
                           </a:solidFill>
                           <a:latin typeface="Calibri" pitchFamily="34" charset="0"/>
                           <a:ea typeface="Calibri" pitchFamily="34" charset="-122"/>
                           <a:cs typeface="Calibri" pitchFamily="34" charset="-120"/>
                         </a:rPr>
-                        <a:t>37.6% to 96.4%</a:t>
+                        <a:t>18.9% to 73.3%</a:t>
                       </a:r>
                       <a:endParaRPr lang="en-US" sz="1100" dirty="0">
                         <a:latin typeface="Calibri" charset="0"/>
@@ -4374,7 +6680,7 @@
                   <a:tcPr marL="91440" marR="91440" marT="45720" marB="45720" anchor="ctr">
                     <a:lnL w="6350" cap="flat" cmpd="sng" algn="ctr">
                       <a:solidFill>
-                        <a:srgbClr val="CBD5E1"/>
+                        <a:srgbClr val="D3E0D6"/>
                       </a:solidFill>
                       <a:prstDash val="solid"/>
                       <a:round/>
@@ -4383,7 +6689,7 @@
                     </a:lnL>
                     <a:lnR w="6350" cap="flat" cmpd="sng" algn="ctr">
                       <a:solidFill>
-                        <a:srgbClr val="CBD5E1"/>
+                        <a:srgbClr val="D3E0D6"/>
                       </a:solidFill>
                       <a:prstDash val="solid"/>
                       <a:round/>
@@ -4392,7 +6698,7 @@
                     </a:lnR>
                     <a:lnT w="6350" cap="flat" cmpd="sng" algn="ctr">
                       <a:solidFill>
-                        <a:srgbClr val="CBD5E1"/>
+                        <a:srgbClr val="D3E0D6"/>
                       </a:solidFill>
                       <a:prstDash val="solid"/>
                       <a:round/>
@@ -4401,7 +6707,7 @@
                     </a:lnT>
                     <a:lnB w="6350" cap="flat" cmpd="sng" algn="ctr">
                       <a:solidFill>
-                        <a:srgbClr val="CBD5E1"/>
+                        <a:srgbClr val="D3E0D6"/>
                       </a:solidFill>
                       <a:prstDash val="solid"/>
                       <a:round/>
@@ -4421,7 +6727,7 @@
                       <a:r>
                         <a:rPr lang="en-US" sz="1100" dirty="0">
                           <a:solidFill>
-                            <a:srgbClr val="1F2937"/>
+                            <a:srgbClr val="0F2A20"/>
                           </a:solidFill>
                           <a:latin typeface="Calibri" pitchFamily="34" charset="0"/>
                           <a:ea typeface="Calibri" pitchFamily="34" charset="-122"/>
@@ -4439,7 +6745,7 @@
                   <a:tcPr marL="91440" marR="91440" marT="45720" marB="45720" anchor="ctr">
                     <a:lnL w="6350" cap="flat" cmpd="sng" algn="ctr">
                       <a:solidFill>
-                        <a:srgbClr val="CBD5E1"/>
+                        <a:srgbClr val="D3E0D6"/>
                       </a:solidFill>
                       <a:prstDash val="solid"/>
                       <a:round/>
@@ -4448,7 +6754,7 @@
                     </a:lnL>
                     <a:lnR w="6350" cap="flat" cmpd="sng" algn="ctr">
                       <a:solidFill>
-                        <a:srgbClr val="CBD5E1"/>
+                        <a:srgbClr val="D3E0D6"/>
                       </a:solidFill>
                       <a:prstDash val="solid"/>
                       <a:round/>
@@ -4457,7 +6763,7 @@
                     </a:lnR>
                     <a:lnT w="6350" cap="flat" cmpd="sng" algn="ctr">
                       <a:solidFill>
-                        <a:srgbClr val="CBD5E1"/>
+                        <a:srgbClr val="D3E0D6"/>
                       </a:solidFill>
                       <a:prstDash val="solid"/>
                       <a:round/>
@@ -4466,7 +6772,7 @@
                     </a:lnT>
                     <a:lnB w="6350" cap="flat" cmpd="sng" algn="ctr">
                       <a:solidFill>
-                        <a:srgbClr val="CBD5E1"/>
+                        <a:srgbClr val="D3E0D6"/>
                       </a:solidFill>
                       <a:prstDash val="solid"/>
                       <a:round/>
@@ -4486,7 +6792,7 @@
                       <a:r>
                         <a:rPr lang="en-US" sz="1100" dirty="0">
                           <a:solidFill>
-                            <a:srgbClr val="1F2937"/>
+                            <a:srgbClr val="0F2A20"/>
                           </a:solidFill>
                           <a:latin typeface="Calibri" pitchFamily="34" charset="0"/>
                           <a:ea typeface="Calibri" pitchFamily="34" charset="-122"/>
@@ -4504,7 +6810,7 @@
                   <a:tcPr marL="91440" marR="91440" marT="45720" marB="45720" anchor="ctr">
                     <a:lnL w="6350" cap="flat" cmpd="sng" algn="ctr">
                       <a:solidFill>
-                        <a:srgbClr val="CBD5E1"/>
+                        <a:srgbClr val="D3E0D6"/>
                       </a:solidFill>
                       <a:prstDash val="solid"/>
                       <a:round/>
@@ -4513,7 +6819,7 @@
                     </a:lnL>
                     <a:lnR w="6350" cap="flat" cmpd="sng" algn="ctr">
                       <a:solidFill>
-                        <a:srgbClr val="CBD5E1"/>
+                        <a:srgbClr val="D3E0D6"/>
                       </a:solidFill>
                       <a:prstDash val="solid"/>
                       <a:round/>
@@ -4522,7 +6828,7 @@
                     </a:lnR>
                     <a:lnT w="6350" cap="flat" cmpd="sng" algn="ctr">
                       <a:solidFill>
-                        <a:srgbClr val="CBD5E1"/>
+                        <a:srgbClr val="D3E0D6"/>
                       </a:solidFill>
                       <a:prstDash val="solid"/>
                       <a:round/>
@@ -4531,7 +6837,7 @@
                     </a:lnT>
                     <a:lnB w="6350" cap="flat" cmpd="sng" algn="ctr">
                       <a:solidFill>
-                        <a:srgbClr val="CBD5E1"/>
+                        <a:srgbClr val="D3E0D6"/>
                       </a:solidFill>
                       <a:prstDash val="solid"/>
                       <a:round/>
@@ -4551,7 +6857,7 @@
                       <a:r>
                         <a:rPr lang="en-US" sz="1100" dirty="0">
                           <a:solidFill>
-                            <a:srgbClr val="1F2937"/>
+                            <a:srgbClr val="0F2A20"/>
                           </a:solidFill>
                           <a:latin typeface="Calibri" pitchFamily="34" charset="0"/>
                           <a:ea typeface="Calibri" pitchFamily="34" charset="-122"/>
@@ -4569,7 +6875,7 @@
                   <a:tcPr marL="91440" marR="91440" marT="45720" marB="45720" anchor="ctr">
                     <a:lnL w="6350" cap="flat" cmpd="sng" algn="ctr">
                       <a:solidFill>
-                        <a:srgbClr val="CBD5E1"/>
+                        <a:srgbClr val="D3E0D6"/>
                       </a:solidFill>
                       <a:prstDash val="solid"/>
                       <a:round/>
@@ -4578,7 +6884,7 @@
                     </a:lnL>
                     <a:lnR w="6350" cap="flat" cmpd="sng" algn="ctr">
                       <a:solidFill>
-                        <a:srgbClr val="CBD5E1"/>
+                        <a:srgbClr val="D3E0D6"/>
                       </a:solidFill>
                       <a:prstDash val="solid"/>
                       <a:round/>
@@ -4587,7 +6893,7 @@
                     </a:lnR>
                     <a:lnT w="6350" cap="flat" cmpd="sng" algn="ctr">
                       <a:solidFill>
-                        <a:srgbClr val="CBD5E1"/>
+                        <a:srgbClr val="D3E0D6"/>
                       </a:solidFill>
                       <a:prstDash val="solid"/>
                       <a:round/>
@@ -4596,7 +6902,7 @@
                     </a:lnT>
                     <a:lnB w="6350" cap="flat" cmpd="sng" algn="ctr">
                       <a:solidFill>
-                        <a:srgbClr val="CBD5E1"/>
+                        <a:srgbClr val="D3E0D6"/>
                       </a:solidFill>
                       <a:prstDash val="solid"/>
                       <a:round/>
@@ -4618,13 +6924,13 @@
                       <a:r>
                         <a:rPr lang="en-US" sz="1100" dirty="0">
                           <a:solidFill>
-                            <a:srgbClr val="1F2937"/>
+                            <a:srgbClr val="0F2A20"/>
                           </a:solidFill>
                           <a:latin typeface="Calibri" pitchFamily="34" charset="0"/>
                           <a:ea typeface="Calibri" pitchFamily="34" charset="-122"/>
                           <a:cs typeface="Calibri" pitchFamily="34" charset="-120"/>
                         </a:rPr>
-                        <a:t>SQL</a:t>
+                        <a:t>statistics</a:t>
                       </a:r>
                       <a:endParaRPr lang="en-US" sz="1100" dirty="0">
                         <a:latin typeface="Calibri" charset="0"/>
@@ -4636,7 +6942,7 @@
                   <a:tcPr marL="91440" marR="91440" marT="45720" marB="45720" anchor="ctr">
                     <a:lnL w="6350" cap="flat" cmpd="sng" algn="ctr">
                       <a:solidFill>
-                        <a:srgbClr val="CBD5E1"/>
+                        <a:srgbClr val="D3E0D6"/>
                       </a:solidFill>
                       <a:prstDash val="solid"/>
                       <a:round/>
@@ -4645,7 +6951,7 @@
                     </a:lnL>
                     <a:lnR w="6350" cap="flat" cmpd="sng" algn="ctr">
                       <a:solidFill>
-                        <a:srgbClr val="CBD5E1"/>
+                        <a:srgbClr val="D3E0D6"/>
                       </a:solidFill>
                       <a:prstDash val="solid"/>
                       <a:round/>
@@ -4654,7 +6960,7 @@
                     </a:lnR>
                     <a:lnT w="6350" cap="flat" cmpd="sng" algn="ctr">
                       <a:solidFill>
-                        <a:srgbClr val="CBD5E1"/>
+                        <a:srgbClr val="D3E0D6"/>
                       </a:solidFill>
                       <a:prstDash val="solid"/>
                       <a:round/>
@@ -4663,7 +6969,7 @@
                     </a:lnT>
                     <a:lnB w="6350" cap="flat" cmpd="sng" algn="ctr">
                       <a:solidFill>
-                        <a:srgbClr val="CBD5E1"/>
+                        <a:srgbClr val="D3E0D6"/>
                       </a:solidFill>
                       <a:prstDash val="solid"/>
                       <a:round/>
@@ -4683,13 +6989,13 @@
                       <a:r>
                         <a:rPr lang="en-US" sz="1100" dirty="0">
                           <a:solidFill>
-                            <a:srgbClr val="1F2937"/>
+                            <a:srgbClr val="0F2A20"/>
                           </a:solidFill>
                           <a:latin typeface="Calibri" pitchFamily="34" charset="0"/>
                           <a:ea typeface="Calibri" pitchFamily="34" charset="-122"/>
                           <a:cs typeface="Calibri" pitchFamily="34" charset="-120"/>
                         </a:rPr>
-                        <a:t>2 of 5</a:t>
+                        <a:t>4 of 9</a:t>
                       </a:r>
                       <a:endParaRPr lang="en-US" sz="1100" dirty="0">
                         <a:latin typeface="Calibri" charset="0"/>
@@ -4701,7 +7007,7 @@
                   <a:tcPr marL="91440" marR="91440" marT="45720" marB="45720" anchor="ctr">
                     <a:lnL w="6350" cap="flat" cmpd="sng" algn="ctr">
                       <a:solidFill>
-                        <a:srgbClr val="CBD5E1"/>
+                        <a:srgbClr val="D3E0D6"/>
                       </a:solidFill>
                       <a:prstDash val="solid"/>
                       <a:round/>
@@ -4710,7 +7016,7 @@
                     </a:lnL>
                     <a:lnR w="6350" cap="flat" cmpd="sng" algn="ctr">
                       <a:solidFill>
-                        <a:srgbClr val="CBD5E1"/>
+                        <a:srgbClr val="D3E0D6"/>
                       </a:solidFill>
                       <a:prstDash val="solid"/>
                       <a:round/>
@@ -4719,7 +7025,7 @@
                     </a:lnR>
                     <a:lnT w="6350" cap="flat" cmpd="sng" algn="ctr">
                       <a:solidFill>
-                        <a:srgbClr val="CBD5E1"/>
+                        <a:srgbClr val="D3E0D6"/>
                       </a:solidFill>
                       <a:prstDash val="solid"/>
                       <a:round/>
@@ -4728,7 +7034,7 @@
                     </a:lnT>
                     <a:lnB w="6350" cap="flat" cmpd="sng" algn="ctr">
                       <a:solidFill>
-                        <a:srgbClr val="CBD5E1"/>
+                        <a:srgbClr val="D3E0D6"/>
                       </a:solidFill>
                       <a:prstDash val="solid"/>
                       <a:round/>
@@ -4748,13 +7054,13 @@
                       <a:r>
                         <a:rPr lang="en-US" sz="1100" dirty="0">
                           <a:solidFill>
-                            <a:srgbClr val="1F2937"/>
+                            <a:srgbClr val="0F2A20"/>
                           </a:solidFill>
                           <a:latin typeface="Calibri" pitchFamily="34" charset="0"/>
                           <a:ea typeface="Calibri" pitchFamily="34" charset="-122"/>
                           <a:cs typeface="Calibri" pitchFamily="34" charset="-120"/>
                         </a:rPr>
-                        <a:t>40%</a:t>
+                        <a:t>44.4%</a:t>
                       </a:r>
                       <a:endParaRPr lang="en-US" sz="1100" dirty="0">
                         <a:latin typeface="Calibri" charset="0"/>
@@ -4766,7 +7072,7 @@
                   <a:tcPr marL="91440" marR="91440" marT="45720" marB="45720" anchor="ctr">
                     <a:lnL w="6350" cap="flat" cmpd="sng" algn="ctr">
                       <a:solidFill>
-                        <a:srgbClr val="CBD5E1"/>
+                        <a:srgbClr val="D3E0D6"/>
                       </a:solidFill>
                       <a:prstDash val="solid"/>
                       <a:round/>
@@ -4775,7 +7081,7 @@
                     </a:lnL>
                     <a:lnR w="6350" cap="flat" cmpd="sng" algn="ctr">
                       <a:solidFill>
-                        <a:srgbClr val="CBD5E1"/>
+                        <a:srgbClr val="D3E0D6"/>
                       </a:solidFill>
                       <a:prstDash val="solid"/>
                       <a:round/>
@@ -4784,7 +7090,7 @@
                     </a:lnR>
                     <a:lnT w="6350" cap="flat" cmpd="sng" algn="ctr">
                       <a:solidFill>
-                        <a:srgbClr val="CBD5E1"/>
+                        <a:srgbClr val="D3E0D6"/>
                       </a:solidFill>
                       <a:prstDash val="solid"/>
                       <a:round/>
@@ -4793,7 +7099,7 @@
                     </a:lnT>
                     <a:lnB w="6350" cap="flat" cmpd="sng" algn="ctr">
                       <a:solidFill>
-                        <a:srgbClr val="CBD5E1"/>
+                        <a:srgbClr val="D3E0D6"/>
                       </a:solidFill>
                       <a:prstDash val="solid"/>
                       <a:round/>
@@ -4813,13 +7119,13 @@
                       <a:r>
                         <a:rPr lang="en-US" sz="1100" dirty="0">
                           <a:solidFill>
-                            <a:srgbClr val="1F2937"/>
+                            <a:srgbClr val="0F2A20"/>
                           </a:solidFill>
                           <a:latin typeface="Calibri" pitchFamily="34" charset="0"/>
                           <a:ea typeface="Calibri" pitchFamily="34" charset="-122"/>
                           <a:cs typeface="Calibri" pitchFamily="34" charset="-120"/>
                         </a:rPr>
-                        <a:t>11.8% to 76.9%</a:t>
+                        <a:t>18.9% to 73.3%</a:t>
                       </a:r>
                       <a:endParaRPr lang="en-US" sz="1100" dirty="0">
                         <a:latin typeface="Calibri" charset="0"/>
@@ -4831,7 +7137,7 @@
                   <a:tcPr marL="91440" marR="91440" marT="45720" marB="45720" anchor="ctr">
                     <a:lnL w="6350" cap="flat" cmpd="sng" algn="ctr">
                       <a:solidFill>
-                        <a:srgbClr val="CBD5E1"/>
+                        <a:srgbClr val="D3E0D6"/>
                       </a:solidFill>
                       <a:prstDash val="solid"/>
                       <a:round/>
@@ -4840,7 +7146,7 @@
                     </a:lnL>
                     <a:lnR w="6350" cap="flat" cmpd="sng" algn="ctr">
                       <a:solidFill>
-                        <a:srgbClr val="CBD5E1"/>
+                        <a:srgbClr val="D3E0D6"/>
                       </a:solidFill>
                       <a:prstDash val="solid"/>
                       <a:round/>
@@ -4849,7 +7155,7 @@
                     </a:lnR>
                     <a:lnT w="6350" cap="flat" cmpd="sng" algn="ctr">
                       <a:solidFill>
-                        <a:srgbClr val="CBD5E1"/>
+                        <a:srgbClr val="D3E0D6"/>
                       </a:solidFill>
                       <a:prstDash val="solid"/>
                       <a:round/>
@@ -4858,7 +7164,7 @@
                     </a:lnT>
                     <a:lnB w="6350" cap="flat" cmpd="sng" algn="ctr">
                       <a:solidFill>
-                        <a:srgbClr val="CBD5E1"/>
+                        <a:srgbClr val="D3E0D6"/>
                       </a:solidFill>
                       <a:prstDash val="solid"/>
                       <a:round/>
@@ -4878,7 +7184,7 @@
                       <a:r>
                         <a:rPr lang="en-US" sz="1100" dirty="0">
                           <a:solidFill>
-                            <a:srgbClr val="1F2937"/>
+                            <a:srgbClr val="0F2A20"/>
                           </a:solidFill>
                           <a:latin typeface="Calibri" pitchFamily="34" charset="0"/>
                           <a:ea typeface="Calibri" pitchFamily="34" charset="-122"/>
@@ -4896,7 +7202,7 @@
                   <a:tcPr marL="91440" marR="91440" marT="45720" marB="45720" anchor="ctr">
                     <a:lnL w="6350" cap="flat" cmpd="sng" algn="ctr">
                       <a:solidFill>
-                        <a:srgbClr val="CBD5E1"/>
+                        <a:srgbClr val="D3E0D6"/>
                       </a:solidFill>
                       <a:prstDash val="solid"/>
                       <a:round/>
@@ -4905,7 +7211,7 @@
                     </a:lnL>
                     <a:lnR w="6350" cap="flat" cmpd="sng" algn="ctr">
                       <a:solidFill>
-                        <a:srgbClr val="CBD5E1"/>
+                        <a:srgbClr val="D3E0D6"/>
                       </a:solidFill>
                       <a:prstDash val="solid"/>
                       <a:round/>
@@ -4914,7 +7220,7 @@
                     </a:lnR>
                     <a:lnT w="6350" cap="flat" cmpd="sng" algn="ctr">
                       <a:solidFill>
-                        <a:srgbClr val="CBD5E1"/>
+                        <a:srgbClr val="D3E0D6"/>
                       </a:solidFill>
                       <a:prstDash val="solid"/>
                       <a:round/>
@@ -4923,7 +7229,7 @@
                     </a:lnT>
                     <a:lnB w="6350" cap="flat" cmpd="sng" algn="ctr">
                       <a:solidFill>
-                        <a:srgbClr val="CBD5E1"/>
+                        <a:srgbClr val="D3E0D6"/>
                       </a:solidFill>
                       <a:prstDash val="solid"/>
                       <a:round/>
@@ -4943,7 +7249,7 @@
                       <a:r>
                         <a:rPr lang="en-US" sz="1100" dirty="0">
                           <a:solidFill>
-                            <a:srgbClr val="1F2937"/>
+                            <a:srgbClr val="0F2A20"/>
                           </a:solidFill>
                           <a:latin typeface="Calibri" pitchFamily="34" charset="0"/>
                           <a:ea typeface="Calibri" pitchFamily="34" charset="-122"/>
@@ -4961,7 +7267,7 @@
                   <a:tcPr marL="91440" marR="91440" marT="45720" marB="45720" anchor="ctr">
                     <a:lnL w="6350" cap="flat" cmpd="sng" algn="ctr">
                       <a:solidFill>
-                        <a:srgbClr val="CBD5E1"/>
+                        <a:srgbClr val="D3E0D6"/>
                       </a:solidFill>
                       <a:prstDash val="solid"/>
                       <a:round/>
@@ -4970,7 +7276,7 @@
                     </a:lnL>
                     <a:lnR w="6350" cap="flat" cmpd="sng" algn="ctr">
                       <a:solidFill>
-                        <a:srgbClr val="CBD5E1"/>
+                        <a:srgbClr val="D3E0D6"/>
                       </a:solidFill>
                       <a:prstDash val="solid"/>
                       <a:round/>
@@ -4979,7 +7285,7 @@
                     </a:lnR>
                     <a:lnT w="6350" cap="flat" cmpd="sng" algn="ctr">
                       <a:solidFill>
-                        <a:srgbClr val="CBD5E1"/>
+                        <a:srgbClr val="D3E0D6"/>
                       </a:solidFill>
                       <a:prstDash val="solid"/>
                       <a:round/>
@@ -4988,7 +7294,7 @@
                     </a:lnT>
                     <a:lnB w="6350" cap="flat" cmpd="sng" algn="ctr">
                       <a:solidFill>
-                        <a:srgbClr val="CBD5E1"/>
+                        <a:srgbClr val="D3E0D6"/>
                       </a:solidFill>
                       <a:prstDash val="solid"/>
                       <a:round/>
@@ -5008,7 +7314,7 @@
                       <a:r>
                         <a:rPr lang="en-US" sz="1100" dirty="0">
                           <a:solidFill>
-                            <a:srgbClr val="1F2937"/>
+                            <a:srgbClr val="0F2A20"/>
                           </a:solidFill>
                           <a:latin typeface="Calibri" pitchFamily="34" charset="0"/>
                           <a:ea typeface="Calibri" pitchFamily="34" charset="-122"/>
@@ -5026,7 +7332,7 @@
                   <a:tcPr marL="91440" marR="91440" marT="45720" marB="45720" anchor="ctr">
                     <a:lnL w="6350" cap="flat" cmpd="sng" algn="ctr">
                       <a:solidFill>
-                        <a:srgbClr val="CBD5E1"/>
+                        <a:srgbClr val="D3E0D6"/>
                       </a:solidFill>
                       <a:prstDash val="solid"/>
                       <a:round/>
@@ -5035,7 +7341,7 @@
                     </a:lnL>
                     <a:lnR w="6350" cap="flat" cmpd="sng" algn="ctr">
                       <a:solidFill>
-                        <a:srgbClr val="CBD5E1"/>
+                        <a:srgbClr val="D3E0D6"/>
                       </a:solidFill>
                       <a:prstDash val="solid"/>
                       <a:round/>
@@ -5044,7 +7350,7 @@
                     </a:lnR>
                     <a:lnT w="6350" cap="flat" cmpd="sng" algn="ctr">
                       <a:solidFill>
-                        <a:srgbClr val="CBD5E1"/>
+                        <a:srgbClr val="D3E0D6"/>
                       </a:solidFill>
                       <a:prstDash val="solid"/>
                       <a:round/>
@@ -5053,7 +7359,7 @@
                     </a:lnT>
                     <a:lnB w="6350" cap="flat" cmpd="sng" algn="ctr">
                       <a:solidFill>
-                        <a:srgbClr val="CBD5E1"/>
+                        <a:srgbClr val="D3E0D6"/>
                       </a:solidFill>
                       <a:prstDash val="solid"/>
                       <a:round/>
@@ -5075,7 +7381,7 @@
                       <a:r>
                         <a:rPr lang="en-US" sz="1100" dirty="0">
                           <a:solidFill>
-                            <a:srgbClr val="1F2937"/>
+                            <a:srgbClr val="0F2A20"/>
                           </a:solidFill>
                           <a:latin typeface="Calibri" pitchFamily="34" charset="0"/>
                           <a:ea typeface="Calibri" pitchFamily="34" charset="-122"/>
@@ -5093,7 +7399,7 @@
                   <a:tcPr marL="91440" marR="91440" marT="45720" marB="45720" anchor="ctr">
                     <a:lnL w="6350" cap="flat" cmpd="sng" algn="ctr">
                       <a:solidFill>
-                        <a:srgbClr val="CBD5E1"/>
+                        <a:srgbClr val="D3E0D6"/>
                       </a:solidFill>
                       <a:prstDash val="solid"/>
                       <a:round/>
@@ -5102,7 +7408,7 @@
                     </a:lnL>
                     <a:lnR w="6350" cap="flat" cmpd="sng" algn="ctr">
                       <a:solidFill>
-                        <a:srgbClr val="CBD5E1"/>
+                        <a:srgbClr val="D3E0D6"/>
                       </a:solidFill>
                       <a:prstDash val="solid"/>
                       <a:round/>
@@ -5111,7 +7417,7 @@
                     </a:lnR>
                     <a:lnT w="6350" cap="flat" cmpd="sng" algn="ctr">
                       <a:solidFill>
-                        <a:srgbClr val="CBD5E1"/>
+                        <a:srgbClr val="D3E0D6"/>
                       </a:solidFill>
                       <a:prstDash val="solid"/>
                       <a:round/>
@@ -5120,7 +7426,7 @@
                     </a:lnT>
                     <a:lnB w="6350" cap="flat" cmpd="sng" algn="ctr">
                       <a:solidFill>
-                        <a:srgbClr val="CBD5E1"/>
+                        <a:srgbClr val="D3E0D6"/>
                       </a:solidFill>
                       <a:prstDash val="solid"/>
                       <a:round/>
@@ -5140,13 +7446,13 @@
                       <a:r>
                         <a:rPr lang="en-US" sz="1100" dirty="0">
                           <a:solidFill>
-                            <a:srgbClr val="1F2937"/>
+                            <a:srgbClr val="0F2A20"/>
                           </a:solidFill>
                           <a:latin typeface="Calibri" pitchFamily="34" charset="0"/>
                           <a:ea typeface="Calibri" pitchFamily="34" charset="-122"/>
                           <a:cs typeface="Calibri" pitchFamily="34" charset="-120"/>
                         </a:rPr>
-                        <a:t>1 of 5</a:t>
+                        <a:t>3 of 9</a:t>
                       </a:r>
                       <a:endParaRPr lang="en-US" sz="1100" dirty="0">
                         <a:latin typeface="Calibri" charset="0"/>
@@ -5158,7 +7464,7 @@
                   <a:tcPr marL="91440" marR="91440" marT="45720" marB="45720" anchor="ctr">
                     <a:lnL w="6350" cap="flat" cmpd="sng" algn="ctr">
                       <a:solidFill>
-                        <a:srgbClr val="CBD5E1"/>
+                        <a:srgbClr val="D3E0D6"/>
                       </a:solidFill>
                       <a:prstDash val="solid"/>
                       <a:round/>
@@ -5167,7 +7473,7 @@
                     </a:lnL>
                     <a:lnR w="6350" cap="flat" cmpd="sng" algn="ctr">
                       <a:solidFill>
-                        <a:srgbClr val="CBD5E1"/>
+                        <a:srgbClr val="D3E0D6"/>
                       </a:solidFill>
                       <a:prstDash val="solid"/>
                       <a:round/>
@@ -5176,7 +7482,7 @@
                     </a:lnR>
                     <a:lnT w="6350" cap="flat" cmpd="sng" algn="ctr">
                       <a:solidFill>
-                        <a:srgbClr val="CBD5E1"/>
+                        <a:srgbClr val="D3E0D6"/>
                       </a:solidFill>
                       <a:prstDash val="solid"/>
                       <a:round/>
@@ -5185,7 +7491,7 @@
                     </a:lnT>
                     <a:lnB w="6350" cap="flat" cmpd="sng" algn="ctr">
                       <a:solidFill>
-                        <a:srgbClr val="CBD5E1"/>
+                        <a:srgbClr val="D3E0D6"/>
                       </a:solidFill>
                       <a:prstDash val="solid"/>
                       <a:round/>
@@ -5205,13 +7511,13 @@
                       <a:r>
                         <a:rPr lang="en-US" sz="1100" dirty="0">
                           <a:solidFill>
-                            <a:srgbClr val="1F2937"/>
+                            <a:srgbClr val="0F2A20"/>
                           </a:solidFill>
                           <a:latin typeface="Calibri" pitchFamily="34" charset="0"/>
                           <a:ea typeface="Calibri" pitchFamily="34" charset="-122"/>
                           <a:cs typeface="Calibri" pitchFamily="34" charset="-120"/>
                         </a:rPr>
-                        <a:t>20%</a:t>
+                        <a:t>33.3%</a:t>
                       </a:r>
                       <a:endParaRPr lang="en-US" sz="1100" dirty="0">
                         <a:latin typeface="Calibri" charset="0"/>
@@ -5223,7 +7529,7 @@
                   <a:tcPr marL="91440" marR="91440" marT="45720" marB="45720" anchor="ctr">
                     <a:lnL w="6350" cap="flat" cmpd="sng" algn="ctr">
                       <a:solidFill>
-                        <a:srgbClr val="CBD5E1"/>
+                        <a:srgbClr val="D3E0D6"/>
                       </a:solidFill>
                       <a:prstDash val="solid"/>
                       <a:round/>
@@ -5232,7 +7538,7 @@
                     </a:lnL>
                     <a:lnR w="6350" cap="flat" cmpd="sng" algn="ctr">
                       <a:solidFill>
-                        <a:srgbClr val="CBD5E1"/>
+                        <a:srgbClr val="D3E0D6"/>
                       </a:solidFill>
                       <a:prstDash val="solid"/>
                       <a:round/>
@@ -5241,7 +7547,7 @@
                     </a:lnR>
                     <a:lnT w="6350" cap="flat" cmpd="sng" algn="ctr">
                       <a:solidFill>
-                        <a:srgbClr val="CBD5E1"/>
+                        <a:srgbClr val="D3E0D6"/>
                       </a:solidFill>
                       <a:prstDash val="solid"/>
                       <a:round/>
@@ -5250,7 +7556,7 @@
                     </a:lnT>
                     <a:lnB w="6350" cap="flat" cmpd="sng" algn="ctr">
                       <a:solidFill>
-                        <a:srgbClr val="CBD5E1"/>
+                        <a:srgbClr val="D3E0D6"/>
                       </a:solidFill>
                       <a:prstDash val="solid"/>
                       <a:round/>
@@ -5270,13 +7576,13 @@
                       <a:r>
                         <a:rPr lang="en-US" sz="1100" dirty="0">
                           <a:solidFill>
-                            <a:srgbClr val="1F2937"/>
+                            <a:srgbClr val="0F2A20"/>
                           </a:solidFill>
                           <a:latin typeface="Calibri" pitchFamily="34" charset="0"/>
                           <a:ea typeface="Calibri" pitchFamily="34" charset="-122"/>
                           <a:cs typeface="Calibri" pitchFamily="34" charset="-120"/>
                         </a:rPr>
-                        <a:t>3.6% to 62.4%</a:t>
+                        <a:t>12.1% to 64.6%</a:t>
                       </a:r>
                       <a:endParaRPr lang="en-US" sz="1100" dirty="0">
                         <a:latin typeface="Calibri" charset="0"/>
@@ -5288,7 +7594,7 @@
                   <a:tcPr marL="91440" marR="91440" marT="45720" marB="45720" anchor="ctr">
                     <a:lnL w="6350" cap="flat" cmpd="sng" algn="ctr">
                       <a:solidFill>
-                        <a:srgbClr val="CBD5E1"/>
+                        <a:srgbClr val="D3E0D6"/>
                       </a:solidFill>
                       <a:prstDash val="solid"/>
                       <a:round/>
@@ -5297,7 +7603,7 @@
                     </a:lnL>
                     <a:lnR w="6350" cap="flat" cmpd="sng" algn="ctr">
                       <a:solidFill>
-                        <a:srgbClr val="CBD5E1"/>
+                        <a:srgbClr val="D3E0D6"/>
                       </a:solidFill>
                       <a:prstDash val="solid"/>
                       <a:round/>
@@ -5306,7 +7612,7 @@
                     </a:lnR>
                     <a:lnT w="6350" cap="flat" cmpd="sng" algn="ctr">
                       <a:solidFill>
-                        <a:srgbClr val="CBD5E1"/>
+                        <a:srgbClr val="D3E0D6"/>
                       </a:solidFill>
                       <a:prstDash val="solid"/>
                       <a:round/>
@@ -5315,7 +7621,7 @@
                     </a:lnT>
                     <a:lnB w="6350" cap="flat" cmpd="sng" algn="ctr">
                       <a:solidFill>
-                        <a:srgbClr val="CBD5E1"/>
+                        <a:srgbClr val="D3E0D6"/>
                       </a:solidFill>
                       <a:prstDash val="solid"/>
                       <a:round/>
@@ -5335,7 +7641,7 @@
                       <a:r>
                         <a:rPr lang="en-US" sz="1100" dirty="0">
                           <a:solidFill>
-                            <a:srgbClr val="1F2937"/>
+                            <a:srgbClr val="0F2A20"/>
                           </a:solidFill>
                           <a:latin typeface="Calibri" pitchFamily="34" charset="0"/>
                           <a:ea typeface="Calibri" pitchFamily="34" charset="-122"/>
@@ -5353,7 +7659,7 @@
                   <a:tcPr marL="91440" marR="91440" marT="45720" marB="45720" anchor="ctr">
                     <a:lnL w="6350" cap="flat" cmpd="sng" algn="ctr">
                       <a:solidFill>
-                        <a:srgbClr val="CBD5E1"/>
+                        <a:srgbClr val="D3E0D6"/>
                       </a:solidFill>
                       <a:prstDash val="solid"/>
                       <a:round/>
@@ -5362,7 +7668,7 @@
                     </a:lnL>
                     <a:lnR w="6350" cap="flat" cmpd="sng" algn="ctr">
                       <a:solidFill>
-                        <a:srgbClr val="CBD5E1"/>
+                        <a:srgbClr val="D3E0D6"/>
                       </a:solidFill>
                       <a:prstDash val="solid"/>
                       <a:round/>
@@ -5371,7 +7677,7 @@
                     </a:lnR>
                     <a:lnT w="6350" cap="flat" cmpd="sng" algn="ctr">
                       <a:solidFill>
-                        <a:srgbClr val="CBD5E1"/>
+                        <a:srgbClr val="D3E0D6"/>
                       </a:solidFill>
                       <a:prstDash val="solid"/>
                       <a:round/>
@@ -5380,7 +7686,7 @@
                     </a:lnT>
                     <a:lnB w="6350" cap="flat" cmpd="sng" algn="ctr">
                       <a:solidFill>
-                        <a:srgbClr val="CBD5E1"/>
+                        <a:srgbClr val="D3E0D6"/>
                       </a:solidFill>
                       <a:prstDash val="solid"/>
                       <a:round/>
@@ -5400,7 +7706,7 @@
                       <a:r>
                         <a:rPr lang="en-US" sz="1100" dirty="0">
                           <a:solidFill>
-                            <a:srgbClr val="1F2937"/>
+                            <a:srgbClr val="0F2A20"/>
                           </a:solidFill>
                           <a:latin typeface="Calibri" pitchFamily="34" charset="0"/>
                           <a:ea typeface="Calibri" pitchFamily="34" charset="-122"/>
@@ -5418,7 +7724,7 @@
                   <a:tcPr marL="91440" marR="91440" marT="45720" marB="45720" anchor="ctr">
                     <a:lnL w="6350" cap="flat" cmpd="sng" algn="ctr">
                       <a:solidFill>
-                        <a:srgbClr val="CBD5E1"/>
+                        <a:srgbClr val="D3E0D6"/>
                       </a:solidFill>
                       <a:prstDash val="solid"/>
                       <a:round/>
@@ -5427,7 +7733,7 @@
                     </a:lnL>
                     <a:lnR w="6350" cap="flat" cmpd="sng" algn="ctr">
                       <a:solidFill>
-                        <a:srgbClr val="CBD5E1"/>
+                        <a:srgbClr val="D3E0D6"/>
                       </a:solidFill>
                       <a:prstDash val="solid"/>
                       <a:round/>
@@ -5436,7 +7742,7 @@
                     </a:lnR>
                     <a:lnT w="6350" cap="flat" cmpd="sng" algn="ctr">
                       <a:solidFill>
-                        <a:srgbClr val="CBD5E1"/>
+                        <a:srgbClr val="D3E0D6"/>
                       </a:solidFill>
                       <a:prstDash val="solid"/>
                       <a:round/>
@@ -5445,7 +7751,7 @@
                     </a:lnT>
                     <a:lnB w="6350" cap="flat" cmpd="sng" algn="ctr">
                       <a:solidFill>
-                        <a:srgbClr val="CBD5E1"/>
+                        <a:srgbClr val="D3E0D6"/>
                       </a:solidFill>
                       <a:prstDash val="solid"/>
                       <a:round/>
@@ -5465,7 +7771,7 @@
                       <a:r>
                         <a:rPr lang="en-US" sz="1100" dirty="0">
                           <a:solidFill>
-                            <a:srgbClr val="1F2937"/>
+                            <a:srgbClr val="0F2A20"/>
                           </a:solidFill>
                           <a:latin typeface="Calibri" pitchFamily="34" charset="0"/>
                           <a:ea typeface="Calibri" pitchFamily="34" charset="-122"/>
@@ -5483,7 +7789,7 @@
                   <a:tcPr marL="91440" marR="91440" marT="45720" marB="45720" anchor="ctr">
                     <a:lnL w="6350" cap="flat" cmpd="sng" algn="ctr">
                       <a:solidFill>
-                        <a:srgbClr val="CBD5E1"/>
+                        <a:srgbClr val="D3E0D6"/>
                       </a:solidFill>
                       <a:prstDash val="solid"/>
                       <a:round/>
@@ -5492,7 +7798,7 @@
                     </a:lnL>
                     <a:lnR w="6350" cap="flat" cmpd="sng" algn="ctr">
                       <a:solidFill>
-                        <a:srgbClr val="CBD5E1"/>
+                        <a:srgbClr val="D3E0D6"/>
                       </a:solidFill>
                       <a:prstDash val="solid"/>
                       <a:round/>
@@ -5501,7 +7807,7 @@
                     </a:lnR>
                     <a:lnT w="6350" cap="flat" cmpd="sng" algn="ctr">
                       <a:solidFill>
-                        <a:srgbClr val="CBD5E1"/>
+                        <a:srgbClr val="D3E0D6"/>
                       </a:solidFill>
                       <a:prstDash val="solid"/>
                       <a:round/>
@@ -5510,464 +7816,7 @@
                     </a:lnT>
                     <a:lnB w="6350" cap="flat" cmpd="sng" algn="ctr">
                       <a:solidFill>
-                        <a:srgbClr val="CBD5E1"/>
-                      </a:solidFill>
-                      <a:prstDash val="solid"/>
-                      <a:round/>
-                      <a:headEnd type="none" w="med" len="med"/>
-                      <a:tailEnd type="none" w="med" len="med"/>
-                    </a:lnB>
-                  </a:tcPr>
-                </a:tc>
-              </a:tr>
-              <a:tr h="0">
-                <a:tc>
-                  <a:txBody>
-                    <a:bodyPr/>
-                    <a:lstStyle/>
-                    <a:p>
-                      <a:pPr indent="0" marL="0">
-                        <a:buNone/>
-                      </a:pPr>
-                      <a:r>
-                        <a:rPr lang="en-US" sz="1100" dirty="0">
-                          <a:solidFill>
-                            <a:srgbClr val="1F2937"/>
-                          </a:solidFill>
-                          <a:latin typeface="Calibri" pitchFamily="34" charset="0"/>
-                          <a:ea typeface="Calibri" pitchFamily="34" charset="-122"/>
-                          <a:cs typeface="Calibri" pitchFamily="34" charset="-120"/>
-                        </a:rPr>
-                        <a:t>statistics</a:t>
-                      </a:r>
-                      <a:endParaRPr lang="en-US" sz="1100" dirty="0">
-                        <a:latin typeface="Calibri" charset="0"/>
-                        <a:ea typeface="Calibri" charset="0"/>
-                        <a:cs typeface="Calibri" charset="0"/>
-                      </a:endParaRPr>
-                    </a:p>
-                  </a:txBody>
-                  <a:tcPr marL="91440" marR="91440" marT="45720" marB="45720" anchor="ctr">
-                    <a:lnL w="6350" cap="flat" cmpd="sng" algn="ctr">
-                      <a:solidFill>
-                        <a:srgbClr val="CBD5E1"/>
-                      </a:solidFill>
-                      <a:prstDash val="solid"/>
-                      <a:round/>
-                      <a:headEnd type="none" w="med" len="med"/>
-                      <a:tailEnd type="none" w="med" len="med"/>
-                    </a:lnL>
-                    <a:lnR w="6350" cap="flat" cmpd="sng" algn="ctr">
-                      <a:solidFill>
-                        <a:srgbClr val="CBD5E1"/>
-                      </a:solidFill>
-                      <a:prstDash val="solid"/>
-                      <a:round/>
-                      <a:headEnd type="none" w="med" len="med"/>
-                      <a:tailEnd type="none" w="med" len="med"/>
-                    </a:lnR>
-                    <a:lnT w="6350" cap="flat" cmpd="sng" algn="ctr">
-                      <a:solidFill>
-                        <a:srgbClr val="CBD5E1"/>
-                      </a:solidFill>
-                      <a:prstDash val="solid"/>
-                      <a:round/>
-                      <a:headEnd type="none" w="med" len="med"/>
-                      <a:tailEnd type="none" w="med" len="med"/>
-                    </a:lnT>
-                    <a:lnB w="6350" cap="flat" cmpd="sng" algn="ctr">
-                      <a:solidFill>
-                        <a:srgbClr val="CBD5E1"/>
-                      </a:solidFill>
-                      <a:prstDash val="solid"/>
-                      <a:round/>
-                      <a:headEnd type="none" w="med" len="med"/>
-                      <a:tailEnd type="none" w="med" len="med"/>
-                    </a:lnB>
-                  </a:tcPr>
-                </a:tc>
-                <a:tc>
-                  <a:txBody>
-                    <a:bodyPr/>
-                    <a:lstStyle/>
-                    <a:p>
-                      <a:pPr indent="0" marL="0">
-                        <a:buNone/>
-                      </a:pPr>
-                      <a:r>
-                        <a:rPr lang="en-US" sz="1100" dirty="0">
-                          <a:solidFill>
-                            <a:srgbClr val="1F2937"/>
-                          </a:solidFill>
-                          <a:latin typeface="Calibri" pitchFamily="34" charset="0"/>
-                          <a:ea typeface="Calibri" pitchFamily="34" charset="-122"/>
-                          <a:cs typeface="Calibri" pitchFamily="34" charset="-120"/>
-                        </a:rPr>
-                        <a:t>1 of 5</a:t>
-                      </a:r>
-                      <a:endParaRPr lang="en-US" sz="1100" dirty="0">
-                        <a:latin typeface="Calibri" charset="0"/>
-                        <a:ea typeface="Calibri" charset="0"/>
-                        <a:cs typeface="Calibri" charset="0"/>
-                      </a:endParaRPr>
-                    </a:p>
-                  </a:txBody>
-                  <a:tcPr marL="91440" marR="91440" marT="45720" marB="45720" anchor="ctr">
-                    <a:lnL w="6350" cap="flat" cmpd="sng" algn="ctr">
-                      <a:solidFill>
-                        <a:srgbClr val="CBD5E1"/>
-                      </a:solidFill>
-                      <a:prstDash val="solid"/>
-                      <a:round/>
-                      <a:headEnd type="none" w="med" len="med"/>
-                      <a:tailEnd type="none" w="med" len="med"/>
-                    </a:lnL>
-                    <a:lnR w="6350" cap="flat" cmpd="sng" algn="ctr">
-                      <a:solidFill>
-                        <a:srgbClr val="CBD5E1"/>
-                      </a:solidFill>
-                      <a:prstDash val="solid"/>
-                      <a:round/>
-                      <a:headEnd type="none" w="med" len="med"/>
-                      <a:tailEnd type="none" w="med" len="med"/>
-                    </a:lnR>
-                    <a:lnT w="6350" cap="flat" cmpd="sng" algn="ctr">
-                      <a:solidFill>
-                        <a:srgbClr val="CBD5E1"/>
-                      </a:solidFill>
-                      <a:prstDash val="solid"/>
-                      <a:round/>
-                      <a:headEnd type="none" w="med" len="med"/>
-                      <a:tailEnd type="none" w="med" len="med"/>
-                    </a:lnT>
-                    <a:lnB w="6350" cap="flat" cmpd="sng" algn="ctr">
-                      <a:solidFill>
-                        <a:srgbClr val="CBD5E1"/>
-                      </a:solidFill>
-                      <a:prstDash val="solid"/>
-                      <a:round/>
-                      <a:headEnd type="none" w="med" len="med"/>
-                      <a:tailEnd type="none" w="med" len="med"/>
-                    </a:lnB>
-                  </a:tcPr>
-                </a:tc>
-                <a:tc>
-                  <a:txBody>
-                    <a:bodyPr/>
-                    <a:lstStyle/>
-                    <a:p>
-                      <a:pPr indent="0" marL="0">
-                        <a:buNone/>
-                      </a:pPr>
-                      <a:r>
-                        <a:rPr lang="en-US" sz="1100" dirty="0">
-                          <a:solidFill>
-                            <a:srgbClr val="1F2937"/>
-                          </a:solidFill>
-                          <a:latin typeface="Calibri" pitchFamily="34" charset="0"/>
-                          <a:ea typeface="Calibri" pitchFamily="34" charset="-122"/>
-                          <a:cs typeface="Calibri" pitchFamily="34" charset="-120"/>
-                        </a:rPr>
-                        <a:t>20%</a:t>
-                      </a:r>
-                      <a:endParaRPr lang="en-US" sz="1100" dirty="0">
-                        <a:latin typeface="Calibri" charset="0"/>
-                        <a:ea typeface="Calibri" charset="0"/>
-                        <a:cs typeface="Calibri" charset="0"/>
-                      </a:endParaRPr>
-                    </a:p>
-                  </a:txBody>
-                  <a:tcPr marL="91440" marR="91440" marT="45720" marB="45720" anchor="ctr">
-                    <a:lnL w="6350" cap="flat" cmpd="sng" algn="ctr">
-                      <a:solidFill>
-                        <a:srgbClr val="CBD5E1"/>
-                      </a:solidFill>
-                      <a:prstDash val="solid"/>
-                      <a:round/>
-                      <a:headEnd type="none" w="med" len="med"/>
-                      <a:tailEnd type="none" w="med" len="med"/>
-                    </a:lnL>
-                    <a:lnR w="6350" cap="flat" cmpd="sng" algn="ctr">
-                      <a:solidFill>
-                        <a:srgbClr val="CBD5E1"/>
-                      </a:solidFill>
-                      <a:prstDash val="solid"/>
-                      <a:round/>
-                      <a:headEnd type="none" w="med" len="med"/>
-                      <a:tailEnd type="none" w="med" len="med"/>
-                    </a:lnR>
-                    <a:lnT w="6350" cap="flat" cmpd="sng" algn="ctr">
-                      <a:solidFill>
-                        <a:srgbClr val="CBD5E1"/>
-                      </a:solidFill>
-                      <a:prstDash val="solid"/>
-                      <a:round/>
-                      <a:headEnd type="none" w="med" len="med"/>
-                      <a:tailEnd type="none" w="med" len="med"/>
-                    </a:lnT>
-                    <a:lnB w="6350" cap="flat" cmpd="sng" algn="ctr">
-                      <a:solidFill>
-                        <a:srgbClr val="CBD5E1"/>
-                      </a:solidFill>
-                      <a:prstDash val="solid"/>
-                      <a:round/>
-                      <a:headEnd type="none" w="med" len="med"/>
-                      <a:tailEnd type="none" w="med" len="med"/>
-                    </a:lnB>
-                  </a:tcPr>
-                </a:tc>
-                <a:tc>
-                  <a:txBody>
-                    <a:bodyPr/>
-                    <a:lstStyle/>
-                    <a:p>
-                      <a:pPr indent="0" marL="0">
-                        <a:buNone/>
-                      </a:pPr>
-                      <a:r>
-                        <a:rPr lang="en-US" sz="1100" dirty="0">
-                          <a:solidFill>
-                            <a:srgbClr val="1F2937"/>
-                          </a:solidFill>
-                          <a:latin typeface="Calibri" pitchFamily="34" charset="0"/>
-                          <a:ea typeface="Calibri" pitchFamily="34" charset="-122"/>
-                          <a:cs typeface="Calibri" pitchFamily="34" charset="-120"/>
-                        </a:rPr>
-                        <a:t>3.6% to 62.4%</a:t>
-                      </a:r>
-                      <a:endParaRPr lang="en-US" sz="1100" dirty="0">
-                        <a:latin typeface="Calibri" charset="0"/>
-                        <a:ea typeface="Calibri" charset="0"/>
-                        <a:cs typeface="Calibri" charset="0"/>
-                      </a:endParaRPr>
-                    </a:p>
-                  </a:txBody>
-                  <a:tcPr marL="91440" marR="91440" marT="45720" marB="45720" anchor="ctr">
-                    <a:lnL w="6350" cap="flat" cmpd="sng" algn="ctr">
-                      <a:solidFill>
-                        <a:srgbClr val="CBD5E1"/>
-                      </a:solidFill>
-                      <a:prstDash val="solid"/>
-                      <a:round/>
-                      <a:headEnd type="none" w="med" len="med"/>
-                      <a:tailEnd type="none" w="med" len="med"/>
-                    </a:lnL>
-                    <a:lnR w="6350" cap="flat" cmpd="sng" algn="ctr">
-                      <a:solidFill>
-                        <a:srgbClr val="CBD5E1"/>
-                      </a:solidFill>
-                      <a:prstDash val="solid"/>
-                      <a:round/>
-                      <a:headEnd type="none" w="med" len="med"/>
-                      <a:tailEnd type="none" w="med" len="med"/>
-                    </a:lnR>
-                    <a:lnT w="6350" cap="flat" cmpd="sng" algn="ctr">
-                      <a:solidFill>
-                        <a:srgbClr val="CBD5E1"/>
-                      </a:solidFill>
-                      <a:prstDash val="solid"/>
-                      <a:round/>
-                      <a:headEnd type="none" w="med" len="med"/>
-                      <a:tailEnd type="none" w="med" len="med"/>
-                    </a:lnT>
-                    <a:lnB w="6350" cap="flat" cmpd="sng" algn="ctr">
-                      <a:solidFill>
-                        <a:srgbClr val="CBD5E1"/>
-                      </a:solidFill>
-                      <a:prstDash val="solid"/>
-                      <a:round/>
-                      <a:headEnd type="none" w="med" len="med"/>
-                      <a:tailEnd type="none" w="med" len="med"/>
-                    </a:lnB>
-                  </a:tcPr>
-                </a:tc>
-                <a:tc>
-                  <a:txBody>
-                    <a:bodyPr/>
-                    <a:lstStyle/>
-                    <a:p>
-                      <a:pPr indent="0" marL="0">
-                        <a:buNone/>
-                      </a:pPr>
-                      <a:r>
-                        <a:rPr lang="en-US" sz="1100" dirty="0">
-                          <a:solidFill>
-                            <a:srgbClr val="1F2937"/>
-                          </a:solidFill>
-                          <a:latin typeface="Calibri" pitchFamily="34" charset="0"/>
-                          <a:ea typeface="Calibri" pitchFamily="34" charset="-122"/>
-                          <a:cs typeface="Calibri" pitchFamily="34" charset="-120"/>
-                        </a:rPr>
-                        <a:t>Unknown</a:t>
-                      </a:r>
-                      <a:endParaRPr lang="en-US" sz="1100" dirty="0">
-                        <a:latin typeface="Calibri" charset="0"/>
-                        <a:ea typeface="Calibri" charset="0"/>
-                        <a:cs typeface="Calibri" charset="0"/>
-                      </a:endParaRPr>
-                    </a:p>
-                  </a:txBody>
-                  <a:tcPr marL="91440" marR="91440" marT="45720" marB="45720" anchor="ctr">
-                    <a:lnL w="6350" cap="flat" cmpd="sng" algn="ctr">
-                      <a:solidFill>
-                        <a:srgbClr val="CBD5E1"/>
-                      </a:solidFill>
-                      <a:prstDash val="solid"/>
-                      <a:round/>
-                      <a:headEnd type="none" w="med" len="med"/>
-                      <a:tailEnd type="none" w="med" len="med"/>
-                    </a:lnL>
-                    <a:lnR w="6350" cap="flat" cmpd="sng" algn="ctr">
-                      <a:solidFill>
-                        <a:srgbClr val="CBD5E1"/>
-                      </a:solidFill>
-                      <a:prstDash val="solid"/>
-                      <a:round/>
-                      <a:headEnd type="none" w="med" len="med"/>
-                      <a:tailEnd type="none" w="med" len="med"/>
-                    </a:lnR>
-                    <a:lnT w="6350" cap="flat" cmpd="sng" algn="ctr">
-                      <a:solidFill>
-                        <a:srgbClr val="CBD5E1"/>
-                      </a:solidFill>
-                      <a:prstDash val="solid"/>
-                      <a:round/>
-                      <a:headEnd type="none" w="med" len="med"/>
-                      <a:tailEnd type="none" w="med" len="med"/>
-                    </a:lnT>
-                    <a:lnB w="6350" cap="flat" cmpd="sng" algn="ctr">
-                      <a:solidFill>
-                        <a:srgbClr val="CBD5E1"/>
-                      </a:solidFill>
-                      <a:prstDash val="solid"/>
-                      <a:round/>
-                      <a:headEnd type="none" w="med" len="med"/>
-                      <a:tailEnd type="none" w="med" len="med"/>
-                    </a:lnB>
-                  </a:tcPr>
-                </a:tc>
-                <a:tc>
-                  <a:txBody>
-                    <a:bodyPr/>
-                    <a:lstStyle/>
-                    <a:p>
-                      <a:pPr indent="0" marL="0">
-                        <a:buNone/>
-                      </a:pPr>
-                      <a:r>
-                        <a:rPr lang="en-US" sz="1100" dirty="0">
-                          <a:solidFill>
-                            <a:srgbClr val="1F2937"/>
-                          </a:solidFill>
-                          <a:latin typeface="Calibri" pitchFamily="34" charset="0"/>
-                          <a:ea typeface="Calibri" pitchFamily="34" charset="-122"/>
-                          <a:cs typeface="Calibri" pitchFamily="34" charset="-120"/>
-                        </a:rPr>
-                        <a:t>Unknown</a:t>
-                      </a:r>
-                      <a:endParaRPr lang="en-US" sz="1100" dirty="0">
-                        <a:latin typeface="Calibri" charset="0"/>
-                        <a:ea typeface="Calibri" charset="0"/>
-                        <a:cs typeface="Calibri" charset="0"/>
-                      </a:endParaRPr>
-                    </a:p>
-                  </a:txBody>
-                  <a:tcPr marL="91440" marR="91440" marT="45720" marB="45720" anchor="ctr">
-                    <a:lnL w="6350" cap="flat" cmpd="sng" algn="ctr">
-                      <a:solidFill>
-                        <a:srgbClr val="CBD5E1"/>
-                      </a:solidFill>
-                      <a:prstDash val="solid"/>
-                      <a:round/>
-                      <a:headEnd type="none" w="med" len="med"/>
-                      <a:tailEnd type="none" w="med" len="med"/>
-                    </a:lnL>
-                    <a:lnR w="6350" cap="flat" cmpd="sng" algn="ctr">
-                      <a:solidFill>
-                        <a:srgbClr val="CBD5E1"/>
-                      </a:solidFill>
-                      <a:prstDash val="solid"/>
-                      <a:round/>
-                      <a:headEnd type="none" w="med" len="med"/>
-                      <a:tailEnd type="none" w="med" len="med"/>
-                    </a:lnR>
-                    <a:lnT w="6350" cap="flat" cmpd="sng" algn="ctr">
-                      <a:solidFill>
-                        <a:srgbClr val="CBD5E1"/>
-                      </a:solidFill>
-                      <a:prstDash val="solid"/>
-                      <a:round/>
-                      <a:headEnd type="none" w="med" len="med"/>
-                      <a:tailEnd type="none" w="med" len="med"/>
-                    </a:lnT>
-                    <a:lnB w="6350" cap="flat" cmpd="sng" algn="ctr">
-                      <a:solidFill>
-                        <a:srgbClr val="CBD5E1"/>
-                      </a:solidFill>
-                      <a:prstDash val="solid"/>
-                      <a:round/>
-                      <a:headEnd type="none" w="med" len="med"/>
-                      <a:tailEnd type="none" w="med" len="med"/>
-                    </a:lnB>
-                  </a:tcPr>
-                </a:tc>
-                <a:tc>
-                  <a:txBody>
-                    <a:bodyPr/>
-                    <a:lstStyle/>
-                    <a:p>
-                      <a:pPr indent="0" marL="0">
-                        <a:buNone/>
-                      </a:pPr>
-                      <a:r>
-                        <a:rPr lang="en-US" sz="1100" dirty="0">
-                          <a:solidFill>
-                            <a:srgbClr val="1F2937"/>
-                          </a:solidFill>
-                          <a:latin typeface="Calibri" pitchFamily="34" charset="0"/>
-                          <a:ea typeface="Calibri" pitchFamily="34" charset="-122"/>
-                          <a:cs typeface="Calibri" pitchFamily="34" charset="-120"/>
-                        </a:rPr>
-                        <a:t>Not assessed</a:t>
-                      </a:r>
-                      <a:endParaRPr lang="en-US" sz="1100" dirty="0">
-                        <a:latin typeface="Calibri" charset="0"/>
-                        <a:ea typeface="Calibri" charset="0"/>
-                        <a:cs typeface="Calibri" charset="0"/>
-                      </a:endParaRPr>
-                    </a:p>
-                  </a:txBody>
-                  <a:tcPr marL="91440" marR="91440" marT="45720" marB="45720" anchor="ctr">
-                    <a:lnL w="6350" cap="flat" cmpd="sng" algn="ctr">
-                      <a:solidFill>
-                        <a:srgbClr val="CBD5E1"/>
-                      </a:solidFill>
-                      <a:prstDash val="solid"/>
-                      <a:round/>
-                      <a:headEnd type="none" w="med" len="med"/>
-                      <a:tailEnd type="none" w="med" len="med"/>
-                    </a:lnL>
-                    <a:lnR w="6350" cap="flat" cmpd="sng" algn="ctr">
-                      <a:solidFill>
-                        <a:srgbClr val="CBD5E1"/>
-                      </a:solidFill>
-                      <a:prstDash val="solid"/>
-                      <a:round/>
-                      <a:headEnd type="none" w="med" len="med"/>
-                      <a:tailEnd type="none" w="med" len="med"/>
-                    </a:lnR>
-                    <a:lnT w="6350" cap="flat" cmpd="sng" algn="ctr">
-                      <a:solidFill>
-                        <a:srgbClr val="CBD5E1"/>
-                      </a:solidFill>
-                      <a:prstDash val="solid"/>
-                      <a:round/>
-                      <a:headEnd type="none" w="med" len="med"/>
-                      <a:tailEnd type="none" w="med" len="med"/>
-                    </a:lnT>
-                    <a:lnB w="6350" cap="flat" cmpd="sng" algn="ctr">
-                      <a:solidFill>
-                        <a:srgbClr val="CBD5E1"/>
+                        <a:srgbClr val="D3E0D6"/>
                       </a:solidFill>
                       <a:prstDash val="solid"/>
                       <a:round/>
@@ -6008,13 +7857,13 @@
             <a:r>
               <a:rPr lang="en-US" sz="900" dirty="0">
                 <a:solidFill>
-                  <a:srgbClr val="6A7179"/>
-                </a:solidFill>
-                <a:latin typeface="Calibri" pitchFamily="34" charset="0"/>
-                <a:ea typeface="Calibri" pitchFamily="34" charset="-122"/>
-                <a:cs typeface="Calibri" pitchFamily="34" charset="-120"/>
-              </a:rPr>
-              <a:t>Generated by Lyceum from saved data; editable; no AI-written text.  4 / 12</a:t>
+                  <a:srgbClr val="4E6258"/>
+                </a:solidFill>
+                <a:latin typeface="Calibri" pitchFamily="34" charset="0"/>
+                <a:ea typeface="Calibri" pitchFamily="34" charset="-122"/>
+                <a:cs typeface="Calibri" pitchFamily="34" charset="-120"/>
+              </a:rPr>
+              <a:t>Generated by Lyceum from saved data; editable; no AI-written text.  4 / 17</a:t>
             </a:r>
             <a:endParaRPr lang="en-US" sz="900" dirty="0"/>
           </a:p>
@@ -6034,7 +7883,7 @@
     <p:bg>
       <p:bgPr>
         <a:solidFill>
-          <a:srgbClr val="FBFBF8"/>
+          <a:srgbClr val="FFFFFF"/>
         </a:solidFill>
       </p:bgPr>
     </p:bg>
@@ -6081,28 +7930,44 @@
             <a:r>
               <a:rPr lang="en-US" sz="2600" b="1" dirty="0">
                 <a:solidFill>
-                  <a:srgbClr val="14213D"/>
-                </a:solidFill>
-                <a:latin typeface="Georgia" pitchFamily="34" charset="0"/>
-                <a:ea typeface="Georgia" pitchFamily="34" charset="-122"/>
-                <a:cs typeface="Georgia" pitchFamily="34" charset="-120"/>
-              </a:rPr>
-              <a:t>Coverage against targets</a:t>
+                  <a:srgbClr val="0F2A20"/>
+                </a:solidFill>
+                <a:latin typeface="Calibri" pitchFamily="34" charset="0"/>
+                <a:ea typeface="Calibri" pitchFamily="34" charset="-122"/>
+                <a:cs typeface="Calibri" pitchFamily="34" charset="-120"/>
+              </a:rPr>
+              <a:t>The same counts as a picture</a:t>
             </a:r>
             <a:endParaRPr lang="en-US" sz="2600" dirty="0"/>
           </a:p>
         </p:txBody>
       </p:sp>
-      <p:sp>
-        <p:nvSpPr>
-          <p:cNvPr id="3" name="Text 1"/>
+      <p:graphicFrame>
+        <p:nvGraphicFramePr>
+          <p:cNvPr id="3" name="Chart 0" descr=""/>
+          <p:cNvGraphicFramePr/>
+          <p:nvPr/>
+        </p:nvGraphicFramePr>
+        <p:xfrm>
+          <a:off x="457200" y="1143000"/>
+          <a:ext cx="8229600" cy="2971800"/>
+        </p:xfrm>
+        <a:graphic xmlns:a="http://schemas.openxmlformats.org/drawingml/2006/main">
+          <a:graphicData uri="http://schemas.openxmlformats.org/drawingml/2006/chart">
+            <c:chart xmlns:c="http://schemas.openxmlformats.org/drawingml/2006/chart" r:id="rId1"/>
+          </a:graphicData>
+        </a:graphic>
+      </p:graphicFrame>
+      <p:sp>
+        <p:nvSpPr>
+          <p:cNvPr id="4" name="Text 1"/>
           <p:cNvSpPr/>
           <p:nvPr/>
         </p:nvSpPr>
         <p:spPr>
           <a:xfrm>
-            <a:off x="457200" y="1143000"/>
-            <a:ext cx="8229600" cy="914400"/>
+            <a:off x="457200" y="4206240"/>
+            <a:ext cx="8229600" cy="411480"/>
           </a:xfrm>
           <a:prstGeom prst="rect">
             <a:avLst/>
@@ -6111,77 +7976,30 @@
           <a:ln/>
         </p:spPr>
         <p:txBody>
-          <a:bodyPr wrap="square" rtlCol="0" anchor="t">
-            <a:normAutofit/>
-          </a:bodyPr>
+          <a:bodyPr wrap="square" rtlCol="0" anchor="t"/>
           <a:lstStyle/>
           <a:p>
             <a:pPr indent="0" marL="0">
               <a:buNone/>
             </a:pPr>
             <a:r>
-              <a:rPr lang="en-US" sz="1600" dirty="0">
-                <a:solidFill>
-                  <a:srgbClr val="1F2937"/>
-                </a:solidFill>
-                <a:latin typeface="Calibri" pitchFamily="34" charset="0"/>
-                <a:ea typeface="Calibri" pitchFamily="34" charset="-122"/>
-                <a:cs typeface="Calibri" pitchFamily="34" charset="-120"/>
-              </a:rPr>
-              <a:t>Target coverage index: 0% over 1 skills with a reviewed stage and target; 66.7% of the quoted demand weight has an unknown stage or target.</a:t>
-            </a:r>
-            <a:endParaRPr lang="en-US" sz="1600" dirty="0"/>
+              <a:rPr lang="en-US" sz="1100" dirty="0">
+                <a:solidFill>
+                  <a:srgbClr val="4E6258"/>
+                </a:solidFill>
+                <a:latin typeface="Calibri" pitchFamily="34" charset="0"/>
+                <a:ea typeface="Calibri" pitchFamily="34" charset="-122"/>
+                <a:cs typeface="Calibri" pitchFamily="34" charset="-120"/>
+              </a:rPr>
+              <a:t>Postings quoting each skill, out of 9 reviewed postings. The axis ends at the denominator; the intervals are in the table.</a:t>
+            </a:r>
+            <a:endParaRPr lang="en-US" sz="1100" dirty="0"/>
           </a:p>
         </p:txBody>
       </p:sp>
       <p:sp>
         <p:nvSpPr>
-          <p:cNvPr id="4" name="Text 2"/>
-          <p:cNvSpPr/>
-          <p:nvPr/>
-        </p:nvSpPr>
-        <p:spPr>
-          <a:xfrm>
-            <a:off x="457200" y="2148840"/>
-            <a:ext cx="8229600" cy="2423160"/>
-          </a:xfrm>
-          <a:prstGeom prst="rect">
-            <a:avLst/>
-          </a:prstGeom>
-          <a:noFill/>
-          <a:ln/>
-        </p:spPr>
-        <p:txBody>
-          <a:bodyPr wrap="square" rtlCol="0" anchor="t">
-            <a:normAutofit/>
-          </a:bodyPr>
-          <a:lstStyle/>
-          <a:p>
-            <a:pPr marL="342900" indent="-342900">
-              <a:spcAft>
-                <a:spcPts val="600"/>
-              </a:spcAft>
-              <a:buSzPct val="100000"/>
-              <a:buChar char="•"/>
-            </a:pPr>
-            <a:r>
-              <a:rPr lang="en-US" sz="1400" dirty="0">
-                <a:solidFill>
-                  <a:srgbClr val="1F2937"/>
-                </a:solidFill>
-                <a:latin typeface="Calibri" pitchFamily="34" charset="0"/>
-                <a:ea typeface="Calibri" pitchFamily="34" charset="-122"/>
-                <a:cs typeface="Calibri" pitchFamily="34" charset="-120"/>
-              </a:rPr>
-              <a:t>dashboards: Introduced, target Practised. Outcomes: CLO5. Evidence: Week 6 lab covers charts; no dashboard exercise yet..</a:t>
-            </a:r>
-            <a:endParaRPr lang="en-US" sz="1400" dirty="0"/>
-          </a:p>
-        </p:txBody>
-      </p:sp>
-      <p:sp>
-        <p:nvSpPr>
-          <p:cNvPr id="5" name="Text 3"/>
+          <p:cNvPr id="5" name="Text 2"/>
           <p:cNvSpPr/>
           <p:nvPr/>
         </p:nvSpPr>
@@ -6206,13 +8024,13 @@
             <a:r>
               <a:rPr lang="en-US" sz="900" dirty="0">
                 <a:solidFill>
-                  <a:srgbClr val="6A7179"/>
-                </a:solidFill>
-                <a:latin typeface="Calibri" pitchFamily="34" charset="0"/>
-                <a:ea typeface="Calibri" pitchFamily="34" charset="-122"/>
-                <a:cs typeface="Calibri" pitchFamily="34" charset="-120"/>
-              </a:rPr>
-              <a:t>Generated by Lyceum from saved data; editable; no AI-written text.  5 / 12</a:t>
+                  <a:srgbClr val="4E6258"/>
+                </a:solidFill>
+                <a:latin typeface="Calibri" pitchFamily="34" charset="0"/>
+                <a:ea typeface="Calibri" pitchFamily="34" charset="-122"/>
+                <a:cs typeface="Calibri" pitchFamily="34" charset="-120"/>
+              </a:rPr>
+              <a:t>Generated by Lyceum from saved data; editable; no AI-written text.  5 / 17</a:t>
             </a:r>
             <a:endParaRPr lang="en-US" sz="900" dirty="0"/>
           </a:p>
@@ -6232,7 +8050,7 @@
     <p:bg>
       <p:bgPr>
         <a:solidFill>
-          <a:srgbClr val="FBFBF8"/>
+          <a:srgbClr val="FFFFFF"/>
         </a:solidFill>
       </p:bgPr>
     </p:bg>
@@ -6279,13 +8097,13 @@
             <a:r>
               <a:rPr lang="en-US" sz="2600" b="1" dirty="0">
                 <a:solidFill>
-                  <a:srgbClr val="14213D"/>
-                </a:solidFill>
-                <a:latin typeface="Georgia" pitchFamily="34" charset="0"/>
-                <a:ea typeface="Georgia" pitchFamily="34" charset="-122"/>
-                <a:cs typeface="Georgia" pitchFamily="34" charset="-120"/>
-              </a:rPr>
-              <a:t>Options considered</a:t>
+                  <a:srgbClr val="0F2A20"/>
+                </a:solidFill>
+                <a:latin typeface="Calibri" pitchFamily="34" charset="0"/>
+                <a:ea typeface="Calibri" pitchFamily="34" charset="-122"/>
+                <a:cs typeface="Calibri" pitchFamily="34" charset="-120"/>
+              </a:rPr>
+              <a:t>Coverage against targets</a:t>
             </a:r>
             <a:endParaRPr lang="en-US" sz="2600" dirty="0"/>
           </a:p>
@@ -6300,7 +8118,7 @@
         <p:spPr>
           <a:xfrm>
             <a:off x="457200" y="1143000"/>
-            <a:ext cx="8229600" cy="3429000"/>
+            <a:ext cx="8229600" cy="914400"/>
           </a:xfrm>
           <a:prstGeom prst="rect">
             <a:avLst/>
@@ -6314,6 +8132,47 @@
           </a:bodyPr>
           <a:lstStyle/>
           <a:p>
+            <a:pPr indent="0" marL="0">
+              <a:buNone/>
+            </a:pPr>
+            <a:r>
+              <a:rPr lang="en-US" sz="1600" dirty="0">
+                <a:solidFill>
+                  <a:srgbClr val="0F2A20"/>
+                </a:solidFill>
+                <a:latin typeface="Calibri" pitchFamily="34" charset="0"/>
+                <a:ea typeface="Calibri" pitchFamily="34" charset="-122"/>
+                <a:cs typeface="Calibri" pitchFamily="34" charset="-120"/>
+              </a:rPr>
+              <a:t>Target coverage index: 0% over 1 skills with a reviewed stage and target; 77.3% of the quoted demand weight has an unknown stage or target.</a:t>
+            </a:r>
+            <a:endParaRPr lang="en-US" sz="1600" dirty="0"/>
+          </a:p>
+        </p:txBody>
+      </p:sp>
+      <p:sp>
+        <p:nvSpPr>
+          <p:cNvPr id="4" name="Text 2"/>
+          <p:cNvSpPr/>
+          <p:nvPr/>
+        </p:nvSpPr>
+        <p:spPr>
+          <a:xfrm>
+            <a:off x="457200" y="2148840"/>
+            <a:ext cx="8229600" cy="2423160"/>
+          </a:xfrm>
+          <a:prstGeom prst="rect">
+            <a:avLst/>
+          </a:prstGeom>
+          <a:noFill/>
+          <a:ln/>
+        </p:spPr>
+        <p:txBody>
+          <a:bodyPr wrap="square" rtlCol="0" anchor="t">
+            <a:normAutofit/>
+          </a:bodyPr>
+          <a:lstStyle/>
+          <a:p>
             <a:pPr marL="342900" indent="-342900">
               <a:spcAft>
                 <a:spcPts val="600"/>
@@ -6324,63 +8183,21 @@
             <a:r>
               <a:rPr lang="en-US" sz="1400" dirty="0">
                 <a:solidFill>
-                  <a:srgbClr val="1F2937"/>
-                </a:solidFill>
-                <a:latin typeface="Calibri" pitchFamily="34" charset="0"/>
-                <a:ea typeface="Calibri" pitchFamily="34" charset="-122"/>
-                <a:cs typeface="Calibri" pitchFamily="34" charset="-120"/>
-              </a:rPr>
-              <a:t>Keep the course unchanged this term</a:t>
+                  <a:srgbClr val="0F2A20"/>
+                </a:solidFill>
+                <a:latin typeface="Calibri" pitchFamily="34" charset="0"/>
+                <a:ea typeface="Calibri" pitchFamily="34" charset="-122"/>
+                <a:cs typeface="Calibri" pitchFamily="34" charset="-120"/>
+              </a:rPr>
+              <a:t>dashboards: Introduced, target Practised. Outcomes: CLO5. Evidence: Week 6 lab touches this; no dedicated exercise yet..</a:t>
             </a:r>
             <a:endParaRPr lang="en-US" sz="1400" dirty="0"/>
           </a:p>
-          <a:p>
-            <a:pPr marL="342900" indent="-342900">
-              <a:spcAft>
-                <a:spcPts val="600"/>
-              </a:spcAft>
-              <a:buSzPct val="100000"/>
-              <a:buChar char="•"/>
-            </a:pPr>
-            <a:r>
-              <a:rPr lang="en-US" sz="1400" dirty="0">
-                <a:solidFill>
-                  <a:srgbClr val="1F2937"/>
-                </a:solidFill>
-                <a:latin typeface="Calibri" pitchFamily="34" charset="0"/>
-                <a:ea typeface="Calibri" pitchFamily="34" charset="-122"/>
-                <a:cs typeface="Calibri" pitchFamily="34" charset="-120"/>
-              </a:rPr>
-              <a:t>Small refresh within existing hours (recommended)</a:t>
-            </a:r>
-            <a:endParaRPr lang="en-US" sz="1400" dirty="0"/>
-          </a:p>
-          <a:p>
-            <a:pPr marL="342900" indent="-342900">
-              <a:spcAft>
-                <a:spcPts val="600"/>
-              </a:spcAft>
-              <a:buSzPct val="100000"/>
-              <a:buChar char="•"/>
-            </a:pPr>
-            <a:r>
-              <a:rPr lang="en-US" sz="1400" dirty="0">
-                <a:solidFill>
-                  <a:srgbClr val="1F2937"/>
-                </a:solidFill>
-                <a:latin typeface="Calibri" pitchFamily="34" charset="0"/>
-                <a:ea typeface="Calibri" pitchFamily="34" charset="-122"/>
-                <a:cs typeface="Calibri" pitchFamily="34" charset="-120"/>
-              </a:rPr>
-              <a:t>Propose a formal revision</a:t>
-            </a:r>
-            <a:endParaRPr lang="en-US" sz="1400" dirty="0"/>
-          </a:p>
         </p:txBody>
       </p:sp>
       <p:sp>
         <p:nvSpPr>
-          <p:cNvPr id="4" name="Text 2"/>
+          <p:cNvPr id="5" name="Text 3"/>
           <p:cNvSpPr/>
           <p:nvPr/>
         </p:nvSpPr>
@@ -6405,13 +8222,13 @@
             <a:r>
               <a:rPr lang="en-US" sz="900" dirty="0">
                 <a:solidFill>
-                  <a:srgbClr val="6A7179"/>
-                </a:solidFill>
-                <a:latin typeface="Calibri" pitchFamily="34" charset="0"/>
-                <a:ea typeface="Calibri" pitchFamily="34" charset="-122"/>
-                <a:cs typeface="Calibri" pitchFamily="34" charset="-120"/>
-              </a:rPr>
-              <a:t>Generated by Lyceum from saved data; editable; no AI-written text.  6 / 12</a:t>
+                  <a:srgbClr val="4E6258"/>
+                </a:solidFill>
+                <a:latin typeface="Calibri" pitchFamily="34" charset="0"/>
+                <a:ea typeface="Calibri" pitchFamily="34" charset="-122"/>
+                <a:cs typeface="Calibri" pitchFamily="34" charset="-120"/>
+              </a:rPr>
+              <a:t>Generated by Lyceum from saved data; editable; no AI-written text.  6 / 17</a:t>
             </a:r>
             <a:endParaRPr lang="en-US" sz="900" dirty="0"/>
           </a:p>
@@ -6431,7 +8248,7 @@
     <p:bg>
       <p:bgPr>
         <a:solidFill>
-          <a:srgbClr val="FBFBF8"/>
+          <a:srgbClr val="FFFFFF"/>
         </a:solidFill>
       </p:bgPr>
     </p:bg>
@@ -6478,13 +8295,13 @@
             <a:r>
               <a:rPr lang="en-US" sz="2600" b="1" dirty="0">
                 <a:solidFill>
-                  <a:srgbClr val="14213D"/>
-                </a:solidFill>
-                <a:latin typeface="Georgia" pitchFamily="34" charset="0"/>
-                <a:ea typeface="Georgia" pitchFamily="34" charset="-122"/>
-                <a:cs typeface="Georgia" pitchFamily="34" charset="-120"/>
-              </a:rPr>
-              <a:t>Limitations</a:t>
+                  <a:srgbClr val="0F2A20"/>
+                </a:solidFill>
+                <a:latin typeface="Calibri" pitchFamily="34" charset="0"/>
+                <a:ea typeface="Calibri" pitchFamily="34" charset="-122"/>
+                <a:cs typeface="Calibri" pitchFamily="34" charset="-120"/>
+              </a:rPr>
+              <a:t>Options considered</a:t>
             </a:r>
             <a:endParaRPr lang="en-US" sz="2600" dirty="0"/>
           </a:p>
@@ -6523,13 +8340,13 @@
             <a:r>
               <a:rPr lang="en-US" sz="1400" dirty="0">
                 <a:solidFill>
-                  <a:srgbClr val="1F2937"/>
-                </a:solidFill>
-                <a:latin typeface="Calibri" pitchFamily="34" charset="0"/>
-                <a:ea typeface="Calibri" pitchFamily="34" charset="-122"/>
-                <a:cs typeface="Calibri" pitchFamily="34" charset="-120"/>
-              </a:rPr>
-              <a:t>A convenience sample chosen by the lecturer; shares and intervals describe the recorded set, not the labour market.</a:t>
+                  <a:srgbClr val="0F2A20"/>
+                </a:solidFill>
+                <a:latin typeface="Calibri" pitchFamily="34" charset="0"/>
+                <a:ea typeface="Calibri" pitchFamily="34" charset="-122"/>
+                <a:cs typeface="Calibri" pitchFamily="34" charset="-120"/>
+              </a:rPr>
+              <a:t>Keep the course unchanged this term</a:t>
             </a:r>
             <a:endParaRPr lang="en-US" sz="1400" dirty="0"/>
           </a:p>
@@ -6544,13 +8361,13 @@
             <a:r>
               <a:rPr lang="en-US" sz="1400" dirty="0">
                 <a:solidFill>
-                  <a:srgbClr val="1F2937"/>
-                </a:solidFill>
-                <a:latin typeface="Calibri" pitchFamily="34" charset="0"/>
-                <a:ea typeface="Calibri" pitchFamily="34" charset="-122"/>
-                <a:cs typeface="Calibri" pitchFamily="34" charset="-120"/>
-              </a:rPr>
-              <a:t>Coverage stages are reviewed judgement, not mastery.</a:t>
+                  <a:srgbClr val="0F2A20"/>
+                </a:solidFill>
+                <a:latin typeface="Calibri" pitchFamily="34" charset="0"/>
+                <a:ea typeface="Calibri" pitchFamily="34" charset="-122"/>
+                <a:cs typeface="Calibri" pitchFamily="34" charset="-120"/>
+              </a:rPr>
+              <a:t>Small refresh within existing hours (recommended)</a:t>
             </a:r>
             <a:endParaRPr lang="en-US" sz="1400" dirty="0"/>
           </a:p>
@@ -6565,13 +8382,13 @@
             <a:r>
               <a:rPr lang="en-US" sz="1400" dirty="0">
                 <a:solidFill>
-                  <a:srgbClr val="1F2937"/>
-                </a:solidFill>
-                <a:latin typeface="Calibri" pitchFamily="34" charset="0"/>
-                <a:ea typeface="Calibri" pitchFamily="34" charset="-122"/>
-                <a:cs typeface="Calibri" pitchFamily="34" charset="-120"/>
-              </a:rPr>
-              <a:t>No learning impact is estimated. Nothing in this brief changes the course by itself.</a:t>
+                  <a:srgbClr val="0F2A20"/>
+                </a:solidFill>
+                <a:latin typeface="Calibri" pitchFamily="34" charset="0"/>
+                <a:ea typeface="Calibri" pitchFamily="34" charset="-122"/>
+                <a:cs typeface="Calibri" pitchFamily="34" charset="-120"/>
+              </a:rPr>
+              <a:t>Propose a formal revision</a:t>
             </a:r>
             <a:endParaRPr lang="en-US" sz="1400" dirty="0"/>
           </a:p>
@@ -6604,13 +8421,13 @@
             <a:r>
               <a:rPr lang="en-US" sz="900" dirty="0">
                 <a:solidFill>
-                  <a:srgbClr val="6A7179"/>
-                </a:solidFill>
-                <a:latin typeface="Calibri" pitchFamily="34" charset="0"/>
-                <a:ea typeface="Calibri" pitchFamily="34" charset="-122"/>
-                <a:cs typeface="Calibri" pitchFamily="34" charset="-120"/>
-              </a:rPr>
-              <a:t>Generated by Lyceum from saved data; editable; no AI-written text.  7 / 12</a:t>
+                  <a:srgbClr val="4E6258"/>
+                </a:solidFill>
+                <a:latin typeface="Calibri" pitchFamily="34" charset="0"/>
+                <a:ea typeface="Calibri" pitchFamily="34" charset="-122"/>
+                <a:cs typeface="Calibri" pitchFamily="34" charset="-120"/>
+              </a:rPr>
+              <a:t>Generated by Lyceum from saved data; editable; no AI-written text.  7 / 17</a:t>
             </a:r>
             <a:endParaRPr lang="en-US" sz="900" dirty="0"/>
           </a:p>
@@ -6630,7 +8447,7 @@
     <p:bg>
       <p:bgPr>
         <a:solidFill>
-          <a:srgbClr val="FBFBF8"/>
+          <a:srgbClr val="FFFFFF"/>
         </a:solidFill>
       </p:bgPr>
     </p:bg>
@@ -6677,13 +8494,13 @@
             <a:r>
               <a:rPr lang="en-US" sz="2600" b="1" dirty="0">
                 <a:solidFill>
-                  <a:srgbClr val="14213D"/>
-                </a:solidFill>
-                <a:latin typeface="Georgia" pitchFamily="34" charset="0"/>
-                <a:ea typeface="Georgia" pitchFamily="34" charset="-122"/>
-                <a:cs typeface="Georgia" pitchFamily="34" charset="-120"/>
-              </a:rPr>
-              <a:t>Receipt: Data Analyst</a:t>
+                  <a:srgbClr val="0F2A20"/>
+                </a:solidFill>
+                <a:latin typeface="Calibri" pitchFamily="34" charset="0"/>
+                <a:ea typeface="Calibri" pitchFamily="34" charset="-122"/>
+                <a:cs typeface="Calibri" pitchFamily="34" charset="-120"/>
+              </a:rPr>
+              <a:t>Limitations</a:t>
             </a:r>
             <a:endParaRPr lang="en-US" sz="2600" dirty="0"/>
           </a:p>
@@ -6722,13 +8539,13 @@
             <a:r>
               <a:rPr lang="en-US" sz="1400" dirty="0">
                 <a:solidFill>
-                  <a:srgbClr val="1F2937"/>
-                </a:solidFill>
-                <a:latin typeface="Calibri" pitchFamily="34" charset="0"/>
-                <a:ea typeface="Calibri" pitchFamily="34" charset="-122"/>
-                <a:cs typeface="Calibri" pitchFamily="34" charset="-120"/>
-              </a:rPr>
-              <a:t>Stripe. Published 2023-11-01. Recorded 2026-07-01T10:00:00Z from Saved sample: real postings from the stripe Greenhouse board, retrieved 2026-10-09 and truncated for the demo.</a:t>
+                  <a:srgbClr val="0F2A20"/>
+                </a:solidFill>
+                <a:latin typeface="Calibri" pitchFamily="34" charset="0"/>
+                <a:ea typeface="Calibri" pitchFamily="34" charset="-122"/>
+                <a:cs typeface="Calibri" pitchFamily="34" charset="-120"/>
+              </a:rPr>
+              <a:t>A convenience sample chosen by the lecturer; shares and intervals describe the recorded set, not the labour market.</a:t>
             </a:r>
             <a:endParaRPr lang="en-US" sz="1400" dirty="0"/>
           </a:p>
@@ -6743,13 +8560,13 @@
             <a:r>
               <a:rPr lang="en-US" sz="1400" dirty="0">
                 <a:solidFill>
-                  <a:srgbClr val="1F2937"/>
-                </a:solidFill>
-                <a:latin typeface="Calibri" pitchFamily="34" charset="0"/>
-                <a:ea typeface="Calibri" pitchFamily="34" charset="-122"/>
-                <a:cs typeface="Calibri" pitchFamily="34" charset="-120"/>
-              </a:rPr>
-              <a:t>Link: https://stripe.com/jobs/search?gh_jid=5416444</a:t>
+                  <a:srgbClr val="0F2A20"/>
+                </a:solidFill>
+                <a:latin typeface="Calibri" pitchFamily="34" charset="0"/>
+                <a:ea typeface="Calibri" pitchFamily="34" charset="-122"/>
+                <a:cs typeface="Calibri" pitchFamily="34" charset="-120"/>
+              </a:rPr>
+              <a:t>Coverage stages are reviewed judgement, not mastery.</a:t>
             </a:r>
             <a:endParaRPr lang="en-US" sz="1400" dirty="0"/>
           </a:p>
@@ -6764,55 +8581,13 @@
             <a:r>
               <a:rPr lang="en-US" sz="1400" dirty="0">
                 <a:solidFill>
-                  <a:srgbClr val="1F2937"/>
-                </a:solidFill>
-                <a:latin typeface="Calibri" pitchFamily="34" charset="0"/>
-                <a:ea typeface="Calibri" pitchFamily="34" charset="-122"/>
-                <a:cs typeface="Calibri" pitchFamily="34" charset="-120"/>
-              </a:rPr>
-              <a:t>"- Proficiency in SQL" (SQL, unclear)</a:t>
-            </a:r>
-            <a:endParaRPr lang="en-US" sz="1400" dirty="0"/>
-          </a:p>
-          <a:p>
-            <a:pPr marL="342900" indent="-342900">
-              <a:spcAft>
-                <a:spcPts val="600"/>
-              </a:spcAft>
-              <a:buSzPct val="100000"/>
-              <a:buChar char="•"/>
-            </a:pPr>
-            <a:r>
-              <a:rPr lang="en-US" sz="1400" dirty="0">
-                <a:solidFill>
-                  <a:srgbClr val="1F2937"/>
-                </a:solidFill>
-                <a:latin typeface="Calibri" pitchFamily="34" charset="0"/>
-                <a:ea typeface="Calibri" pitchFamily="34" charset="-122"/>
-                <a:cs typeface="Calibri" pitchFamily="34" charset="-120"/>
-              </a:rPr>
-              <a:t>"You'll build metrics, scalable data pipelines, dashboards, and reports to inform and run the business." (dashboards, unclear)</a:t>
-            </a:r>
-            <a:endParaRPr lang="en-US" sz="1400" dirty="0"/>
-          </a:p>
-          <a:p>
-            <a:pPr marL="342900" indent="-342900">
-              <a:spcAft>
-                <a:spcPts val="600"/>
-              </a:spcAft>
-              <a:buSzPct val="100000"/>
-              <a:buChar char="•"/>
-            </a:pPr>
-            <a:r>
-              <a:rPr lang="en-US" sz="1400" dirty="0">
-                <a:solidFill>
-                  <a:srgbClr val="1F2937"/>
-                </a:solidFill>
-                <a:latin typeface="Calibri" pitchFamily="34" charset="0"/>
-                <a:ea typeface="Calibri" pitchFamily="34" charset="-122"/>
-                <a:cs typeface="Calibri" pitchFamily="34" charset="-120"/>
-              </a:rPr>
-              <a:t>"- Ability to design, implement, and maintain data pipelines and dashboards to generate actionable insights based on stakeholder requirements" (stakeholders, unclear)</a:t>
+                  <a:srgbClr val="0F2A20"/>
+                </a:solidFill>
+                <a:latin typeface="Calibri" pitchFamily="34" charset="0"/>
+                <a:ea typeface="Calibri" pitchFamily="34" charset="-122"/>
+                <a:cs typeface="Calibri" pitchFamily="34" charset="-120"/>
+              </a:rPr>
+              <a:t>No learning impact is estimated. Nothing in this brief changes the course by itself.</a:t>
             </a:r>
             <a:endParaRPr lang="en-US" sz="1400" dirty="0"/>
           </a:p>
@@ -6845,13 +8620,13 @@
             <a:r>
               <a:rPr lang="en-US" sz="900" dirty="0">
                 <a:solidFill>
-                  <a:srgbClr val="6A7179"/>
-                </a:solidFill>
-                <a:latin typeface="Calibri" pitchFamily="34" charset="0"/>
-                <a:ea typeface="Calibri" pitchFamily="34" charset="-122"/>
-                <a:cs typeface="Calibri" pitchFamily="34" charset="-120"/>
-              </a:rPr>
-              <a:t>Generated by Lyceum from saved data; editable; no AI-written text.  8 / 12</a:t>
+                  <a:srgbClr val="4E6258"/>
+                </a:solidFill>
+                <a:latin typeface="Calibri" pitchFamily="34" charset="0"/>
+                <a:ea typeface="Calibri" pitchFamily="34" charset="-122"/>
+                <a:cs typeface="Calibri" pitchFamily="34" charset="-120"/>
+              </a:rPr>
+              <a:t>Generated by Lyceum from saved data; editable; no AI-written text.  8 / 17</a:t>
             </a:r>
             <a:endParaRPr lang="en-US" sz="900" dirty="0"/>
           </a:p>
@@ -6871,7 +8646,7 @@
     <p:bg>
       <p:bgPr>
         <a:solidFill>
-          <a:srgbClr val="FBFBF8"/>
+          <a:srgbClr val="FFFFFF"/>
         </a:solidFill>
       </p:bgPr>
     </p:bg>
@@ -6918,13 +8693,13 @@
             <a:r>
               <a:rPr lang="en-US" sz="2600" b="1" dirty="0">
                 <a:solidFill>
-                  <a:srgbClr val="14213D"/>
-                </a:solidFill>
-                <a:latin typeface="Georgia" pitchFamily="34" charset="0"/>
-                <a:ea typeface="Georgia" pitchFamily="34" charset="-122"/>
-                <a:cs typeface="Georgia" pitchFamily="34" charset="-120"/>
-              </a:rPr>
-              <a:t>Receipt: Data Analyst, Global Growth</a:t>
+                  <a:srgbClr val="0F2A20"/>
+                </a:solidFill>
+                <a:latin typeface="Calibri" pitchFamily="34" charset="0"/>
+                <a:ea typeface="Calibri" pitchFamily="34" charset="-122"/>
+                <a:cs typeface="Calibri" pitchFamily="34" charset="-120"/>
+              </a:rPr>
+              <a:t>Receipt: Data Analyst</a:t>
             </a:r>
             <a:endParaRPr lang="en-US" sz="2600" dirty="0"/>
           </a:p>
@@ -6963,13 +8738,13 @@
             <a:r>
               <a:rPr lang="en-US" sz="1400" dirty="0">
                 <a:solidFill>
-                  <a:srgbClr val="1F2937"/>
-                </a:solidFill>
-                <a:latin typeface="Calibri" pitchFamily="34" charset="0"/>
-                <a:ea typeface="Calibri" pitchFamily="34" charset="-122"/>
-                <a:cs typeface="Calibri" pitchFamily="34" charset="-120"/>
-              </a:rPr>
-              <a:t>Stripe. Published 2026-09-25. Recorded 2026-07-01T10:00:00Z from Saved sample: real postings from the stripe Greenhouse board, retrieved 2026-10-09 and truncated for the demo.</a:t>
+                  <a:srgbClr val="0F2A20"/>
+                </a:solidFill>
+                <a:latin typeface="Calibri" pitchFamily="34" charset="0"/>
+                <a:ea typeface="Calibri" pitchFamily="34" charset="-122"/>
+                <a:cs typeface="Calibri" pitchFamily="34" charset="-120"/>
+              </a:rPr>
+              <a:t>Stripe. Published 2023-11-01. Recorded 2026-07-01T10:00:00Z from Saved sample: real postings from the stripe Greenhouse board, retrieved 2026-10-09 and truncated for the demo.</a:t>
             </a:r>
             <a:endParaRPr lang="en-US" sz="1400" dirty="0"/>
           </a:p>
@@ -6984,13 +8759,13 @@
             <a:r>
               <a:rPr lang="en-US" sz="1400" dirty="0">
                 <a:solidFill>
-                  <a:srgbClr val="1F2937"/>
-                </a:solidFill>
-                <a:latin typeface="Calibri" pitchFamily="34" charset="0"/>
-                <a:ea typeface="Calibri" pitchFamily="34" charset="-122"/>
-                <a:cs typeface="Calibri" pitchFamily="34" charset="-120"/>
-              </a:rPr>
-              <a:t>Link: https://stripe.com/jobs/search?gh_jid=8230296</a:t>
+                  <a:srgbClr val="0F2A20"/>
+                </a:solidFill>
+                <a:latin typeface="Calibri" pitchFamily="34" charset="0"/>
+                <a:ea typeface="Calibri" pitchFamily="34" charset="-122"/>
+                <a:cs typeface="Calibri" pitchFamily="34" charset="-120"/>
+              </a:rPr>
+              <a:t>Link: https://stripe.com/jobs/search?gh_jid=5416444</a:t>
             </a:r>
             <a:endParaRPr lang="en-US" sz="1400" dirty="0"/>
           </a:p>
@@ -7005,13 +8780,13 @@
             <a:r>
               <a:rPr lang="en-US" sz="1400" dirty="0">
                 <a:solidFill>
-                  <a:srgbClr val="1F2937"/>
-                </a:solidFill>
-                <a:latin typeface="Calibri" pitchFamily="34" charset="0"/>
-                <a:ea typeface="Calibri" pitchFamily="34" charset="-122"/>
-                <a:cs typeface="Calibri" pitchFamily="34" charset="-120"/>
-              </a:rPr>
-              <a:t>"From building scalable dashboards to crafting compelling data narratives, your insights will directly shape how we run and grow the business." (dashboards, unclear)</a:t>
+                  <a:srgbClr val="0F2A20"/>
+                </a:solidFill>
+                <a:latin typeface="Calibri" pitchFamily="34" charset="0"/>
+                <a:ea typeface="Calibri" pitchFamily="34" charset="-122"/>
+                <a:cs typeface="Calibri" pitchFamily="34" charset="-120"/>
+              </a:rPr>
+              <a:t>"- Proficiency in SQL" (SQL, unclear)</a:t>
             </a:r>
             <a:endParaRPr lang="en-US" sz="1400" dirty="0"/>
           </a:p>
@@ -7026,13 +8801,13 @@
             <a:r>
               <a:rPr lang="en-US" sz="1400" dirty="0">
                 <a:solidFill>
-                  <a:srgbClr val="1F2937"/>
-                </a:solidFill>
-                <a:latin typeface="Calibri" pitchFamily="34" charset="0"/>
-                <a:ea typeface="Calibri" pitchFamily="34" charset="-122"/>
-                <a:cs typeface="Calibri" pitchFamily="34" charset="-120"/>
-              </a:rPr>
-              <a:t>"- Build and maintain the metric definitions, metadata, and business context that enable AI agents to help stakeholders explore trusted data and answer business questions independently" (stakeholders, unclear)</a:t>
+                  <a:srgbClr val="0F2A20"/>
+                </a:solidFill>
+                <a:latin typeface="Calibri" pitchFamily="34" charset="0"/>
+                <a:ea typeface="Calibri" pitchFamily="34" charset="-122"/>
+                <a:cs typeface="Calibri" pitchFamily="34" charset="-120"/>
+              </a:rPr>
+              <a:t>"You'll build metrics, scalable data pipelines, dashboards, and reports to inform and run the business." (dashboards, unclear)</a:t>
             </a:r>
             <a:endParaRPr lang="en-US" sz="1400" dirty="0"/>
           </a:p>
@@ -7047,13 +8822,13 @@
             <a:r>
               <a:rPr lang="en-US" sz="1400" dirty="0">
                 <a:solidFill>
-                  <a:srgbClr val="1F2937"/>
-                </a:solidFill>
-                <a:latin typeface="Calibri" pitchFamily="34" charset="0"/>
-                <a:ea typeface="Calibri" pitchFamily="34" charset="-122"/>
-                <a:cs typeface="Calibri" pitchFamily="34" charset="-120"/>
-              </a:rPr>
-              <a:t>"We're looking for a data analyst with a passion for analyzing data, statistical models, and running experiments to drive impact." (statistics, unclear)</a:t>
+                  <a:srgbClr val="0F2A20"/>
+                </a:solidFill>
+                <a:latin typeface="Calibri" pitchFamily="34" charset="0"/>
+                <a:ea typeface="Calibri" pitchFamily="34" charset="-122"/>
+                <a:cs typeface="Calibri" pitchFamily="34" charset="-120"/>
+              </a:rPr>
+              <a:t>"- Ability to design, implement, and maintain data pipelines and dashboards to generate actionable insights based on stakeholder requirements" (stakeholders, unclear)</a:t>
             </a:r>
             <a:endParaRPr lang="en-US" sz="1400" dirty="0"/>
           </a:p>
@@ -7086,13 +8861,13 @@
             <a:r>
               <a:rPr lang="en-US" sz="900" dirty="0">
                 <a:solidFill>
-                  <a:srgbClr val="6A7179"/>
-                </a:solidFill>
-                <a:latin typeface="Calibri" pitchFamily="34" charset="0"/>
-                <a:ea typeface="Calibri" pitchFamily="34" charset="-122"/>
-                <a:cs typeface="Calibri" pitchFamily="34" charset="-120"/>
-              </a:rPr>
-              <a:t>Generated by Lyceum from saved data; editable; no AI-written text.  9 / 12</a:t>
+                  <a:srgbClr val="4E6258"/>
+                </a:solidFill>
+                <a:latin typeface="Calibri" pitchFamily="34" charset="0"/>
+                <a:ea typeface="Calibri" pitchFamily="34" charset="-122"/>
+                <a:cs typeface="Calibri" pitchFamily="34" charset="-120"/>
+              </a:rPr>
+              <a:t>Generated by Lyceum from saved data; editable; no AI-written text.  9 / 17</a:t>
             </a:r>
             <a:endParaRPr lang="en-US" sz="900" dirty="0"/>
           </a:p>

--- a/docs/presentation/sample-CS310-meeting-brief.pptx
+++ b/docs/presentation/sample-CS310-meeting-brief.pptx
@@ -2657,7 +2657,7 @@
                 <a:ea typeface="Calibri" pitchFamily="34" charset="-122"/>
                 <a:cs typeface="Calibri" pitchFamily="34" charset="-120"/>
               </a:rPr>
-              <a:t>Prepared by Dr Sobri on 2026-07-01T10:00:00Z.</a:t>
+              <a:t>Prepared by Dr Sobri on 2026-10-22T10:00:00Z.</a:t>
             </a:r>
             <a:endParaRPr lang="en-US" sz="1400" dirty="0"/>
           </a:p>
@@ -2831,7 +2831,7 @@
                 <a:ea typeface="Calibri" pitchFamily="34" charset="-122"/>
                 <a:cs typeface="Calibri" pitchFamily="34" charset="-120"/>
               </a:rPr>
-              <a:t>Stripe. Published 2026-09-25. Recorded 2026-07-01T10:00:00Z from Saved sample: real postings from the stripe Greenhouse board, retrieved 2026-10-09 and truncated for the demo.</a:t>
+              <a:t>Stripe. Published 2026-09-25. Recorded 2026-10-22T10:00:00Z from Saved sample: real postings from the stripe Greenhouse board, retrieved 2026-10-09 and truncated for the demo.</a:t>
             </a:r>
             <a:endParaRPr lang="en-US" sz="1400" dirty="0"/>
           </a:p>
@@ -3072,7 +3072,7 @@
                 <a:ea typeface="Calibri" pitchFamily="34" charset="-122"/>
                 <a:cs typeface="Calibri" pitchFamily="34" charset="-120"/>
               </a:rPr>
-              <a:t>Stripe. Published 2026-10-01. Recorded 2026-07-01T10:00:00Z from Saved sample: real postings from the stripe Greenhouse board, retrieved 2026-10-09 and truncated for the demo.</a:t>
+              <a:t>Stripe. Published 2026-10-01. Recorded 2026-10-22T10:00:00Z from Saved sample: real postings from the stripe Greenhouse board, retrieved 2026-10-09 and truncated for the demo.</a:t>
             </a:r>
             <a:endParaRPr lang="en-US" sz="1400" dirty="0"/>
           </a:p>
@@ -3271,7 +3271,7 @@
                 <a:ea typeface="Calibri" pitchFamily="34" charset="-122"/>
                 <a:cs typeface="Calibri" pitchFamily="34" charset="-120"/>
               </a:rPr>
-              <a:t>Stripe. Published 2026-09-10. Recorded 2026-07-01T10:00:00Z from Saved sample: real postings from the stripe Greenhouse board, retrieved 2026-10-09 and truncated for the demo.</a:t>
+              <a:t>Stripe. Published 2026-09-10. Recorded 2026-10-22T10:00:00Z from Saved sample: real postings from the stripe Greenhouse board, retrieved 2026-10-09 and truncated for the demo.</a:t>
             </a:r>
             <a:endParaRPr lang="en-US" sz="1400" dirty="0"/>
           </a:p>
@@ -3533,7 +3533,7 @@
                 <a:ea typeface="Calibri" pitchFamily="34" charset="-122"/>
                 <a:cs typeface="Calibri" pitchFamily="34" charset="-120"/>
               </a:rPr>
-              <a:t>Stripe. Published 2026-07-13. Recorded 2026-07-01T10:00:00Z from Saved sample: real postings from the stripe Greenhouse board, retrieved 2026-10-09 and truncated for the demo.</a:t>
+              <a:t>Stripe. Published 2026-07-13. Recorded 2026-10-22T10:00:00Z from Saved sample: real postings from the stripe Greenhouse board, retrieved 2026-10-09 and truncated for the demo.</a:t>
             </a:r>
             <a:endParaRPr lang="en-US" sz="1400" dirty="0"/>
           </a:p>
@@ -3732,7 +3732,7 @@
                 <a:ea typeface="Calibri" pitchFamily="34" charset="-122"/>
                 <a:cs typeface="Calibri" pitchFamily="34" charset="-120"/>
               </a:rPr>
-              <a:t>Stripe. Published 2026-04-22. Recorded 2026-07-01T10:00:00Z from Saved sample: real postings from the stripe Greenhouse board, retrieved 2026-10-09 and truncated for the demo.</a:t>
+              <a:t>Stripe. Published 2026-04-22. Recorded 2026-10-22T10:00:00Z from Saved sample: real postings from the stripe Greenhouse board, retrieved 2026-10-09 and truncated for the demo.</a:t>
             </a:r>
             <a:endParaRPr lang="en-US" sz="1400" dirty="0"/>
           </a:p>
@@ -3973,7 +3973,7 @@
                 <a:ea typeface="Calibri" pitchFamily="34" charset="-122"/>
                 <a:cs typeface="Calibri" pitchFamily="34" charset="-120"/>
               </a:rPr>
-              <a:t>Stripe. Published 2026-05-14. Recorded 2026-07-01T10:00:00Z from Saved sample: real postings from the stripe Greenhouse board, retrieved 2026-10-09 and truncated for the demo.</a:t>
+              <a:t>Stripe. Published 2026-05-14. Recorded 2026-10-22T10:00:00Z from Saved sample: real postings from the stripe Greenhouse board, retrieved 2026-10-09 and truncated for the demo.</a:t>
             </a:r>
             <a:endParaRPr lang="en-US" sz="1400" dirty="0"/>
           </a:p>
@@ -4172,7 +4172,7 @@
                 <a:ea typeface="Calibri" pitchFamily="34" charset="-122"/>
                 <a:cs typeface="Calibri" pitchFamily="34" charset="-120"/>
               </a:rPr>
-              <a:t>Stripe. Published 2026-09-22. Recorded 2026-07-01T10:00:00Z from Saved sample: real postings from the stripe Greenhouse board, retrieved 2026-10-09 and truncated for the demo.</a:t>
+              <a:t>Stripe. Published 2026-09-22. Recorded 2026-10-22T10:00:00Z from Saved sample: real postings from the stripe Greenhouse board, retrieved 2026-10-09 and truncated for the demo.</a:t>
             </a:r>
             <a:endParaRPr lang="en-US" sz="1400" dirty="0"/>
           </a:p>
@@ -4413,7 +4413,7 @@
                 <a:ea typeface="Calibri" pitchFamily="34" charset="-122"/>
                 <a:cs typeface="Calibri" pitchFamily="34" charset="-120"/>
               </a:rPr>
-              <a:t>Stripe. Published 2024-04-30. Recorded 2026-07-01T10:00:00Z from Saved sample: real postings from the stripe Greenhouse board, retrieved 2026-10-09 and truncated for the demo.</a:t>
+              <a:t>Stripe. Published 2024-04-30. Recorded 2026-10-22T10:00:00Z from Saved sample: real postings from the stripe Greenhouse board, retrieved 2026-10-09 and truncated for the demo.</a:t>
             </a:r>
             <a:endParaRPr lang="en-US" sz="1400" dirty="0"/>
           </a:p>
@@ -8744,7 +8744,7 @@
                 <a:ea typeface="Calibri" pitchFamily="34" charset="-122"/>
                 <a:cs typeface="Calibri" pitchFamily="34" charset="-120"/>
               </a:rPr>
-              <a:t>Stripe. Published 2023-11-01. Recorded 2026-07-01T10:00:00Z from Saved sample: real postings from the stripe Greenhouse board, retrieved 2026-10-09 and truncated for the demo.</a:t>
+              <a:t>Stripe. Published 2023-11-01. Recorded 2026-10-22T10:00:00Z from Saved sample: real postings from the stripe Greenhouse board, retrieved 2026-10-09 and truncated for the demo.</a:t>
             </a:r>
             <a:endParaRPr lang="en-US" sz="1400" dirty="0"/>
           </a:p>
